--- a/courses/downloads/temp/Database_Lec1.pptx
+++ b/courses/downloads/temp/Database_Lec1.pptx
@@ -6726,7 +6726,1030 @@
           <a:bodyPr/>
           <a:lstStyle/>
           <a:p>
-            <a:endParaRPr lang="en-US" altLang="en-US">
+            <a:pPr algn="r" rtl="1"/>
+            <a:r>
+              <a:rPr lang="en-US" dirty="0" err="1"/>
+              <a:t>کاربر</a:t>
+            </a:r>
+            <a:r>
+              <a:rPr lang="en-US" dirty="0"/>
+              <a:t> </a:t>
+            </a:r>
+            <a:r>
+              <a:rPr lang="en-US" dirty="0" err="1"/>
+              <a:t>این</a:t>
+            </a:r>
+            <a:r>
+              <a:rPr lang="en-US" dirty="0"/>
+              <a:t> </a:t>
+            </a:r>
+            <a:r>
+              <a:rPr lang="en-US" dirty="0" err="1"/>
+              <a:t>پرس‌وجو</a:t>
+            </a:r>
+            <a:r>
+              <a:rPr lang="en-US" dirty="0"/>
+              <a:t> </a:t>
+            </a:r>
+            <a:r>
+              <a:rPr lang="en-US" dirty="0" err="1"/>
+              <a:t>را</a:t>
+            </a:r>
+            <a:r>
+              <a:rPr lang="en-US" dirty="0"/>
+              <a:t> </a:t>
+            </a:r>
+            <a:r>
+              <a:rPr lang="en-US" dirty="0" err="1"/>
+              <a:t>اجرا</a:t>
+            </a:r>
+            <a:r>
+              <a:rPr lang="en-US" dirty="0"/>
+              <a:t> </a:t>
+            </a:r>
+            <a:r>
+              <a:rPr lang="en-US" dirty="0" err="1"/>
+              <a:t>می‌کند</a:t>
+            </a:r>
+            <a:r>
+              <a:rPr lang="en-US" dirty="0"/>
+              <a:t>:</a:t>
+            </a:r>
+            <a:br>
+              <a:rPr lang="fa-IR" dirty="0"/>
+            </a:br>
+            <a:r>
+              <a:rPr lang="en-US" dirty="0"/>
+              <a:t>SELECT Name FROM Students WHERE Major = 'Computer Engineering' AND GPA &gt; 18;</a:t>
+            </a:r>
+            <a:endParaRPr lang="fa-IR" dirty="0"/>
+          </a:p>
+          <a:p>
+            <a:pPr algn="r" rtl="1"/>
+            <a:r>
+              <a:rPr lang="en-US" dirty="0" err="1"/>
+              <a:t>کاربر</a:t>
+            </a:r>
+            <a:r>
+              <a:rPr lang="en-US" dirty="0"/>
+              <a:t> </a:t>
+            </a:r>
+            <a:r>
+              <a:rPr lang="en-US" dirty="0" err="1"/>
+              <a:t>فقط</a:t>
+            </a:r>
+            <a:r>
+              <a:rPr lang="en-US" dirty="0"/>
+              <a:t> </a:t>
+            </a:r>
+            <a:r>
+              <a:rPr lang="en-US" dirty="0" err="1"/>
+              <a:t>می‌گوید</a:t>
+            </a:r>
+            <a:r>
+              <a:rPr lang="en-US" dirty="0"/>
+              <a:t>: </a:t>
+            </a:r>
+            <a:r>
+              <a:rPr lang="en-US" b="1" dirty="0"/>
+              <a:t>«</a:t>
+            </a:r>
+            <a:r>
+              <a:rPr lang="en-US" b="1" dirty="0" err="1"/>
+              <a:t>نام</a:t>
+            </a:r>
+            <a:r>
+              <a:rPr lang="en-US" b="1" dirty="0"/>
+              <a:t> </a:t>
+            </a:r>
+            <a:r>
+              <a:rPr lang="en-US" b="1" dirty="0" err="1"/>
+              <a:t>دانشجویان</a:t>
+            </a:r>
+            <a:r>
+              <a:rPr lang="en-US" b="1" dirty="0"/>
+              <a:t> </a:t>
+            </a:r>
+            <a:r>
+              <a:rPr lang="en-US" b="1" dirty="0" err="1"/>
+              <a:t>مهندسی</a:t>
+            </a:r>
+            <a:r>
+              <a:rPr lang="en-US" b="1" dirty="0"/>
+              <a:t> </a:t>
+            </a:r>
+            <a:r>
+              <a:rPr lang="en-US" b="1" dirty="0" err="1"/>
+              <a:t>کامپیوتر</a:t>
+            </a:r>
+            <a:r>
+              <a:rPr lang="en-US" b="1" dirty="0"/>
+              <a:t> </a:t>
+            </a:r>
+            <a:r>
+              <a:rPr lang="en-US" b="1" dirty="0" err="1"/>
+              <a:t>با</a:t>
+            </a:r>
+            <a:r>
+              <a:rPr lang="en-US" b="1" dirty="0"/>
+              <a:t> </a:t>
+            </a:r>
+            <a:r>
+              <a:rPr lang="en-US" b="1" dirty="0" err="1"/>
+              <a:t>معدل</a:t>
+            </a:r>
+            <a:r>
+              <a:rPr lang="en-US" b="1" dirty="0"/>
+              <a:t> </a:t>
+            </a:r>
+            <a:r>
+              <a:rPr lang="en-US" b="1" dirty="0" err="1"/>
+              <a:t>بالاتر</a:t>
+            </a:r>
+            <a:r>
+              <a:rPr lang="en-US" b="1" dirty="0"/>
+              <a:t> </a:t>
+            </a:r>
+            <a:r>
+              <a:rPr lang="en-US" b="1" dirty="0" err="1"/>
+              <a:t>از</a:t>
+            </a:r>
+            <a:r>
+              <a:rPr lang="en-US" b="1" dirty="0"/>
+              <a:t> ۱۸ </a:t>
+            </a:r>
+            <a:r>
+              <a:rPr lang="en-US" b="1" dirty="0" err="1"/>
+              <a:t>را</a:t>
+            </a:r>
+            <a:r>
+              <a:rPr lang="en-US" b="1" dirty="0"/>
+              <a:t> </a:t>
+            </a:r>
+            <a:r>
+              <a:rPr lang="en-US" b="1" dirty="0" err="1"/>
+              <a:t>به</a:t>
+            </a:r>
+            <a:r>
+              <a:rPr lang="en-US" b="1" dirty="0"/>
+              <a:t> </a:t>
+            </a:r>
+            <a:r>
+              <a:rPr lang="en-US" b="1" dirty="0" err="1"/>
+              <a:t>من</a:t>
+            </a:r>
+            <a:r>
+              <a:rPr lang="en-US" b="1" dirty="0"/>
+              <a:t> </a:t>
+            </a:r>
+            <a:r>
+              <a:rPr lang="en-US" b="1" dirty="0" err="1"/>
+              <a:t>بده</a:t>
+            </a:r>
+            <a:r>
+              <a:rPr lang="en-US" b="1" dirty="0"/>
+              <a:t>.»</a:t>
+            </a:r>
+            <a:endParaRPr lang="en-US" dirty="0"/>
+          </a:p>
+          <a:p>
+            <a:pPr algn="r" rtl="1"/>
+            <a:r>
+              <a:rPr lang="en-US" dirty="0" err="1"/>
+              <a:t>اما</a:t>
+            </a:r>
+            <a:r>
+              <a:rPr lang="en-US" dirty="0"/>
+              <a:t> DBMS </a:t>
+            </a:r>
+            <a:r>
+              <a:rPr lang="en-US" dirty="0" err="1"/>
+              <a:t>برای</a:t>
+            </a:r>
+            <a:r>
+              <a:rPr lang="en-US" dirty="0"/>
+              <a:t> </a:t>
+            </a:r>
+            <a:r>
+              <a:rPr lang="en-US" dirty="0" err="1"/>
+              <a:t>پاسخ‌دادن</a:t>
+            </a:r>
+            <a:r>
+              <a:rPr lang="en-US" dirty="0"/>
+              <a:t> </a:t>
+            </a:r>
+            <a:r>
+              <a:rPr lang="en-US" dirty="0" err="1"/>
+              <a:t>باید</a:t>
+            </a:r>
+            <a:r>
+              <a:rPr lang="en-US" dirty="0"/>
+              <a:t> </a:t>
+            </a:r>
+            <a:r>
+              <a:rPr lang="en-US" dirty="0" err="1"/>
+              <a:t>چند</a:t>
+            </a:r>
+            <a:r>
+              <a:rPr lang="en-US" dirty="0"/>
+              <a:t> </a:t>
+            </a:r>
+            <a:r>
+              <a:rPr lang="en-US" dirty="0" err="1"/>
+              <a:t>مرحله</a:t>
+            </a:r>
+            <a:r>
+              <a:rPr lang="en-US" dirty="0"/>
+              <a:t> </a:t>
+            </a:r>
+            <a:r>
+              <a:rPr lang="en-US" dirty="0" err="1"/>
+              <a:t>را</a:t>
+            </a:r>
+            <a:r>
+              <a:rPr lang="en-US" dirty="0"/>
+              <a:t> </a:t>
+            </a:r>
+            <a:r>
+              <a:rPr lang="en-US" dirty="0" err="1"/>
+              <a:t>طی</a:t>
+            </a:r>
+            <a:r>
+              <a:rPr lang="en-US" dirty="0"/>
+              <a:t> </a:t>
+            </a:r>
+            <a:r>
+              <a:rPr lang="en-US" dirty="0" err="1"/>
+              <a:t>کند</a:t>
+            </a:r>
+            <a:r>
+              <a:rPr lang="en-US" dirty="0"/>
+              <a:t>:</a:t>
+            </a:r>
+          </a:p>
+          <a:p>
+            <a:pPr algn="r" rtl="1"/>
+            <a:r>
+              <a:rPr lang="en-US" b="1" dirty="0"/>
+              <a:t>SQL Query → Parsing → Query Optimization → Query Execution → Result</a:t>
+            </a:r>
+            <a:endParaRPr lang="en-US" dirty="0"/>
+          </a:p>
+          <a:p>
+            <a:pPr algn="r" rtl="1"/>
+            <a:r>
+              <a:rPr lang="en-US" dirty="0" err="1"/>
+              <a:t>مثلاً</a:t>
+            </a:r>
+            <a:r>
+              <a:rPr lang="en-US" dirty="0"/>
+              <a:t>:</a:t>
+            </a:r>
+          </a:p>
+          <a:p>
+            <a:pPr lvl="0" algn="r" rtl="1"/>
+            <a:r>
+              <a:rPr lang="en-US" b="1" dirty="0"/>
+              <a:t>Parsing:</a:t>
+            </a:r>
+            <a:r>
+              <a:rPr lang="en-US" dirty="0"/>
+              <a:t> </a:t>
+            </a:r>
+            <a:r>
+              <a:rPr lang="en-US" dirty="0" err="1"/>
+              <a:t>بررسی</a:t>
+            </a:r>
+            <a:r>
+              <a:rPr lang="en-US" dirty="0"/>
+              <a:t> </a:t>
+            </a:r>
+            <a:r>
+              <a:rPr lang="en-US" dirty="0" err="1"/>
+              <a:t>می‌کند</a:t>
+            </a:r>
+            <a:r>
+              <a:rPr lang="en-US" dirty="0"/>
+              <a:t> </a:t>
+            </a:r>
+            <a:r>
+              <a:rPr lang="en-US" dirty="0" err="1"/>
+              <a:t>که</a:t>
+            </a:r>
+            <a:r>
+              <a:rPr lang="en-US" dirty="0"/>
+              <a:t> </a:t>
+            </a:r>
+            <a:r>
+              <a:rPr lang="en-US" dirty="0" err="1"/>
+              <a:t>دستور</a:t>
+            </a:r>
+            <a:r>
+              <a:rPr lang="en-US" dirty="0"/>
+              <a:t> SQL </a:t>
+            </a:r>
+            <a:r>
+              <a:rPr lang="en-US" dirty="0" err="1"/>
+              <a:t>از</a:t>
+            </a:r>
+            <a:r>
+              <a:rPr lang="en-US" dirty="0"/>
+              <a:t> </a:t>
+            </a:r>
+            <a:r>
+              <a:rPr lang="en-US" dirty="0" err="1"/>
+              <a:t>نظر</a:t>
+            </a:r>
+            <a:r>
+              <a:rPr lang="en-US" dirty="0"/>
+              <a:t> </a:t>
+            </a:r>
+            <a:r>
+              <a:rPr lang="en-US" dirty="0" err="1"/>
+              <a:t>نحوی</a:t>
+            </a:r>
+            <a:r>
+              <a:rPr lang="en-US" dirty="0"/>
+              <a:t> و </a:t>
+            </a:r>
+            <a:r>
+              <a:rPr lang="en-US" dirty="0" err="1"/>
+              <a:t>معنایی</a:t>
+            </a:r>
+            <a:r>
+              <a:rPr lang="en-US" dirty="0"/>
+              <a:t> </a:t>
+            </a:r>
+            <a:r>
+              <a:rPr lang="en-US" dirty="0" err="1"/>
+              <a:t>صحیح</a:t>
+            </a:r>
+            <a:r>
+              <a:rPr lang="en-US" dirty="0"/>
+              <a:t> </a:t>
+            </a:r>
+            <a:r>
+              <a:rPr lang="en-US" dirty="0" err="1"/>
+              <a:t>است</a:t>
+            </a:r>
+            <a:r>
+              <a:rPr lang="en-US" dirty="0"/>
+              <a:t>. </a:t>
+            </a:r>
+          </a:p>
+          <a:p>
+            <a:pPr lvl="0" algn="r" rtl="1"/>
+            <a:r>
+              <a:rPr lang="en-US" b="1" dirty="0"/>
+              <a:t>Optimization:</a:t>
+            </a:r>
+            <a:r>
+              <a:rPr lang="en-US" dirty="0"/>
+              <a:t> </a:t>
+            </a:r>
+            <a:r>
+              <a:rPr lang="en-US" dirty="0" err="1"/>
+              <a:t>تصمیم</a:t>
+            </a:r>
+            <a:r>
+              <a:rPr lang="en-US" dirty="0"/>
+              <a:t> </a:t>
+            </a:r>
+            <a:r>
+              <a:rPr lang="en-US" dirty="0" err="1"/>
+              <a:t>می‌گیرد</a:t>
+            </a:r>
+            <a:r>
+              <a:rPr lang="en-US" dirty="0"/>
+              <a:t> </a:t>
+            </a:r>
+            <a:r>
+              <a:rPr lang="en-US" dirty="0" err="1"/>
+              <a:t>چگونه</a:t>
+            </a:r>
+            <a:r>
+              <a:rPr lang="en-US" dirty="0"/>
+              <a:t> </a:t>
+            </a:r>
+            <a:r>
+              <a:rPr lang="en-US" dirty="0" err="1"/>
+              <a:t>با</a:t>
+            </a:r>
+            <a:r>
+              <a:rPr lang="en-US" dirty="0"/>
+              <a:t> </a:t>
+            </a:r>
+            <a:r>
+              <a:rPr lang="en-US" dirty="0" err="1"/>
+              <a:t>کمترین</a:t>
+            </a:r>
+            <a:r>
+              <a:rPr lang="en-US" dirty="0"/>
+              <a:t> </a:t>
+            </a:r>
+            <a:r>
+              <a:rPr lang="en-US" dirty="0" err="1"/>
+              <a:t>هزینه</a:t>
+            </a:r>
+            <a:r>
+              <a:rPr lang="en-US" dirty="0"/>
+              <a:t> </a:t>
+            </a:r>
+            <a:r>
+              <a:rPr lang="en-US" dirty="0" err="1"/>
+              <a:t>داده‌ها</a:t>
+            </a:r>
+            <a:r>
+              <a:rPr lang="en-US" dirty="0"/>
+              <a:t> </a:t>
+            </a:r>
+            <a:r>
+              <a:rPr lang="en-US" dirty="0" err="1"/>
+              <a:t>را</a:t>
+            </a:r>
+            <a:r>
+              <a:rPr lang="en-US" dirty="0"/>
+              <a:t> </a:t>
+            </a:r>
+            <a:r>
+              <a:rPr lang="en-US" dirty="0" err="1"/>
+              <a:t>پیدا</a:t>
+            </a:r>
+            <a:r>
+              <a:rPr lang="en-US" dirty="0"/>
+              <a:t> </a:t>
+            </a:r>
+            <a:r>
+              <a:rPr lang="en-US" dirty="0" err="1"/>
+              <a:t>کند</a:t>
+            </a:r>
+            <a:r>
+              <a:rPr lang="en-US" dirty="0"/>
+              <a:t>؛ </a:t>
+            </a:r>
+            <a:r>
+              <a:rPr lang="en-US" dirty="0" err="1"/>
+              <a:t>مثلاً</a:t>
+            </a:r>
+            <a:r>
+              <a:rPr lang="en-US" dirty="0"/>
+              <a:t> </a:t>
+            </a:r>
+            <a:r>
+              <a:rPr lang="en-US" dirty="0" err="1"/>
+              <a:t>استفاده</a:t>
+            </a:r>
+            <a:r>
+              <a:rPr lang="en-US" dirty="0"/>
+              <a:t> </a:t>
+            </a:r>
+            <a:r>
+              <a:rPr lang="en-US" dirty="0" err="1"/>
+              <a:t>از</a:t>
+            </a:r>
+            <a:r>
+              <a:rPr lang="en-US" dirty="0"/>
+              <a:t> Index </a:t>
+            </a:r>
+            <a:r>
+              <a:rPr lang="en-US" dirty="0" err="1"/>
+              <a:t>روی</a:t>
+            </a:r>
+            <a:r>
+              <a:rPr lang="en-US" dirty="0"/>
+              <a:t> </a:t>
+            </a:r>
+            <a:r>
+              <a:rPr lang="en-US" sz="1200" kern="1200" dirty="0">
+                <a:solidFill>
+                  <a:schemeClr val="tx1"/>
+                </a:solidFill>
+                <a:latin typeface="Times New Roman" charset="0"/>
+                <a:ea typeface="MS PGothic" panose="020B0600070205080204" pitchFamily="34" charset="-128"/>
+                <a:cs typeface="ＭＳ Ｐゴシック" charset="0"/>
+              </a:rPr>
+              <a:t>Major</a:t>
+            </a:r>
+            <a:r>
+              <a:rPr lang="en-US" dirty="0"/>
+              <a:t> </a:t>
+            </a:r>
+            <a:r>
+              <a:rPr lang="en-US" dirty="0" err="1"/>
+              <a:t>یا</a:t>
+            </a:r>
+            <a:r>
+              <a:rPr lang="en-US" dirty="0"/>
+              <a:t> </a:t>
+            </a:r>
+            <a:r>
+              <a:rPr lang="en-US" sz="1200" kern="1200" dirty="0">
+                <a:solidFill>
+                  <a:schemeClr val="tx1"/>
+                </a:solidFill>
+                <a:latin typeface="Times New Roman" charset="0"/>
+                <a:ea typeface="MS PGothic" panose="020B0600070205080204" pitchFamily="34" charset="-128"/>
+                <a:cs typeface="ＭＳ Ｐゴシック" charset="0"/>
+              </a:rPr>
+              <a:t>GPA</a:t>
+            </a:r>
+            <a:r>
+              <a:rPr lang="en-US" dirty="0"/>
+              <a:t>. </a:t>
+            </a:r>
+          </a:p>
+          <a:p>
+            <a:pPr lvl="0" algn="r" rtl="1"/>
+            <a:r>
+              <a:rPr lang="en-US" b="1" dirty="0"/>
+              <a:t>Execution:</a:t>
+            </a:r>
+            <a:r>
+              <a:rPr lang="en-US" dirty="0"/>
+              <a:t> </a:t>
+            </a:r>
+            <a:r>
+              <a:rPr lang="en-US" dirty="0" err="1"/>
+              <a:t>رکوردهای</a:t>
+            </a:r>
+            <a:r>
+              <a:rPr lang="en-US" dirty="0"/>
+              <a:t> </a:t>
+            </a:r>
+            <a:r>
+              <a:rPr lang="en-US" dirty="0" err="1"/>
+              <a:t>مناسب</a:t>
+            </a:r>
+            <a:r>
+              <a:rPr lang="en-US" dirty="0"/>
+              <a:t> </a:t>
+            </a:r>
+            <a:r>
+              <a:rPr lang="en-US" dirty="0" err="1"/>
+              <a:t>را</a:t>
+            </a:r>
+            <a:r>
+              <a:rPr lang="en-US" dirty="0"/>
+              <a:t> </a:t>
+            </a:r>
+            <a:r>
+              <a:rPr lang="en-US" dirty="0" err="1"/>
+              <a:t>از</a:t>
+            </a:r>
+            <a:r>
+              <a:rPr lang="en-US" dirty="0"/>
+              <a:t> </a:t>
+            </a:r>
+            <a:r>
+              <a:rPr lang="en-US" dirty="0" err="1"/>
+              <a:t>جدول</a:t>
+            </a:r>
+            <a:r>
+              <a:rPr lang="en-US" dirty="0"/>
+              <a:t> </a:t>
+            </a:r>
+            <a:r>
+              <a:rPr lang="en-US" dirty="0" err="1"/>
+              <a:t>پیدا</a:t>
+            </a:r>
+            <a:r>
+              <a:rPr lang="en-US" dirty="0"/>
+              <a:t> و </a:t>
+            </a:r>
+            <a:r>
+              <a:rPr lang="en-US" dirty="0" err="1"/>
+              <a:t>فیلتر</a:t>
+            </a:r>
+            <a:r>
+              <a:rPr lang="en-US" dirty="0"/>
+              <a:t> </a:t>
+            </a:r>
+            <a:r>
+              <a:rPr lang="en-US" dirty="0" err="1"/>
+              <a:t>می‌کند</a:t>
+            </a:r>
+            <a:r>
+              <a:rPr lang="en-US" dirty="0"/>
+              <a:t>. </a:t>
+            </a:r>
+          </a:p>
+          <a:p>
+            <a:pPr lvl="0" algn="r" rtl="1"/>
+            <a:r>
+              <a:rPr lang="en-US" b="1" dirty="0"/>
+              <a:t>Result:</a:t>
+            </a:r>
+            <a:r>
+              <a:rPr lang="en-US" dirty="0"/>
+              <a:t> </a:t>
+            </a:r>
+            <a:r>
+              <a:rPr lang="en-US" dirty="0" err="1"/>
+              <a:t>خروجی</a:t>
+            </a:r>
+            <a:r>
+              <a:rPr lang="en-US" dirty="0"/>
+              <a:t> </a:t>
+            </a:r>
+            <a:r>
+              <a:rPr lang="en-US" dirty="0" err="1"/>
+              <a:t>زیر</a:t>
+            </a:r>
+            <a:r>
+              <a:rPr lang="en-US" dirty="0"/>
+              <a:t> </a:t>
+            </a:r>
+            <a:r>
+              <a:rPr lang="en-US" dirty="0" err="1"/>
+              <a:t>تولید</a:t>
+            </a:r>
+            <a:r>
+              <a:rPr lang="en-US" dirty="0"/>
+              <a:t> </a:t>
+            </a:r>
+            <a:r>
+              <a:rPr lang="en-US" dirty="0" err="1"/>
+              <a:t>می‌شود</a:t>
+            </a:r>
+            <a:r>
+              <a:rPr lang="en-US" dirty="0"/>
+              <a:t>: </a:t>
+            </a:r>
+          </a:p>
+          <a:p>
+            <a:pPr algn="r" rtl="1"/>
+            <a:r>
+              <a:rPr lang="en-US" sz="1200" kern="1200" dirty="0">
+                <a:solidFill>
+                  <a:schemeClr val="tx1"/>
+                </a:solidFill>
+                <a:latin typeface="Times New Roman" charset="0"/>
+                <a:ea typeface="MS PGothic" panose="020B0600070205080204" pitchFamily="34" charset="-128"/>
+                <a:cs typeface="ＭＳ Ｐゴシック" charset="0"/>
+              </a:rPr>
+              <a:t>Ali</a:t>
+            </a:r>
+          </a:p>
+          <a:p>
+            <a:pPr algn="r" rtl="1"/>
+            <a:r>
+              <a:rPr lang="en-US" sz="1200" kern="1200" dirty="0">
+                <a:solidFill>
+                  <a:schemeClr val="tx1"/>
+                </a:solidFill>
+                <a:latin typeface="Times New Roman" charset="0"/>
+                <a:ea typeface="MS PGothic" panose="020B0600070205080204" pitchFamily="34" charset="-128"/>
+                <a:cs typeface="ＭＳ Ｐゴシック" charset="0"/>
+              </a:rPr>
+              <a:t>Reza</a:t>
+            </a:r>
+          </a:p>
+          <a:p>
+            <a:pPr algn="r" rtl="1"/>
+            <a:r>
+              <a:rPr lang="en-US" dirty="0" err="1"/>
+              <a:t>پس</a:t>
+            </a:r>
+            <a:r>
+              <a:rPr lang="en-US" dirty="0"/>
+              <a:t> </a:t>
+            </a:r>
+            <a:r>
+              <a:rPr lang="en-US" dirty="0" err="1"/>
+              <a:t>به</a:t>
+            </a:r>
+            <a:r>
+              <a:rPr lang="en-US" dirty="0"/>
+              <a:t> </a:t>
+            </a:r>
+            <a:r>
+              <a:rPr lang="en-US" dirty="0" err="1"/>
+              <a:t>زبان</a:t>
+            </a:r>
+            <a:r>
+              <a:rPr lang="en-US" dirty="0"/>
+              <a:t> </a:t>
+            </a:r>
+            <a:r>
+              <a:rPr lang="en-US" dirty="0" err="1"/>
+              <a:t>ساده</a:t>
+            </a:r>
+            <a:r>
+              <a:rPr lang="en-US" dirty="0"/>
+              <a:t>:</a:t>
+            </a:r>
+          </a:p>
+          <a:p>
+            <a:pPr algn="r" rtl="1"/>
+            <a:r>
+              <a:rPr lang="en-US" b="1" dirty="0"/>
+              <a:t>Query Processing </a:t>
+            </a:r>
+            <a:r>
+              <a:rPr lang="en-US" b="1" dirty="0" err="1"/>
+              <a:t>یعنی</a:t>
+            </a:r>
+            <a:r>
+              <a:rPr lang="en-US" b="1" dirty="0"/>
+              <a:t> </a:t>
+            </a:r>
+            <a:r>
+              <a:rPr lang="en-US" b="1" dirty="0" err="1"/>
+              <a:t>فرایندی</a:t>
+            </a:r>
+            <a:r>
+              <a:rPr lang="en-US" b="1" dirty="0"/>
+              <a:t> </a:t>
+            </a:r>
+            <a:r>
+              <a:rPr lang="en-US" b="1" dirty="0" err="1"/>
+              <a:t>که</a:t>
+            </a:r>
+            <a:r>
+              <a:rPr lang="en-US" b="1" dirty="0"/>
+              <a:t> DBMS </a:t>
+            </a:r>
+            <a:r>
+              <a:rPr lang="en-US" b="1" dirty="0" err="1"/>
+              <a:t>یک</a:t>
+            </a:r>
+            <a:r>
+              <a:rPr lang="en-US" b="1" dirty="0"/>
+              <a:t> </a:t>
+            </a:r>
+            <a:r>
+              <a:rPr lang="en-US" b="1" dirty="0" err="1"/>
+              <a:t>پرس‌وجوی</a:t>
+            </a:r>
+            <a:r>
+              <a:rPr lang="en-US" b="1" dirty="0"/>
+              <a:t> </a:t>
+            </a:r>
+            <a:r>
+              <a:rPr lang="en-US" b="1" dirty="0" err="1"/>
+              <a:t>سطح‌بالای</a:t>
+            </a:r>
+            <a:r>
+              <a:rPr lang="en-US" b="1" dirty="0"/>
+              <a:t> </a:t>
+            </a:r>
+            <a:r>
+              <a:rPr lang="en-US" b="1" dirty="0" err="1"/>
+              <a:t>کاربر</a:t>
+            </a:r>
+            <a:r>
+              <a:rPr lang="en-US" b="1" dirty="0"/>
+              <a:t>، </a:t>
+            </a:r>
+            <a:r>
+              <a:rPr lang="en-US" b="1" dirty="0" err="1"/>
+              <a:t>مانند</a:t>
+            </a:r>
+            <a:r>
+              <a:rPr lang="en-US" b="1" dirty="0"/>
+              <a:t> SQL، </a:t>
+            </a:r>
+            <a:r>
+              <a:rPr lang="en-US" b="1" dirty="0" err="1"/>
+              <a:t>را</a:t>
+            </a:r>
+            <a:r>
+              <a:rPr lang="en-US" b="1" dirty="0"/>
+              <a:t> </a:t>
+            </a:r>
+            <a:r>
+              <a:rPr lang="en-US" b="1" dirty="0" err="1"/>
+              <a:t>به</a:t>
+            </a:r>
+            <a:r>
+              <a:rPr lang="en-US" b="1" dirty="0"/>
+              <a:t> </a:t>
+            </a:r>
+            <a:r>
+              <a:rPr lang="en-US" b="1" dirty="0" err="1"/>
+              <a:t>مجموعه‌ای</a:t>
+            </a:r>
+            <a:r>
+              <a:rPr lang="en-US" b="1" dirty="0"/>
+              <a:t> </a:t>
+            </a:r>
+            <a:r>
+              <a:rPr lang="en-US" b="1" dirty="0" err="1"/>
+              <a:t>از</a:t>
+            </a:r>
+            <a:r>
+              <a:rPr lang="en-US" b="1" dirty="0"/>
+              <a:t> </a:t>
+            </a:r>
+            <a:r>
+              <a:rPr lang="en-US" b="1" dirty="0" err="1"/>
+              <a:t>عملیات</a:t>
+            </a:r>
+            <a:r>
+              <a:rPr lang="en-US" b="1" dirty="0"/>
+              <a:t> </a:t>
+            </a:r>
+            <a:r>
+              <a:rPr lang="en-US" b="1" dirty="0" err="1"/>
+              <a:t>اجرایی</a:t>
+            </a:r>
+            <a:r>
+              <a:rPr lang="en-US" b="1" dirty="0"/>
+              <a:t> </a:t>
+            </a:r>
+            <a:r>
+              <a:rPr lang="en-US" b="1" dirty="0" err="1"/>
+              <a:t>تبدیل</a:t>
+            </a:r>
+            <a:r>
+              <a:rPr lang="en-US" b="1" dirty="0"/>
+              <a:t> </a:t>
+            </a:r>
+            <a:r>
+              <a:rPr lang="en-US" b="1" dirty="0" err="1"/>
+              <a:t>می‌کند</a:t>
+            </a:r>
+            <a:r>
+              <a:rPr lang="en-US" b="1" dirty="0"/>
+              <a:t> </a:t>
+            </a:r>
+            <a:r>
+              <a:rPr lang="en-US" b="1" dirty="0" err="1"/>
+              <a:t>تا</a:t>
+            </a:r>
+            <a:r>
+              <a:rPr lang="en-US" b="1" dirty="0"/>
+              <a:t> </a:t>
+            </a:r>
+            <a:r>
+              <a:rPr lang="en-US" b="1" dirty="0" err="1"/>
+              <a:t>نتیجه</a:t>
+            </a:r>
+            <a:r>
+              <a:rPr lang="en-US" b="1" dirty="0"/>
+              <a:t> </a:t>
+            </a:r>
+            <a:r>
+              <a:rPr lang="en-US" b="1" dirty="0" err="1"/>
+              <a:t>با</a:t>
+            </a:r>
+            <a:r>
+              <a:rPr lang="en-US" b="1" dirty="0"/>
+              <a:t> </a:t>
+            </a:r>
+            <a:r>
+              <a:rPr lang="en-US" b="1" dirty="0" err="1"/>
+              <a:t>هزینه</a:t>
+            </a:r>
+            <a:r>
+              <a:rPr lang="en-US" b="1" dirty="0"/>
+              <a:t> و </a:t>
+            </a:r>
+            <a:r>
+              <a:rPr lang="en-US" b="1" dirty="0" err="1"/>
+              <a:t>زمان</a:t>
+            </a:r>
+            <a:r>
+              <a:rPr lang="en-US" b="1" dirty="0"/>
+              <a:t> </a:t>
+            </a:r>
+            <a:r>
+              <a:rPr lang="en-US" b="1" dirty="0" err="1"/>
+              <a:t>مناسب</a:t>
+            </a:r>
+            <a:r>
+              <a:rPr lang="en-US" b="1" dirty="0"/>
+              <a:t> </a:t>
+            </a:r>
+            <a:r>
+              <a:rPr lang="en-US" b="1" dirty="0" err="1"/>
+              <a:t>تولید</a:t>
+            </a:r>
+            <a:r>
+              <a:rPr lang="en-US" b="1" dirty="0"/>
+              <a:t> </a:t>
+            </a:r>
+            <a:r>
+              <a:rPr lang="en-US" b="1" dirty="0" err="1"/>
+              <a:t>شود</a:t>
+            </a:r>
+            <a:r>
+              <a:rPr lang="en-US" b="1" dirty="0"/>
+              <a:t>.</a:t>
+            </a:r>
+            <a:endParaRPr lang="en-US" dirty="0"/>
+          </a:p>
+          <a:p>
+            <a:pPr algn="r" rtl="1"/>
+            <a:r>
+              <a:rPr lang="en-US" dirty="0" err="1"/>
+              <a:t>در</a:t>
+            </a:r>
+            <a:r>
+              <a:rPr lang="en-US" dirty="0"/>
+              <a:t> </a:t>
+            </a:r>
+            <a:r>
+              <a:rPr lang="en-US" dirty="0" err="1"/>
+              <a:t>انگلیسی</a:t>
+            </a:r>
+            <a:r>
+              <a:rPr lang="en-US" dirty="0"/>
+              <a:t> </a:t>
+            </a:r>
+            <a:r>
+              <a:rPr lang="en-US" dirty="0" err="1"/>
+              <a:t>برای</a:t>
+            </a:r>
+            <a:r>
+              <a:rPr lang="en-US" dirty="0"/>
+              <a:t> «</a:t>
+            </a:r>
+            <a:r>
+              <a:rPr lang="en-US" dirty="0" err="1"/>
+              <a:t>یک</a:t>
+            </a:r>
+            <a:r>
+              <a:rPr lang="en-US" dirty="0"/>
+              <a:t> </a:t>
+            </a:r>
+            <a:r>
+              <a:rPr lang="en-US" dirty="0" err="1"/>
+              <a:t>مثال</a:t>
+            </a:r>
+            <a:r>
+              <a:rPr lang="en-US" dirty="0"/>
+              <a:t> </a:t>
+            </a:r>
+            <a:r>
+              <a:rPr lang="en-US" dirty="0" err="1"/>
+              <a:t>ملموس</a:t>
+            </a:r>
+            <a:r>
+              <a:rPr lang="en-US" dirty="0"/>
+              <a:t>» </a:t>
+            </a:r>
+            <a:r>
+              <a:rPr lang="en-US" dirty="0" err="1"/>
+              <a:t>در</a:t>
+            </a:r>
+            <a:r>
+              <a:rPr lang="en-US" dirty="0"/>
+              <a:t> </a:t>
+            </a:r>
+            <a:r>
+              <a:rPr lang="en-US" dirty="0" err="1"/>
+              <a:t>اینجا</a:t>
+            </a:r>
+            <a:r>
+              <a:rPr lang="en-US" dirty="0"/>
+              <a:t> </a:t>
+            </a:r>
+            <a:r>
+              <a:rPr lang="en-US" dirty="0" err="1"/>
+              <a:t>می‌توان</a:t>
+            </a:r>
+            <a:r>
+              <a:rPr lang="en-US" dirty="0"/>
+              <a:t> </a:t>
+            </a:r>
+            <a:r>
+              <a:rPr lang="en-US" dirty="0" err="1"/>
+              <a:t>گفت</a:t>
+            </a:r>
+            <a:r>
+              <a:rPr lang="en-US" dirty="0"/>
+              <a:t>: </a:t>
+            </a:r>
+            <a:r>
+              <a:rPr lang="en-US" b="1" dirty="0"/>
+              <a:t>“a concrete example of query processing”</a:t>
+            </a:r>
+            <a:r>
+              <a:rPr lang="en-US" dirty="0"/>
+              <a:t> </a:t>
+            </a:r>
+            <a:r>
+              <a:rPr lang="en-US" dirty="0" err="1"/>
+              <a:t>یا</a:t>
+            </a:r>
+            <a:r>
+              <a:rPr lang="en-US" dirty="0"/>
+              <a:t> </a:t>
+            </a:r>
+            <a:r>
+              <a:rPr lang="en-US" b="1" dirty="0"/>
+              <a:t>“a real-world example of query processing.”</a:t>
+            </a:r>
+            <a:endParaRPr lang="en-US" dirty="0"/>
+          </a:p>
+          <a:p>
+            <a:pPr algn="r" rtl="1"/>
+            <a:endParaRPr lang="fa-IR" dirty="0"/>
+          </a:p>
+          <a:p>
+            <a:pPr algn="r" rtl="1"/>
+            <a:endParaRPr lang="en-US" altLang="en-US" dirty="0">
               <a:latin typeface="Times New Roman" panose="02020603050405020304" pitchFamily="18" charset="0"/>
             </a:endParaRPr>
           </a:p>
@@ -6977,7 +8000,1014 @@
           <a:bodyPr/>
           <a:lstStyle/>
           <a:p>
-            <a:endParaRPr lang="en-US" altLang="en-US">
+            <a:pPr algn="r" rtl="1"/>
+            <a:r>
+              <a:rPr lang="en-US" dirty="0" err="1"/>
+              <a:t>فرض</a:t>
+            </a:r>
+            <a:r>
+              <a:rPr lang="en-US" dirty="0"/>
+              <a:t> </a:t>
+            </a:r>
+            <a:r>
+              <a:rPr lang="en-US" dirty="0" err="1"/>
+              <a:t>کنید</a:t>
+            </a:r>
+            <a:r>
+              <a:rPr lang="en-US" dirty="0"/>
+              <a:t> </a:t>
+            </a:r>
+            <a:r>
+              <a:rPr lang="en-US" dirty="0" err="1"/>
+              <a:t>در</a:t>
+            </a:r>
+            <a:r>
+              <a:rPr lang="en-US" dirty="0"/>
+              <a:t> </a:t>
+            </a:r>
+            <a:r>
+              <a:rPr lang="en-US" dirty="0" err="1"/>
+              <a:t>یک</a:t>
+            </a:r>
+            <a:r>
+              <a:rPr lang="en-US" dirty="0"/>
+              <a:t> </a:t>
+            </a:r>
+            <a:r>
+              <a:rPr lang="en-US" dirty="0" err="1"/>
+              <a:t>بانک</a:t>
+            </a:r>
+            <a:r>
+              <a:rPr lang="en-US" dirty="0"/>
+              <a:t>، </a:t>
+            </a:r>
+            <a:r>
+              <a:rPr lang="en-US" dirty="0" err="1"/>
+              <a:t>موجودی</a:t>
+            </a:r>
+            <a:r>
+              <a:rPr lang="en-US" dirty="0"/>
+              <a:t> </a:t>
+            </a:r>
+            <a:r>
+              <a:rPr lang="en-US" dirty="0" err="1"/>
+              <a:t>حساب</a:t>
+            </a:r>
+            <a:r>
+              <a:rPr lang="en-US" dirty="0"/>
+              <a:t> </a:t>
+            </a:r>
+            <a:r>
+              <a:rPr lang="en-US" b="1" dirty="0" err="1"/>
+              <a:t>علی</a:t>
+            </a:r>
+            <a:r>
+              <a:rPr lang="en-US" b="1" dirty="0"/>
+              <a:t> ۱۰ </a:t>
+            </a:r>
+            <a:r>
+              <a:rPr lang="en-US" b="1" dirty="0" err="1"/>
+              <a:t>میلیون</a:t>
+            </a:r>
+            <a:r>
+              <a:rPr lang="en-US" b="1" dirty="0"/>
+              <a:t> </a:t>
+            </a:r>
+            <a:r>
+              <a:rPr lang="en-US" b="1" dirty="0" err="1"/>
+              <a:t>تومان</a:t>
+            </a:r>
+            <a:r>
+              <a:rPr lang="en-US" dirty="0"/>
+              <a:t> </a:t>
+            </a:r>
+            <a:r>
+              <a:rPr lang="en-US" dirty="0" err="1"/>
+              <a:t>است</a:t>
+            </a:r>
+            <a:r>
+              <a:rPr lang="en-US" dirty="0"/>
+              <a:t>. </a:t>
+            </a:r>
+            <a:r>
+              <a:rPr lang="en-US" dirty="0" err="1"/>
+              <a:t>هم‌زمان</a:t>
+            </a:r>
+            <a:r>
+              <a:rPr lang="en-US" dirty="0"/>
+              <a:t> </a:t>
+            </a:r>
+            <a:r>
+              <a:rPr lang="en-US" dirty="0" err="1"/>
+              <a:t>دو</a:t>
+            </a:r>
+            <a:r>
+              <a:rPr lang="en-US" dirty="0"/>
+              <a:t> </a:t>
+            </a:r>
+            <a:r>
+              <a:rPr lang="en-US" dirty="0" err="1"/>
+              <a:t>تراکنش</a:t>
+            </a:r>
+            <a:r>
+              <a:rPr lang="en-US" dirty="0"/>
+              <a:t> </a:t>
+            </a:r>
+            <a:r>
+              <a:rPr lang="en-US" dirty="0" err="1"/>
+              <a:t>در</a:t>
+            </a:r>
+            <a:r>
+              <a:rPr lang="en-US" dirty="0"/>
+              <a:t> </a:t>
+            </a:r>
+            <a:r>
+              <a:rPr lang="en-US" dirty="0" err="1"/>
+              <a:t>حال</a:t>
+            </a:r>
+            <a:r>
+              <a:rPr lang="en-US" dirty="0"/>
+              <a:t> </a:t>
+            </a:r>
+            <a:r>
+              <a:rPr lang="en-US" dirty="0" err="1"/>
+              <a:t>اجرا</a:t>
+            </a:r>
+            <a:r>
+              <a:rPr lang="en-US" dirty="0"/>
+              <a:t> </a:t>
+            </a:r>
+            <a:r>
+              <a:rPr lang="en-US" dirty="0" err="1"/>
+              <a:t>هستند</a:t>
+            </a:r>
+            <a:r>
+              <a:rPr lang="en-US" dirty="0"/>
+              <a:t>:</a:t>
+            </a:r>
+          </a:p>
+          <a:p>
+            <a:pPr lvl="0" algn="r" rtl="1"/>
+            <a:r>
+              <a:rPr lang="en-US" b="1" dirty="0" err="1"/>
+              <a:t>تراکنش</a:t>
+            </a:r>
+            <a:r>
+              <a:rPr lang="en-US" b="1" dirty="0"/>
+              <a:t> A:</a:t>
+            </a:r>
+            <a:r>
+              <a:rPr lang="en-US" dirty="0"/>
+              <a:t> </a:t>
+            </a:r>
+            <a:r>
+              <a:rPr lang="en-US" dirty="0" err="1"/>
+              <a:t>علی</a:t>
+            </a:r>
+            <a:r>
+              <a:rPr lang="en-US" dirty="0"/>
+              <a:t> ۳ </a:t>
+            </a:r>
+            <a:r>
+              <a:rPr lang="en-US" dirty="0" err="1"/>
+              <a:t>میلیون</a:t>
+            </a:r>
+            <a:r>
+              <a:rPr lang="en-US" dirty="0"/>
+              <a:t> </a:t>
+            </a:r>
+            <a:r>
+              <a:rPr lang="en-US" dirty="0" err="1"/>
+              <a:t>تومان</a:t>
+            </a:r>
+            <a:r>
+              <a:rPr lang="en-US" dirty="0"/>
+              <a:t> </a:t>
+            </a:r>
+            <a:r>
+              <a:rPr lang="en-US" dirty="0" err="1"/>
+              <a:t>برداشت</a:t>
+            </a:r>
+            <a:r>
+              <a:rPr lang="en-US" dirty="0"/>
+              <a:t> </a:t>
+            </a:r>
+            <a:r>
+              <a:rPr lang="en-US" dirty="0" err="1"/>
+              <a:t>می‌کند</a:t>
+            </a:r>
+            <a:r>
+              <a:rPr lang="en-US" dirty="0"/>
+              <a:t>. </a:t>
+            </a:r>
+          </a:p>
+          <a:p>
+            <a:pPr lvl="0" algn="r" rtl="1"/>
+            <a:r>
+              <a:rPr lang="en-US" b="1" dirty="0" err="1"/>
+              <a:t>تراکنش</a:t>
+            </a:r>
+            <a:r>
+              <a:rPr lang="en-US" b="1" dirty="0"/>
+              <a:t> B:</a:t>
+            </a:r>
+            <a:r>
+              <a:rPr lang="en-US" dirty="0"/>
+              <a:t> </a:t>
+            </a:r>
+            <a:r>
+              <a:rPr lang="en-US" dirty="0" err="1"/>
+              <a:t>علی</a:t>
+            </a:r>
+            <a:r>
+              <a:rPr lang="en-US" dirty="0"/>
+              <a:t> ۲ </a:t>
+            </a:r>
+            <a:r>
+              <a:rPr lang="en-US" dirty="0" err="1"/>
+              <a:t>میلیون</a:t>
+            </a:r>
+            <a:r>
+              <a:rPr lang="en-US" dirty="0"/>
+              <a:t> </a:t>
+            </a:r>
+            <a:r>
+              <a:rPr lang="en-US" dirty="0" err="1"/>
+              <a:t>تومان</a:t>
+            </a:r>
+            <a:r>
+              <a:rPr lang="en-US" dirty="0"/>
+              <a:t> </a:t>
+            </a:r>
+            <a:r>
+              <a:rPr lang="en-US" dirty="0" err="1"/>
+              <a:t>برداشت</a:t>
+            </a:r>
+            <a:r>
+              <a:rPr lang="en-US" dirty="0"/>
+              <a:t> </a:t>
+            </a:r>
+            <a:r>
+              <a:rPr lang="en-US" dirty="0" err="1"/>
+              <a:t>می‌کند</a:t>
+            </a:r>
+            <a:r>
+              <a:rPr lang="en-US" dirty="0"/>
+              <a:t>. </a:t>
+            </a:r>
+          </a:p>
+          <a:p>
+            <a:pPr algn="r" rtl="1"/>
+            <a:r>
+              <a:rPr lang="en-US" dirty="0" err="1"/>
+              <a:t>اگر</a:t>
+            </a:r>
+            <a:r>
+              <a:rPr lang="en-US" dirty="0"/>
+              <a:t> </a:t>
+            </a:r>
+            <a:r>
+              <a:rPr lang="en-US" dirty="0" err="1"/>
+              <a:t>هر</a:t>
+            </a:r>
+            <a:r>
+              <a:rPr lang="en-US" dirty="0"/>
+              <a:t> </a:t>
+            </a:r>
+            <a:r>
+              <a:rPr lang="en-US" dirty="0" err="1"/>
+              <a:t>دو</a:t>
+            </a:r>
+            <a:r>
+              <a:rPr lang="en-US" dirty="0"/>
+              <a:t> </a:t>
+            </a:r>
+            <a:r>
+              <a:rPr lang="en-US" dirty="0" err="1"/>
+              <a:t>تراکنش</a:t>
+            </a:r>
+            <a:r>
+              <a:rPr lang="en-US" dirty="0"/>
+              <a:t> </a:t>
+            </a:r>
+            <a:r>
+              <a:rPr lang="en-US" dirty="0" err="1"/>
+              <a:t>هم‌زمان</a:t>
+            </a:r>
+            <a:r>
+              <a:rPr lang="en-US" dirty="0"/>
+              <a:t> </a:t>
+            </a:r>
+            <a:r>
+              <a:rPr lang="en-US" dirty="0" err="1"/>
+              <a:t>موجودی</a:t>
+            </a:r>
+            <a:r>
+              <a:rPr lang="en-US" dirty="0"/>
+              <a:t> </a:t>
+            </a:r>
+            <a:r>
+              <a:rPr lang="en-US" dirty="0" err="1"/>
+              <a:t>اولیه</a:t>
+            </a:r>
+            <a:r>
+              <a:rPr lang="en-US" dirty="0"/>
+              <a:t> </a:t>
+            </a:r>
+            <a:r>
+              <a:rPr lang="en-US" dirty="0" err="1"/>
+              <a:t>را</a:t>
+            </a:r>
+            <a:r>
+              <a:rPr lang="en-US" dirty="0"/>
+              <a:t> </a:t>
+            </a:r>
+            <a:r>
+              <a:rPr lang="en-US" dirty="0" err="1"/>
+              <a:t>بخوانند</a:t>
+            </a:r>
+            <a:r>
+              <a:rPr lang="en-US" dirty="0"/>
+              <a:t>، </a:t>
+            </a:r>
+            <a:r>
+              <a:rPr lang="en-US" dirty="0" err="1"/>
+              <a:t>ممکن</a:t>
+            </a:r>
+            <a:r>
+              <a:rPr lang="en-US" dirty="0"/>
+              <a:t> </a:t>
+            </a:r>
+            <a:r>
+              <a:rPr lang="en-US" dirty="0" err="1"/>
+              <a:t>است</a:t>
+            </a:r>
+            <a:r>
+              <a:rPr lang="en-US" dirty="0"/>
+              <a:t> </a:t>
+            </a:r>
+            <a:r>
+              <a:rPr lang="en-US" dirty="0" err="1"/>
+              <a:t>هر</a:t>
+            </a:r>
+            <a:r>
+              <a:rPr lang="en-US" dirty="0"/>
+              <a:t> </a:t>
+            </a:r>
+            <a:r>
+              <a:rPr lang="en-US" dirty="0" err="1"/>
+              <a:t>دو</a:t>
+            </a:r>
+            <a:r>
+              <a:rPr lang="en-US" dirty="0"/>
+              <a:t> </a:t>
+            </a:r>
+            <a:r>
+              <a:rPr lang="en-US" dirty="0" err="1"/>
+              <a:t>مقدار</a:t>
+            </a:r>
+            <a:r>
+              <a:rPr lang="en-US" dirty="0"/>
+              <a:t> </a:t>
+            </a:r>
+            <a:r>
+              <a:rPr lang="en-US" b="1" dirty="0"/>
+              <a:t>۱۰ </a:t>
+            </a:r>
+            <a:r>
+              <a:rPr lang="en-US" b="1" dirty="0" err="1"/>
+              <a:t>میلیون</a:t>
+            </a:r>
+            <a:r>
+              <a:rPr lang="en-US" b="1" dirty="0"/>
+              <a:t> </a:t>
+            </a:r>
+            <a:r>
+              <a:rPr lang="en-US" b="1" dirty="0" err="1"/>
+              <a:t>تومان</a:t>
+            </a:r>
+            <a:r>
+              <a:rPr lang="en-US" dirty="0"/>
+              <a:t> </a:t>
+            </a:r>
+            <a:r>
+              <a:rPr lang="en-US" dirty="0" err="1"/>
+              <a:t>را</a:t>
+            </a:r>
+            <a:r>
+              <a:rPr lang="en-US" dirty="0"/>
+              <a:t> </a:t>
+            </a:r>
+            <a:r>
+              <a:rPr lang="en-US" dirty="0" err="1"/>
+              <a:t>ببینند</a:t>
+            </a:r>
+            <a:r>
+              <a:rPr lang="en-US" dirty="0"/>
+              <a:t> و </a:t>
+            </a:r>
+            <a:r>
+              <a:rPr lang="en-US" dirty="0" err="1"/>
+              <a:t>سپس</a:t>
+            </a:r>
+            <a:r>
+              <a:rPr lang="en-US" dirty="0"/>
+              <a:t> </a:t>
+            </a:r>
+            <a:r>
+              <a:rPr lang="en-US" dirty="0" err="1"/>
+              <a:t>یکی</a:t>
+            </a:r>
+            <a:r>
+              <a:rPr lang="en-US" dirty="0"/>
+              <a:t> </a:t>
+            </a:r>
+            <a:r>
+              <a:rPr lang="en-US" dirty="0" err="1"/>
+              <a:t>آن</a:t>
+            </a:r>
+            <a:r>
+              <a:rPr lang="en-US" dirty="0"/>
+              <a:t> </a:t>
+            </a:r>
+            <a:r>
+              <a:rPr lang="en-US" dirty="0" err="1"/>
+              <a:t>را</a:t>
+            </a:r>
+            <a:r>
+              <a:rPr lang="en-US" dirty="0"/>
+              <a:t> </a:t>
+            </a:r>
+            <a:r>
+              <a:rPr lang="en-US" dirty="0" err="1"/>
+              <a:t>به</a:t>
+            </a:r>
+            <a:r>
+              <a:rPr lang="en-US" dirty="0"/>
+              <a:t> ۷ و </a:t>
+            </a:r>
+            <a:r>
+              <a:rPr lang="en-US" dirty="0" err="1"/>
+              <a:t>دیگری</a:t>
+            </a:r>
+            <a:r>
+              <a:rPr lang="en-US" dirty="0"/>
+              <a:t> </a:t>
+            </a:r>
+            <a:r>
+              <a:rPr lang="en-US" dirty="0" err="1"/>
+              <a:t>به</a:t>
+            </a:r>
+            <a:r>
+              <a:rPr lang="en-US" dirty="0"/>
+              <a:t> ۸ </a:t>
+            </a:r>
+            <a:r>
+              <a:rPr lang="en-US" dirty="0" err="1"/>
+              <a:t>میلیون</a:t>
+            </a:r>
+            <a:r>
+              <a:rPr lang="en-US" dirty="0"/>
+              <a:t> </a:t>
+            </a:r>
+            <a:r>
+              <a:rPr lang="en-US" dirty="0" err="1"/>
+              <a:t>تغییر</a:t>
+            </a:r>
+            <a:r>
+              <a:rPr lang="en-US" dirty="0"/>
+              <a:t> </a:t>
+            </a:r>
+            <a:r>
+              <a:rPr lang="en-US" dirty="0" err="1"/>
+              <a:t>دهد</a:t>
+            </a:r>
+            <a:r>
+              <a:rPr lang="en-US" dirty="0"/>
+              <a:t>. </a:t>
+            </a:r>
+            <a:r>
+              <a:rPr lang="en-US" dirty="0" err="1"/>
+              <a:t>در</a:t>
+            </a:r>
+            <a:r>
+              <a:rPr lang="en-US" dirty="0"/>
+              <a:t> </a:t>
+            </a:r>
+            <a:r>
+              <a:rPr lang="en-US" dirty="0" err="1"/>
+              <a:t>نتیجه</a:t>
+            </a:r>
+            <a:r>
+              <a:rPr lang="en-US" dirty="0"/>
+              <a:t>، </a:t>
+            </a:r>
+            <a:r>
+              <a:rPr lang="en-US" dirty="0" err="1"/>
+              <a:t>موجودی</a:t>
+            </a:r>
+            <a:r>
+              <a:rPr lang="en-US" dirty="0"/>
+              <a:t> </a:t>
+            </a:r>
+            <a:r>
+              <a:rPr lang="en-US" dirty="0" err="1"/>
+              <a:t>نهایی</a:t>
+            </a:r>
+            <a:r>
+              <a:rPr lang="en-US" dirty="0"/>
+              <a:t> </a:t>
+            </a:r>
+            <a:r>
+              <a:rPr lang="en-US" dirty="0" err="1"/>
+              <a:t>ممکن</a:t>
+            </a:r>
+            <a:r>
+              <a:rPr lang="en-US" dirty="0"/>
+              <a:t> </a:t>
+            </a:r>
+            <a:r>
+              <a:rPr lang="en-US" dirty="0" err="1"/>
+              <a:t>است</a:t>
+            </a:r>
+            <a:r>
+              <a:rPr lang="en-US" dirty="0"/>
+              <a:t> </a:t>
+            </a:r>
+            <a:r>
+              <a:rPr lang="en-US" dirty="0" err="1"/>
+              <a:t>اشتباه</a:t>
+            </a:r>
+            <a:r>
+              <a:rPr lang="en-US" dirty="0"/>
+              <a:t> و </a:t>
+            </a:r>
+            <a:r>
+              <a:rPr lang="en-US" dirty="0" err="1"/>
+              <a:t>برابر</a:t>
+            </a:r>
+            <a:r>
+              <a:rPr lang="en-US" dirty="0"/>
+              <a:t> </a:t>
+            </a:r>
+            <a:r>
+              <a:rPr lang="en-US" dirty="0" err="1"/>
+              <a:t>با</a:t>
+            </a:r>
+            <a:r>
+              <a:rPr lang="en-US" dirty="0"/>
+              <a:t> </a:t>
+            </a:r>
+            <a:r>
+              <a:rPr lang="en-US" b="1" dirty="0"/>
+              <a:t>۸ </a:t>
+            </a:r>
+            <a:r>
+              <a:rPr lang="en-US" b="1" dirty="0" err="1"/>
+              <a:t>میلیون</a:t>
+            </a:r>
+            <a:r>
+              <a:rPr lang="en-US" b="1" dirty="0"/>
+              <a:t> </a:t>
+            </a:r>
+            <a:r>
+              <a:rPr lang="en-US" b="1" dirty="0" err="1"/>
+              <a:t>تومان</a:t>
+            </a:r>
+            <a:r>
+              <a:rPr lang="en-US" dirty="0"/>
+              <a:t> </a:t>
+            </a:r>
+            <a:r>
+              <a:rPr lang="en-US" dirty="0" err="1"/>
+              <a:t>شود</a:t>
+            </a:r>
+            <a:r>
+              <a:rPr lang="en-US" dirty="0"/>
+              <a:t>، </a:t>
+            </a:r>
+            <a:r>
+              <a:rPr lang="en-US" dirty="0" err="1"/>
+              <a:t>در</a:t>
+            </a:r>
+            <a:r>
+              <a:rPr lang="en-US" dirty="0"/>
+              <a:t> </a:t>
+            </a:r>
+            <a:r>
+              <a:rPr lang="en-US" dirty="0" err="1"/>
+              <a:t>حالی</a:t>
+            </a:r>
+            <a:r>
+              <a:rPr lang="en-US" dirty="0"/>
+              <a:t> </a:t>
+            </a:r>
+            <a:r>
+              <a:rPr lang="en-US" dirty="0" err="1"/>
+              <a:t>که</a:t>
+            </a:r>
+            <a:r>
+              <a:rPr lang="en-US" dirty="0"/>
+              <a:t> </a:t>
+            </a:r>
+            <a:r>
+              <a:rPr lang="en-US" dirty="0" err="1"/>
+              <a:t>باید</a:t>
+            </a:r>
+            <a:r>
+              <a:rPr lang="en-US" dirty="0"/>
+              <a:t> </a:t>
+            </a:r>
+            <a:r>
+              <a:rPr lang="en-US" b="1" dirty="0"/>
+              <a:t>۵ </a:t>
+            </a:r>
+            <a:r>
+              <a:rPr lang="en-US" b="1" dirty="0" err="1"/>
+              <a:t>میلیون</a:t>
+            </a:r>
+            <a:r>
+              <a:rPr lang="en-US" b="1" dirty="0"/>
+              <a:t> </a:t>
+            </a:r>
+            <a:r>
+              <a:rPr lang="en-US" b="1" dirty="0" err="1"/>
+              <a:t>تومان</a:t>
+            </a:r>
+            <a:r>
+              <a:rPr lang="en-US" dirty="0"/>
+              <a:t> </a:t>
+            </a:r>
+            <a:r>
+              <a:rPr lang="en-US" dirty="0" err="1"/>
+              <a:t>باشد</a:t>
+            </a:r>
+            <a:r>
+              <a:rPr lang="en-US" dirty="0"/>
+              <a:t>.</a:t>
+            </a:r>
+          </a:p>
+          <a:p>
+            <a:pPr algn="r" rtl="1"/>
+            <a:r>
+              <a:rPr lang="en-US" b="1" dirty="0" err="1"/>
+              <a:t>مدیر</a:t>
+            </a:r>
+            <a:r>
+              <a:rPr lang="en-US" b="1" dirty="0"/>
+              <a:t> </a:t>
+            </a:r>
+            <a:r>
+              <a:rPr lang="en-US" b="1" dirty="0" err="1"/>
+              <a:t>کنترل</a:t>
+            </a:r>
+            <a:r>
+              <a:rPr lang="en-US" b="1" dirty="0"/>
+              <a:t> </a:t>
+            </a:r>
+            <a:r>
+              <a:rPr lang="en-US" b="1" dirty="0" err="1"/>
+              <a:t>همروندی</a:t>
+            </a:r>
+            <a:r>
+              <a:rPr lang="en-US" b="1" dirty="0"/>
+              <a:t> (Concurrency-Control Manager)</a:t>
+            </a:r>
+            <a:r>
+              <a:rPr lang="en-US" dirty="0"/>
+              <a:t> </a:t>
+            </a:r>
+            <a:r>
+              <a:rPr lang="en-US" dirty="0" err="1"/>
+              <a:t>با</a:t>
+            </a:r>
+            <a:r>
+              <a:rPr lang="en-US" dirty="0"/>
+              <a:t> </a:t>
+            </a:r>
+            <a:r>
+              <a:rPr lang="en-US" dirty="0" err="1"/>
+              <a:t>استفاده</a:t>
+            </a:r>
+            <a:r>
+              <a:rPr lang="en-US" dirty="0"/>
+              <a:t> </a:t>
+            </a:r>
+            <a:r>
+              <a:rPr lang="en-US" dirty="0" err="1"/>
+              <a:t>از</a:t>
+            </a:r>
+            <a:r>
+              <a:rPr lang="en-US" dirty="0"/>
+              <a:t> </a:t>
+            </a:r>
+            <a:r>
+              <a:rPr lang="en-US" dirty="0" err="1"/>
+              <a:t>سازوکارهایی</a:t>
+            </a:r>
+            <a:r>
+              <a:rPr lang="en-US" dirty="0"/>
+              <a:t> </a:t>
+            </a:r>
+            <a:r>
+              <a:rPr lang="en-US" dirty="0" err="1"/>
+              <a:t>مانند</a:t>
+            </a:r>
+            <a:r>
+              <a:rPr lang="en-US" dirty="0"/>
+              <a:t> </a:t>
+            </a:r>
+            <a:r>
+              <a:rPr lang="en-US" b="1" dirty="0"/>
+              <a:t>Locking</a:t>
+            </a:r>
+            <a:r>
+              <a:rPr lang="en-US" dirty="0"/>
+              <a:t> </a:t>
+            </a:r>
+            <a:r>
+              <a:rPr lang="en-US" dirty="0" err="1"/>
+              <a:t>یا</a:t>
+            </a:r>
+            <a:r>
+              <a:rPr lang="en-US" dirty="0"/>
+              <a:t> </a:t>
+            </a:r>
+            <a:r>
+              <a:rPr lang="en-US" b="1" dirty="0"/>
+              <a:t>Timestamp Ordering</a:t>
+            </a:r>
+            <a:r>
+              <a:rPr lang="en-US" dirty="0"/>
+              <a:t> </a:t>
+            </a:r>
+            <a:r>
+              <a:rPr lang="en-US" dirty="0" err="1"/>
+              <a:t>ترتیب</a:t>
+            </a:r>
+            <a:r>
+              <a:rPr lang="en-US" dirty="0"/>
+              <a:t> </a:t>
+            </a:r>
+            <a:r>
+              <a:rPr lang="en-US" dirty="0" err="1"/>
+              <a:t>یا</a:t>
+            </a:r>
+            <a:r>
+              <a:rPr lang="en-US" dirty="0"/>
+              <a:t> </a:t>
+            </a:r>
+            <a:r>
+              <a:rPr lang="en-US" dirty="0" err="1"/>
+              <a:t>نحوه</a:t>
+            </a:r>
+            <a:r>
+              <a:rPr lang="en-US" dirty="0"/>
+              <a:t> </a:t>
+            </a:r>
+            <a:r>
+              <a:rPr lang="en-US" dirty="0" err="1"/>
+              <a:t>اجرای</a:t>
+            </a:r>
+            <a:r>
+              <a:rPr lang="en-US" dirty="0"/>
+              <a:t> </a:t>
+            </a:r>
+            <a:r>
+              <a:rPr lang="en-US" dirty="0" err="1"/>
+              <a:t>این</a:t>
+            </a:r>
+            <a:r>
+              <a:rPr lang="en-US" dirty="0"/>
+              <a:t> </a:t>
+            </a:r>
+            <a:r>
+              <a:rPr lang="en-US" dirty="0" err="1"/>
+              <a:t>تراکنش‌ها</a:t>
+            </a:r>
+            <a:r>
+              <a:rPr lang="en-US" dirty="0"/>
+              <a:t> </a:t>
+            </a:r>
+            <a:r>
+              <a:rPr lang="en-US" dirty="0" err="1"/>
+              <a:t>را</a:t>
+            </a:r>
+            <a:r>
+              <a:rPr lang="en-US" dirty="0"/>
+              <a:t> </a:t>
+            </a:r>
+            <a:r>
+              <a:rPr lang="en-US" dirty="0" err="1"/>
+              <a:t>کنترل</a:t>
+            </a:r>
+            <a:r>
+              <a:rPr lang="en-US" dirty="0"/>
+              <a:t> </a:t>
+            </a:r>
+            <a:r>
+              <a:rPr lang="en-US" dirty="0" err="1"/>
+              <a:t>می‌کند</a:t>
+            </a:r>
+            <a:r>
+              <a:rPr lang="en-US" dirty="0"/>
+              <a:t> </a:t>
+            </a:r>
+            <a:r>
+              <a:rPr lang="en-US" dirty="0" err="1"/>
+              <a:t>تا</a:t>
+            </a:r>
+            <a:r>
+              <a:rPr lang="en-US" dirty="0"/>
+              <a:t> </a:t>
+            </a:r>
+            <a:r>
+              <a:rPr lang="en-US" dirty="0" err="1"/>
+              <a:t>تراکنش‌ها</a:t>
+            </a:r>
+            <a:r>
+              <a:rPr lang="en-US" dirty="0"/>
+              <a:t> </a:t>
+            </a:r>
+            <a:r>
+              <a:rPr lang="en-US" dirty="0" err="1"/>
+              <a:t>با</a:t>
+            </a:r>
+            <a:r>
+              <a:rPr lang="en-US" dirty="0"/>
+              <a:t> </a:t>
+            </a:r>
+            <a:r>
+              <a:rPr lang="en-US" dirty="0" err="1"/>
+              <a:t>یکدیگر</a:t>
+            </a:r>
+            <a:r>
+              <a:rPr lang="en-US" dirty="0"/>
+              <a:t> </a:t>
+            </a:r>
+            <a:r>
+              <a:rPr lang="en-US" dirty="0" err="1"/>
+              <a:t>تداخل</a:t>
+            </a:r>
+            <a:r>
+              <a:rPr lang="en-US" dirty="0"/>
+              <a:t> </a:t>
+            </a:r>
+            <a:r>
+              <a:rPr lang="en-US" dirty="0" err="1"/>
+              <a:t>نداشته</a:t>
+            </a:r>
+            <a:r>
+              <a:rPr lang="en-US" dirty="0"/>
+              <a:t> </a:t>
+            </a:r>
+            <a:r>
+              <a:rPr lang="en-US" dirty="0" err="1"/>
+              <a:t>باشند</a:t>
+            </a:r>
+            <a:r>
+              <a:rPr lang="en-US" dirty="0"/>
+              <a:t> و </a:t>
+            </a:r>
+            <a:r>
+              <a:rPr lang="en-US" b="1" dirty="0" err="1"/>
+              <a:t>سازگاری</a:t>
+            </a:r>
+            <a:r>
+              <a:rPr lang="en-US" b="1" dirty="0"/>
+              <a:t> (Consistency)</a:t>
+            </a:r>
+            <a:r>
+              <a:rPr lang="en-US" dirty="0"/>
+              <a:t> </a:t>
+            </a:r>
+            <a:r>
+              <a:rPr lang="en-US" dirty="0" err="1"/>
+              <a:t>پایگاه</a:t>
+            </a:r>
+            <a:r>
+              <a:rPr lang="en-US" dirty="0"/>
+              <a:t> </a:t>
+            </a:r>
+            <a:r>
+              <a:rPr lang="en-US" dirty="0" err="1"/>
+              <a:t>داده</a:t>
+            </a:r>
+            <a:r>
+              <a:rPr lang="en-US" dirty="0"/>
+              <a:t> </a:t>
+            </a:r>
+            <a:r>
+              <a:rPr lang="en-US" dirty="0" err="1"/>
+              <a:t>حفظ</a:t>
+            </a:r>
+            <a:r>
+              <a:rPr lang="en-US" dirty="0"/>
+              <a:t> </a:t>
+            </a:r>
+            <a:r>
+              <a:rPr lang="en-US" dirty="0" err="1"/>
+              <a:t>شود</a:t>
+            </a:r>
+            <a:r>
+              <a:rPr lang="en-US" dirty="0"/>
+              <a:t>.</a:t>
+            </a:r>
+          </a:p>
+          <a:p>
+            <a:pPr algn="r" rtl="1"/>
+            <a:r>
+              <a:rPr lang="en-US" dirty="0" err="1"/>
+              <a:t>به‌صورت</a:t>
+            </a:r>
+            <a:r>
+              <a:rPr lang="en-US" dirty="0"/>
+              <a:t> </a:t>
+            </a:r>
+            <a:r>
+              <a:rPr lang="en-US" dirty="0" err="1"/>
+              <a:t>خلاصه</a:t>
+            </a:r>
+            <a:r>
+              <a:rPr lang="en-US" dirty="0"/>
+              <a:t>:</a:t>
+            </a:r>
+          </a:p>
+          <a:p>
+            <a:pPr algn="r" rtl="1"/>
+            <a:r>
+              <a:rPr lang="en-US" b="1" dirty="0"/>
+              <a:t>Concurrency-Control Manager = </a:t>
+            </a:r>
+            <a:r>
+              <a:rPr lang="en-US" b="1" dirty="0" err="1"/>
+              <a:t>جلوگیری</a:t>
+            </a:r>
+            <a:r>
+              <a:rPr lang="en-US" b="1" dirty="0"/>
+              <a:t> </a:t>
+            </a:r>
+            <a:r>
+              <a:rPr lang="en-US" b="1" dirty="0" err="1"/>
+              <a:t>از</a:t>
+            </a:r>
+            <a:r>
+              <a:rPr lang="en-US" b="1" dirty="0"/>
+              <a:t> </a:t>
+            </a:r>
+            <a:r>
+              <a:rPr lang="en-US" b="1" dirty="0" err="1"/>
+              <a:t>تداخل</a:t>
+            </a:r>
+            <a:r>
+              <a:rPr lang="en-US" b="1" dirty="0"/>
+              <a:t> </a:t>
+            </a:r>
+            <a:r>
+              <a:rPr lang="en-US" b="1" dirty="0" err="1"/>
+              <a:t>تراکنش‌های</a:t>
+            </a:r>
+            <a:r>
+              <a:rPr lang="en-US" b="1" dirty="0"/>
+              <a:t> </a:t>
+            </a:r>
+            <a:r>
+              <a:rPr lang="en-US" b="1" dirty="0" err="1"/>
+              <a:t>همزمان</a:t>
+            </a:r>
+            <a:r>
+              <a:rPr lang="en-US" b="1" dirty="0"/>
+              <a:t> و </a:t>
+            </a:r>
+            <a:r>
+              <a:rPr lang="en-US" b="1" dirty="0" err="1"/>
+              <a:t>حفظ</a:t>
+            </a:r>
+            <a:r>
+              <a:rPr lang="en-US" b="1" dirty="0"/>
+              <a:t> </a:t>
+            </a:r>
+            <a:r>
+              <a:rPr lang="en-US" b="1" dirty="0" err="1"/>
+              <a:t>سازگاری</a:t>
+            </a:r>
+            <a:r>
+              <a:rPr lang="en-US" b="1" dirty="0"/>
+              <a:t> </a:t>
+            </a:r>
+            <a:r>
+              <a:rPr lang="en-US" b="1" dirty="0" err="1"/>
+              <a:t>داده‌ها</a:t>
+            </a:r>
+            <a:r>
+              <a:rPr lang="en-US" b="1" dirty="0"/>
+              <a:t>.</a:t>
+            </a:r>
+            <a:endParaRPr lang="en-US" dirty="0"/>
+          </a:p>
+          <a:p>
+            <a:pPr algn="r" rtl="1"/>
+            <a:endParaRPr lang="en-US" altLang="en-US" dirty="0">
               <a:latin typeface="Times New Roman" panose="02020603050405020304" pitchFamily="18" charset="0"/>
             </a:endParaRPr>
           </a:p>
@@ -8811,7 +10841,1478 @@
           <a:bodyPr/>
           <a:lstStyle/>
           <a:p>
-            <a:endParaRPr lang="en-US" altLang="en-US">
+            <a:pPr algn="r" rtl="1"/>
+            <a:r>
+              <a:rPr lang="fa-IR" b="1" dirty="0"/>
+              <a:t>م</a:t>
+            </a:r>
+            <a:r>
+              <a:rPr lang="en-US" b="1" dirty="0" err="1"/>
+              <a:t>شکل</a:t>
+            </a:r>
+            <a:r>
+              <a:rPr lang="en-US" b="1" dirty="0"/>
+              <a:t> Two-Tier </a:t>
+            </a:r>
+            <a:r>
+              <a:rPr lang="en-US" b="1" dirty="0" err="1"/>
+              <a:t>چیست</a:t>
+            </a:r>
+            <a:r>
+              <a:rPr lang="en-US" b="1" dirty="0"/>
+              <a:t>؟</a:t>
+            </a:r>
+            <a:r>
+              <a:rPr lang="fa-IR" b="1" dirty="0"/>
+              <a:t> </a:t>
+            </a:r>
+            <a:r>
+              <a:rPr lang="en-US" dirty="0" err="1"/>
+              <a:t>برنامه</a:t>
+            </a:r>
+            <a:r>
+              <a:rPr lang="en-US" dirty="0"/>
+              <a:t> </a:t>
+            </a:r>
+            <a:r>
+              <a:rPr lang="en-US" dirty="0" err="1"/>
+              <a:t>مستقیماً</a:t>
+            </a:r>
+            <a:r>
+              <a:rPr lang="en-US" dirty="0"/>
+              <a:t> </a:t>
+            </a:r>
+            <a:r>
+              <a:rPr lang="en-US" dirty="0" err="1"/>
+              <a:t>با</a:t>
+            </a:r>
+            <a:r>
+              <a:rPr lang="en-US" dirty="0"/>
+              <a:t> Database </a:t>
+            </a:r>
+            <a:r>
+              <a:rPr lang="en-US" dirty="0" err="1"/>
+              <a:t>صحبت</a:t>
+            </a:r>
+            <a:r>
+              <a:rPr lang="en-US" dirty="0"/>
+              <a:t> </a:t>
+            </a:r>
+            <a:r>
+              <a:rPr lang="en-US" dirty="0" err="1"/>
+              <a:t>می‌کند</a:t>
+            </a:r>
+            <a:r>
+              <a:rPr lang="en-US" dirty="0"/>
+              <a:t>.</a:t>
+            </a:r>
+            <a:endParaRPr lang="en-US" b="1" dirty="0"/>
+          </a:p>
+          <a:p>
+            <a:pPr algn="r" rtl="1"/>
+            <a:r>
+              <a:rPr lang="en-US" dirty="0" err="1"/>
+              <a:t>اگر</a:t>
+            </a:r>
+            <a:r>
+              <a:rPr lang="en-US" dirty="0"/>
+              <a:t> 1000 </a:t>
+            </a:r>
+            <a:r>
+              <a:rPr lang="en-US" dirty="0" err="1"/>
+              <a:t>کاربر</a:t>
+            </a:r>
+            <a:r>
+              <a:rPr lang="en-US" dirty="0"/>
+              <a:t> </a:t>
+            </a:r>
+            <a:r>
+              <a:rPr lang="en-US" dirty="0" err="1"/>
+              <a:t>داشته</a:t>
+            </a:r>
+            <a:r>
+              <a:rPr lang="en-US" dirty="0"/>
+              <a:t> </a:t>
+            </a:r>
+            <a:r>
+              <a:rPr lang="en-US" dirty="0" err="1"/>
+              <a:t>باشیم</a:t>
+            </a:r>
+            <a:r>
+              <a:rPr lang="en-US" dirty="0"/>
+              <a:t>:</a:t>
+            </a:r>
+          </a:p>
+          <a:p>
+            <a:pPr algn="r" rtl="1"/>
+            <a:r>
+              <a:rPr lang="en-US" sz="1200" kern="1200" dirty="0">
+                <a:solidFill>
+                  <a:schemeClr val="tx1"/>
+                </a:solidFill>
+                <a:latin typeface="Times New Roman" charset="0"/>
+                <a:ea typeface="MS PGothic" panose="020B0600070205080204" pitchFamily="34" charset="-128"/>
+                <a:cs typeface="ＭＳ Ｐゴシック" charset="0"/>
+              </a:rPr>
+              <a:t>User 1 ──┐</a:t>
+            </a:r>
+          </a:p>
+          <a:p>
+            <a:pPr algn="r" rtl="1"/>
+            <a:r>
+              <a:rPr lang="en-US" sz="1200" kern="1200" dirty="0">
+                <a:solidFill>
+                  <a:schemeClr val="tx1"/>
+                </a:solidFill>
+                <a:latin typeface="Times New Roman" charset="0"/>
+                <a:ea typeface="MS PGothic" panose="020B0600070205080204" pitchFamily="34" charset="-128"/>
+                <a:cs typeface="ＭＳ Ｐゴシック" charset="0"/>
+              </a:rPr>
+              <a:t>User 2 ──┤</a:t>
+            </a:r>
+          </a:p>
+          <a:p>
+            <a:pPr algn="r" rtl="1"/>
+            <a:r>
+              <a:rPr lang="en-US" sz="1200" kern="1200" dirty="0">
+                <a:solidFill>
+                  <a:schemeClr val="tx1"/>
+                </a:solidFill>
+                <a:latin typeface="Times New Roman" charset="0"/>
+                <a:ea typeface="MS PGothic" panose="020B0600070205080204" pitchFamily="34" charset="-128"/>
+                <a:cs typeface="ＭＳ Ｐゴシック" charset="0"/>
+              </a:rPr>
+              <a:t>User 3 ──┤</a:t>
+            </a:r>
+          </a:p>
+          <a:p>
+            <a:pPr algn="r" rtl="1"/>
+            <a:r>
+              <a:rPr lang="en-US" sz="1200" kern="1200" dirty="0">
+                <a:solidFill>
+                  <a:schemeClr val="tx1"/>
+                </a:solidFill>
+                <a:latin typeface="Times New Roman" charset="0"/>
+                <a:ea typeface="MS PGothic" panose="020B0600070205080204" pitchFamily="34" charset="-128"/>
+                <a:cs typeface="ＭＳ Ｐゴシック" charset="0"/>
+              </a:rPr>
+              <a:t>User 4 ──┤──→ Database</a:t>
+            </a:r>
+          </a:p>
+          <a:p>
+            <a:pPr algn="r" rtl="1"/>
+            <a:r>
+              <a:rPr lang="en-US" sz="1200" kern="1200" dirty="0">
+                <a:solidFill>
+                  <a:schemeClr val="tx1"/>
+                </a:solidFill>
+                <a:latin typeface="Times New Roman" charset="0"/>
+                <a:ea typeface="MS PGothic" panose="020B0600070205080204" pitchFamily="34" charset="-128"/>
+                <a:cs typeface="ＭＳ Ｐゴシック" charset="0"/>
+              </a:rPr>
+              <a:t>  ...    │</a:t>
+            </a:r>
+          </a:p>
+          <a:p>
+            <a:pPr algn="r" rtl="1"/>
+            <a:r>
+              <a:rPr lang="en-US" sz="1200" kern="1200" dirty="0">
+                <a:solidFill>
+                  <a:schemeClr val="tx1"/>
+                </a:solidFill>
+                <a:latin typeface="Times New Roman" charset="0"/>
+                <a:ea typeface="MS PGothic" panose="020B0600070205080204" pitchFamily="34" charset="-128"/>
+                <a:cs typeface="ＭＳ Ｐゴシック" charset="0"/>
+              </a:rPr>
+              <a:t>User 1000┘</a:t>
+            </a:r>
+          </a:p>
+          <a:p>
+            <a:pPr algn="r" rtl="1"/>
+            <a:r>
+              <a:rPr lang="en-US" dirty="0" err="1"/>
+              <a:t>همه</a:t>
+            </a:r>
+            <a:r>
+              <a:rPr lang="en-US" dirty="0"/>
+              <a:t> </a:t>
+            </a:r>
+            <a:r>
+              <a:rPr lang="en-US" dirty="0" err="1"/>
+              <a:t>برنامه‌ها</a:t>
+            </a:r>
+            <a:r>
+              <a:rPr lang="en-US" dirty="0"/>
+              <a:t> </a:t>
+            </a:r>
+            <a:r>
+              <a:rPr lang="en-US" dirty="0" err="1"/>
+              <a:t>مستقیماً</a:t>
+            </a:r>
+            <a:r>
+              <a:rPr lang="en-US" dirty="0"/>
+              <a:t> </a:t>
+            </a:r>
+            <a:r>
+              <a:rPr lang="en-US" dirty="0" err="1"/>
+              <a:t>به</a:t>
+            </a:r>
+            <a:r>
+              <a:rPr lang="en-US" dirty="0"/>
+              <a:t> Database </a:t>
+            </a:r>
+            <a:r>
+              <a:rPr lang="en-US" dirty="0" err="1"/>
+              <a:t>متصل</a:t>
+            </a:r>
+            <a:r>
+              <a:rPr lang="en-US" dirty="0"/>
+              <a:t> </a:t>
+            </a:r>
+            <a:r>
+              <a:rPr lang="en-US" dirty="0" err="1"/>
+              <a:t>می‌شوند</a:t>
+            </a:r>
+            <a:r>
+              <a:rPr lang="en-US" dirty="0"/>
+              <a:t>.</a:t>
+            </a:r>
+          </a:p>
+          <a:p>
+            <a:pPr algn="r" rtl="1"/>
+            <a:r>
+              <a:rPr lang="en-US" dirty="0" err="1"/>
+              <a:t>این</a:t>
+            </a:r>
+            <a:r>
+              <a:rPr lang="en-US" dirty="0"/>
+              <a:t> </a:t>
+            </a:r>
+            <a:r>
+              <a:rPr lang="en-US" dirty="0" err="1"/>
+              <a:t>موضوع</a:t>
+            </a:r>
+            <a:r>
+              <a:rPr lang="en-US" dirty="0"/>
+              <a:t> </a:t>
+            </a:r>
+            <a:r>
+              <a:rPr lang="en-US" dirty="0" err="1"/>
+              <a:t>می‌تواند</a:t>
+            </a:r>
+            <a:r>
+              <a:rPr lang="en-US" dirty="0"/>
+              <a:t> </a:t>
+            </a:r>
+            <a:r>
+              <a:rPr lang="en-US" dirty="0" err="1"/>
+              <a:t>باعث</a:t>
+            </a:r>
+            <a:r>
+              <a:rPr lang="en-US" dirty="0"/>
+              <a:t> </a:t>
+            </a:r>
+            <a:r>
+              <a:rPr lang="en-US" dirty="0" err="1"/>
+              <a:t>شود</a:t>
+            </a:r>
+            <a:r>
+              <a:rPr lang="en-US" dirty="0"/>
+              <a:t>:</a:t>
+            </a:r>
+          </a:p>
+          <a:p>
+            <a:pPr lvl="0" algn="r" rtl="1"/>
+            <a:r>
+              <a:rPr lang="en-US" dirty="0" err="1"/>
+              <a:t>تعداد</a:t>
+            </a:r>
+            <a:r>
+              <a:rPr lang="en-US" dirty="0"/>
+              <a:t> </a:t>
+            </a:r>
+            <a:r>
+              <a:rPr lang="en-US" dirty="0" err="1"/>
+              <a:t>زیادی</a:t>
+            </a:r>
+            <a:r>
+              <a:rPr lang="en-US" dirty="0"/>
+              <a:t> Connection </a:t>
+            </a:r>
+            <a:r>
+              <a:rPr lang="en-US" dirty="0" err="1"/>
+              <a:t>به</a:t>
+            </a:r>
+            <a:r>
+              <a:rPr lang="en-US" dirty="0"/>
+              <a:t> Database </a:t>
+            </a:r>
+            <a:r>
+              <a:rPr lang="en-US" dirty="0" err="1"/>
+              <a:t>ایجاد</a:t>
+            </a:r>
+            <a:r>
+              <a:rPr lang="en-US" dirty="0"/>
+              <a:t> </a:t>
+            </a:r>
+            <a:r>
+              <a:rPr lang="en-US" dirty="0" err="1"/>
+              <a:t>شود</a:t>
+            </a:r>
+            <a:r>
+              <a:rPr lang="en-US" dirty="0"/>
+              <a:t>. </a:t>
+            </a:r>
+          </a:p>
+          <a:p>
+            <a:pPr lvl="0" algn="r" rtl="1"/>
+            <a:r>
+              <a:rPr lang="en-US" dirty="0" err="1"/>
+              <a:t>مدیریت</a:t>
+            </a:r>
+            <a:r>
+              <a:rPr lang="en-US" dirty="0"/>
+              <a:t> </a:t>
+            </a:r>
+            <a:r>
+              <a:rPr lang="en-US" dirty="0" err="1"/>
+              <a:t>سیستم</a:t>
+            </a:r>
+            <a:r>
+              <a:rPr lang="en-US" dirty="0"/>
+              <a:t> </a:t>
+            </a:r>
+            <a:r>
+              <a:rPr lang="en-US" dirty="0" err="1"/>
+              <a:t>سخت‌تر</a:t>
+            </a:r>
+            <a:r>
+              <a:rPr lang="en-US" dirty="0"/>
+              <a:t> </a:t>
+            </a:r>
+            <a:r>
+              <a:rPr lang="en-US" dirty="0" err="1"/>
+              <a:t>شود</a:t>
+            </a:r>
+            <a:r>
+              <a:rPr lang="en-US" dirty="0"/>
+              <a:t>. </a:t>
+            </a:r>
+          </a:p>
+          <a:p>
+            <a:pPr lvl="0" algn="r" rtl="1"/>
+            <a:r>
+              <a:rPr lang="en-US" dirty="0" err="1"/>
+              <a:t>امنیت</a:t>
+            </a:r>
+            <a:r>
+              <a:rPr lang="en-US" dirty="0"/>
+              <a:t> Database </a:t>
+            </a:r>
+            <a:r>
+              <a:rPr lang="en-US" dirty="0" err="1"/>
+              <a:t>دشوارتر</a:t>
+            </a:r>
+            <a:r>
+              <a:rPr lang="en-US" dirty="0"/>
+              <a:t> </a:t>
+            </a:r>
+            <a:r>
+              <a:rPr lang="en-US" dirty="0" err="1"/>
+              <a:t>شود</a:t>
+            </a:r>
+            <a:r>
+              <a:rPr lang="en-US" dirty="0"/>
+              <a:t>. </a:t>
+            </a:r>
+          </a:p>
+          <a:p>
+            <a:pPr lvl="0" algn="r" rtl="1"/>
+            <a:r>
+              <a:rPr lang="en-US" dirty="0" err="1"/>
+              <a:t>منطق</a:t>
+            </a:r>
+            <a:r>
+              <a:rPr lang="en-US" dirty="0"/>
+              <a:t> </a:t>
+            </a:r>
+            <a:r>
+              <a:rPr lang="en-US" dirty="0" err="1"/>
+              <a:t>تجاری</a:t>
+            </a:r>
+            <a:r>
+              <a:rPr lang="en-US" dirty="0"/>
+              <a:t> </a:t>
+            </a:r>
+            <a:r>
+              <a:rPr lang="en-US" dirty="0" err="1"/>
+              <a:t>بین</a:t>
+            </a:r>
+            <a:r>
+              <a:rPr lang="en-US" dirty="0"/>
+              <a:t> </a:t>
+            </a:r>
+            <a:r>
+              <a:rPr lang="en-US" dirty="0" err="1"/>
+              <a:t>برنامه‌های</a:t>
+            </a:r>
+            <a:r>
+              <a:rPr lang="en-US" dirty="0"/>
+              <a:t> </a:t>
+            </a:r>
+            <a:r>
+              <a:rPr lang="en-US" dirty="0" err="1"/>
+              <a:t>مختلف</a:t>
+            </a:r>
+            <a:r>
+              <a:rPr lang="en-US" dirty="0"/>
+              <a:t> </a:t>
+            </a:r>
+            <a:r>
+              <a:rPr lang="en-US" dirty="0" err="1"/>
+              <a:t>پراکنده</a:t>
+            </a:r>
+            <a:r>
+              <a:rPr lang="en-US" dirty="0"/>
+              <a:t> </a:t>
+            </a:r>
+            <a:r>
+              <a:rPr lang="en-US" dirty="0" err="1"/>
+              <a:t>شود</a:t>
+            </a:r>
+            <a:r>
+              <a:rPr lang="en-US" dirty="0"/>
+              <a:t>. </a:t>
+            </a:r>
+          </a:p>
+          <a:p>
+            <a:pPr lvl="0" algn="r" rtl="1"/>
+            <a:r>
+              <a:rPr lang="en-US" dirty="0" err="1"/>
+              <a:t>توسعه</a:t>
+            </a:r>
+            <a:r>
+              <a:rPr lang="en-US" dirty="0"/>
+              <a:t> و </a:t>
+            </a:r>
+            <a:r>
+              <a:rPr lang="en-US" dirty="0" err="1"/>
+              <a:t>نگهداری</a:t>
+            </a:r>
+            <a:r>
+              <a:rPr lang="en-US" dirty="0"/>
+              <a:t> </a:t>
+            </a:r>
+            <a:r>
+              <a:rPr lang="en-US" dirty="0" err="1"/>
+              <a:t>سیستم</a:t>
+            </a:r>
+            <a:r>
+              <a:rPr lang="en-US" dirty="0"/>
+              <a:t> </a:t>
+            </a:r>
+            <a:r>
+              <a:rPr lang="en-US" dirty="0" err="1"/>
+              <a:t>پیچیده‌تر</a:t>
+            </a:r>
+            <a:r>
+              <a:rPr lang="en-US" dirty="0"/>
+              <a:t> </a:t>
+            </a:r>
+            <a:r>
+              <a:rPr lang="en-US" dirty="0" err="1"/>
+              <a:t>شود</a:t>
+            </a:r>
+            <a:r>
+              <a:rPr lang="en-US" dirty="0"/>
+              <a:t>. </a:t>
+            </a:r>
+          </a:p>
+          <a:p>
+            <a:pPr algn="r" rtl="1"/>
+            <a:r>
+              <a:rPr lang="en-US" dirty="0" err="1"/>
+              <a:t>به</a:t>
+            </a:r>
+            <a:r>
+              <a:rPr lang="en-US" dirty="0"/>
+              <a:t> </a:t>
+            </a:r>
+            <a:r>
+              <a:rPr lang="en-US" dirty="0" err="1"/>
+              <a:t>همین</a:t>
+            </a:r>
+            <a:r>
+              <a:rPr lang="en-US" dirty="0"/>
+              <a:t> </a:t>
+            </a:r>
+            <a:r>
+              <a:rPr lang="en-US" dirty="0" err="1"/>
+              <a:t>دلیل</a:t>
+            </a:r>
+            <a:r>
+              <a:rPr lang="en-US" dirty="0"/>
+              <a:t> </a:t>
+            </a:r>
+            <a:r>
+              <a:rPr lang="en-US" dirty="0" err="1"/>
+              <a:t>معماری</a:t>
+            </a:r>
+            <a:r>
+              <a:rPr lang="en-US" dirty="0"/>
+              <a:t> </a:t>
+            </a:r>
+            <a:r>
+              <a:rPr lang="en-US" b="1" dirty="0"/>
+              <a:t>Three-Tier</a:t>
+            </a:r>
+            <a:r>
+              <a:rPr lang="en-US" dirty="0"/>
+              <a:t> </a:t>
+            </a:r>
+            <a:r>
+              <a:rPr lang="en-US" dirty="0" err="1"/>
+              <a:t>مطرح</a:t>
+            </a:r>
+            <a:r>
+              <a:rPr lang="en-US" dirty="0"/>
+              <a:t> </a:t>
+            </a:r>
+            <a:r>
+              <a:rPr lang="en-US" dirty="0" err="1"/>
+              <a:t>شد</a:t>
+            </a:r>
+            <a:r>
+              <a:rPr lang="en-US" dirty="0"/>
+              <a:t>.</a:t>
+            </a:r>
+          </a:p>
+          <a:p>
+            <a:pPr algn="r" rtl="1"/>
+            <a:endParaRPr lang="fa-IR" altLang="en-US" dirty="0">
+              <a:latin typeface="Times New Roman" panose="02020603050405020304" pitchFamily="18" charset="0"/>
+            </a:endParaRPr>
+          </a:p>
+          <a:p>
+            <a:pPr algn="r" rtl="1"/>
+            <a:r>
+              <a:rPr lang="en-US" b="1" dirty="0"/>
+              <a:t>4. Application Client و Application Server </a:t>
+            </a:r>
+            <a:r>
+              <a:rPr lang="en-US" b="1" dirty="0" err="1"/>
+              <a:t>چه</a:t>
+            </a:r>
+            <a:r>
+              <a:rPr lang="en-US" b="1" dirty="0"/>
+              <a:t> </a:t>
+            </a:r>
+            <a:r>
+              <a:rPr lang="en-US" b="1" dirty="0" err="1"/>
+              <a:t>هستند</a:t>
+            </a:r>
+            <a:r>
+              <a:rPr lang="en-US" b="1" dirty="0"/>
+              <a:t>؟</a:t>
+            </a:r>
+          </a:p>
+          <a:p>
+            <a:pPr algn="r" rtl="1"/>
+            <a:r>
+              <a:rPr lang="en-US" dirty="0" err="1"/>
+              <a:t>این</a:t>
+            </a:r>
+            <a:r>
+              <a:rPr lang="en-US" dirty="0"/>
+              <a:t> </a:t>
+            </a:r>
+            <a:r>
+              <a:rPr lang="en-US" dirty="0" err="1"/>
+              <a:t>قسمت</a:t>
+            </a:r>
+            <a:r>
+              <a:rPr lang="en-US" dirty="0"/>
+              <a:t> </a:t>
+            </a:r>
+            <a:r>
+              <a:rPr lang="en-US" dirty="0" err="1"/>
+              <a:t>شکل</a:t>
+            </a:r>
+            <a:r>
+              <a:rPr lang="en-US" dirty="0"/>
+              <a:t> </a:t>
+            </a:r>
+            <a:r>
+              <a:rPr lang="en-US" dirty="0" err="1"/>
+              <a:t>ممکن</a:t>
+            </a:r>
+            <a:r>
+              <a:rPr lang="en-US" dirty="0"/>
+              <a:t> </a:t>
+            </a:r>
+            <a:r>
+              <a:rPr lang="en-US" dirty="0" err="1"/>
+              <a:t>است</a:t>
+            </a:r>
+            <a:r>
+              <a:rPr lang="en-US" dirty="0"/>
+              <a:t> </a:t>
+            </a:r>
+            <a:r>
+              <a:rPr lang="en-US" dirty="0" err="1"/>
+              <a:t>کمی</a:t>
+            </a:r>
+            <a:r>
+              <a:rPr lang="en-US" dirty="0"/>
+              <a:t> </a:t>
+            </a:r>
+            <a:r>
+              <a:rPr lang="en-US" dirty="0" err="1"/>
+              <a:t>گیج‌کننده</a:t>
+            </a:r>
+            <a:r>
+              <a:rPr lang="en-US" dirty="0"/>
+              <a:t> </a:t>
+            </a:r>
+            <a:r>
+              <a:rPr lang="en-US" dirty="0" err="1"/>
+              <a:t>باشد</a:t>
+            </a:r>
+            <a:r>
+              <a:rPr lang="en-US" dirty="0"/>
+              <a:t>.</a:t>
+            </a:r>
+          </a:p>
+          <a:p>
+            <a:pPr algn="r" rtl="1"/>
+            <a:r>
+              <a:rPr lang="en-US" b="1" dirty="0"/>
+              <a:t>Application Client</a:t>
+            </a:r>
+          </a:p>
+          <a:p>
+            <a:pPr algn="r" rtl="1"/>
+            <a:r>
+              <a:rPr lang="en-US" dirty="0" err="1"/>
+              <a:t>چیزی</a:t>
+            </a:r>
+            <a:r>
+              <a:rPr lang="en-US" dirty="0"/>
+              <a:t> </a:t>
+            </a:r>
+            <a:r>
+              <a:rPr lang="en-US" dirty="0" err="1"/>
+              <a:t>است</a:t>
+            </a:r>
+            <a:r>
+              <a:rPr lang="en-US" dirty="0"/>
+              <a:t> </a:t>
+            </a:r>
+            <a:r>
+              <a:rPr lang="en-US" dirty="0" err="1"/>
+              <a:t>که</a:t>
+            </a:r>
+            <a:r>
+              <a:rPr lang="en-US" dirty="0"/>
+              <a:t> </a:t>
+            </a:r>
+            <a:r>
+              <a:rPr lang="en-US" dirty="0" err="1"/>
+              <a:t>کاربر</a:t>
+            </a:r>
+            <a:r>
+              <a:rPr lang="en-US" dirty="0"/>
+              <a:t> </a:t>
+            </a:r>
+            <a:r>
+              <a:rPr lang="en-US" dirty="0" err="1"/>
+              <a:t>با</a:t>
+            </a:r>
+            <a:r>
+              <a:rPr lang="en-US" dirty="0"/>
+              <a:t> </a:t>
+            </a:r>
+            <a:r>
+              <a:rPr lang="en-US" dirty="0" err="1"/>
+              <a:t>آن</a:t>
+            </a:r>
+            <a:r>
+              <a:rPr lang="en-US" dirty="0"/>
+              <a:t> </a:t>
+            </a:r>
+            <a:r>
+              <a:rPr lang="en-US" dirty="0" err="1"/>
+              <a:t>تعامل</a:t>
+            </a:r>
+            <a:r>
+              <a:rPr lang="en-US" dirty="0"/>
+              <a:t> </a:t>
+            </a:r>
+            <a:r>
+              <a:rPr lang="en-US" dirty="0" err="1"/>
+              <a:t>دارد</a:t>
+            </a:r>
+            <a:r>
+              <a:rPr lang="en-US" dirty="0"/>
+              <a:t>.</a:t>
+            </a:r>
+          </a:p>
+          <a:p>
+            <a:pPr algn="r" rtl="1"/>
+            <a:endParaRPr lang="fa-IR" altLang="en-US" dirty="0">
+              <a:latin typeface="Times New Roman" panose="02020603050405020304" pitchFamily="18" charset="0"/>
+            </a:endParaRPr>
+          </a:p>
+          <a:p>
+            <a:pPr algn="r" rtl="1"/>
+            <a:r>
+              <a:rPr lang="en-US" b="1" dirty="0" err="1"/>
+              <a:t>تشبیه</a:t>
+            </a:r>
+            <a:r>
+              <a:rPr lang="en-US" b="1" dirty="0"/>
+              <a:t> </a:t>
+            </a:r>
+            <a:r>
+              <a:rPr lang="en-US" b="1" dirty="0" err="1"/>
+              <a:t>خیلی</a:t>
+            </a:r>
+            <a:r>
+              <a:rPr lang="en-US" b="1" dirty="0"/>
+              <a:t> </a:t>
+            </a:r>
+            <a:r>
+              <a:rPr lang="en-US" b="1" dirty="0" err="1"/>
+              <a:t>ساده</a:t>
+            </a:r>
+            <a:endParaRPr lang="en-US" b="1" dirty="0"/>
+          </a:p>
+          <a:p>
+            <a:pPr algn="r" rtl="1"/>
+            <a:r>
+              <a:rPr lang="en-US" dirty="0" err="1"/>
+              <a:t>یک</a:t>
+            </a:r>
+            <a:r>
+              <a:rPr lang="en-US" dirty="0"/>
+              <a:t> </a:t>
+            </a:r>
+            <a:r>
+              <a:rPr lang="en-US" b="1" dirty="0" err="1"/>
+              <a:t>رستوران</a:t>
+            </a:r>
+            <a:r>
+              <a:rPr lang="en-US" dirty="0"/>
+              <a:t> </a:t>
+            </a:r>
+            <a:r>
+              <a:rPr lang="en-US" dirty="0" err="1"/>
+              <a:t>را</a:t>
+            </a:r>
+            <a:r>
+              <a:rPr lang="en-US" dirty="0"/>
+              <a:t> </a:t>
+            </a:r>
+            <a:r>
+              <a:rPr lang="en-US" dirty="0" err="1"/>
+              <a:t>تصور</a:t>
+            </a:r>
+            <a:r>
+              <a:rPr lang="en-US" dirty="0"/>
+              <a:t> </a:t>
+            </a:r>
+            <a:r>
+              <a:rPr lang="en-US" dirty="0" err="1"/>
+              <a:t>کنید</a:t>
+            </a:r>
+            <a:r>
+              <a:rPr lang="en-US" dirty="0"/>
+              <a:t>.</a:t>
+            </a:r>
+          </a:p>
+          <a:p>
+            <a:pPr algn="r" rtl="1"/>
+            <a:r>
+              <a:rPr lang="en-US" b="1" dirty="0"/>
+              <a:t>Two-Tier</a:t>
+            </a:r>
+          </a:p>
+          <a:p>
+            <a:pPr algn="r" rtl="1"/>
+            <a:r>
+              <a:rPr lang="en-US" dirty="0" err="1"/>
+              <a:t>مشتری</a:t>
+            </a:r>
+            <a:r>
+              <a:rPr lang="en-US" dirty="0"/>
+              <a:t> </a:t>
+            </a:r>
+            <a:r>
+              <a:rPr lang="en-US" dirty="0" err="1"/>
+              <a:t>مستقیماً</a:t>
+            </a:r>
+            <a:r>
+              <a:rPr lang="en-US" dirty="0"/>
+              <a:t> </a:t>
+            </a:r>
+            <a:r>
+              <a:rPr lang="en-US" dirty="0" err="1"/>
+              <a:t>وارد</a:t>
+            </a:r>
+            <a:r>
+              <a:rPr lang="en-US" dirty="0"/>
+              <a:t> </a:t>
+            </a:r>
+            <a:r>
+              <a:rPr lang="en-US" dirty="0" err="1"/>
+              <a:t>آشپزخانه</a:t>
+            </a:r>
+            <a:r>
+              <a:rPr lang="en-US" dirty="0"/>
+              <a:t> </a:t>
+            </a:r>
+            <a:r>
+              <a:rPr lang="en-US" dirty="0" err="1"/>
+              <a:t>می‌شود</a:t>
+            </a:r>
+            <a:r>
+              <a:rPr lang="en-US" dirty="0"/>
+              <a:t>:</a:t>
+            </a:r>
+          </a:p>
+          <a:p>
+            <a:pPr algn="r" rtl="1"/>
+            <a:r>
+              <a:rPr lang="en-US" sz="1200" kern="1200" dirty="0" err="1">
+                <a:solidFill>
+                  <a:schemeClr val="tx1"/>
+                </a:solidFill>
+                <a:latin typeface="Times New Roman" charset="0"/>
+                <a:ea typeface="MS PGothic" panose="020B0600070205080204" pitchFamily="34" charset="-128"/>
+                <a:cs typeface="ＭＳ Ｐゴシック" charset="0"/>
+              </a:rPr>
+              <a:t>مشتری</a:t>
+            </a:r>
+            <a:endParaRPr lang="en-US" sz="1200" kern="1200" dirty="0">
+              <a:solidFill>
+                <a:schemeClr val="tx1"/>
+              </a:solidFill>
+              <a:latin typeface="Times New Roman" charset="0"/>
+              <a:ea typeface="MS PGothic" panose="020B0600070205080204" pitchFamily="34" charset="-128"/>
+              <a:cs typeface="ＭＳ Ｐゴシック" charset="0"/>
+            </a:endParaRPr>
+          </a:p>
+          <a:p>
+            <a:pPr algn="r" rtl="1"/>
+            <a:r>
+              <a:rPr lang="en-US" sz="1200" kern="1200" dirty="0">
+                <a:solidFill>
+                  <a:schemeClr val="tx1"/>
+                </a:solidFill>
+                <a:latin typeface="Times New Roman" charset="0"/>
+                <a:ea typeface="MS PGothic" panose="020B0600070205080204" pitchFamily="34" charset="-128"/>
+                <a:cs typeface="ＭＳ Ｐゴシック" charset="0"/>
+              </a:rPr>
+              <a:t> ↓</a:t>
+            </a:r>
+          </a:p>
+          <a:p>
+            <a:pPr algn="r" rtl="1"/>
+            <a:r>
+              <a:rPr lang="en-US" sz="1200" kern="1200" dirty="0" err="1">
+                <a:solidFill>
+                  <a:schemeClr val="tx1"/>
+                </a:solidFill>
+                <a:latin typeface="Times New Roman" charset="0"/>
+                <a:ea typeface="MS PGothic" panose="020B0600070205080204" pitchFamily="34" charset="-128"/>
+                <a:cs typeface="ＭＳ Ｐゴシック" charset="0"/>
+              </a:rPr>
+              <a:t>آشپزخانه</a:t>
+            </a:r>
+            <a:endParaRPr lang="en-US" sz="1200" kern="1200" dirty="0">
+              <a:solidFill>
+                <a:schemeClr val="tx1"/>
+              </a:solidFill>
+              <a:latin typeface="Times New Roman" charset="0"/>
+              <a:ea typeface="MS PGothic" panose="020B0600070205080204" pitchFamily="34" charset="-128"/>
+              <a:cs typeface="ＭＳ Ｐゴシック" charset="0"/>
+            </a:endParaRPr>
+          </a:p>
+          <a:p>
+            <a:pPr algn="r" rtl="1"/>
+            <a:r>
+              <a:rPr lang="en-US" dirty="0" err="1"/>
+              <a:t>مشتری</a:t>
+            </a:r>
+            <a:r>
+              <a:rPr lang="en-US" dirty="0"/>
+              <a:t> </a:t>
+            </a:r>
+            <a:r>
+              <a:rPr lang="en-US" dirty="0" err="1"/>
+              <a:t>مستقیماً</a:t>
+            </a:r>
+            <a:r>
+              <a:rPr lang="en-US" dirty="0"/>
+              <a:t> </a:t>
+            </a:r>
+            <a:r>
+              <a:rPr lang="en-US" dirty="0" err="1"/>
+              <a:t>با</a:t>
+            </a:r>
+            <a:r>
+              <a:rPr lang="en-US" dirty="0"/>
+              <a:t> </a:t>
+            </a:r>
+            <a:r>
+              <a:rPr lang="en-US" dirty="0" err="1"/>
+              <a:t>آشپزخانه</a:t>
+            </a:r>
+            <a:r>
+              <a:rPr lang="en-US" dirty="0"/>
+              <a:t> </a:t>
+            </a:r>
+            <a:r>
+              <a:rPr lang="en-US" dirty="0" err="1"/>
+              <a:t>ارتباط</a:t>
+            </a:r>
+            <a:r>
+              <a:rPr lang="en-US" dirty="0"/>
+              <a:t> </a:t>
+            </a:r>
+            <a:r>
+              <a:rPr lang="en-US" dirty="0" err="1"/>
+              <a:t>دارد</a:t>
+            </a:r>
+            <a:r>
+              <a:rPr lang="en-US" dirty="0"/>
+              <a:t>.</a:t>
+            </a:r>
+          </a:p>
+          <a:p>
+            <a:pPr algn="r" rtl="1"/>
+            <a:r>
+              <a:rPr lang="en-US" b="1" dirty="0"/>
+              <a:t>Three-Tier</a:t>
+            </a:r>
+          </a:p>
+          <a:p>
+            <a:pPr algn="r" rtl="1"/>
+            <a:r>
+              <a:rPr lang="en-US" dirty="0" err="1"/>
+              <a:t>رستوران</a:t>
+            </a:r>
+            <a:r>
+              <a:rPr lang="en-US" dirty="0"/>
+              <a:t> </a:t>
+            </a:r>
+            <a:r>
+              <a:rPr lang="en-US" dirty="0" err="1"/>
+              <a:t>عادی</a:t>
+            </a:r>
+            <a:r>
+              <a:rPr lang="en-US" dirty="0"/>
+              <a:t>:</a:t>
+            </a:r>
+          </a:p>
+          <a:p>
+            <a:pPr algn="r" rtl="1"/>
+            <a:r>
+              <a:rPr lang="en-US" sz="1200" kern="1200" dirty="0" err="1">
+                <a:solidFill>
+                  <a:schemeClr val="tx1"/>
+                </a:solidFill>
+                <a:latin typeface="Times New Roman" charset="0"/>
+                <a:ea typeface="MS PGothic" panose="020B0600070205080204" pitchFamily="34" charset="-128"/>
+                <a:cs typeface="ＭＳ Ｐゴシック" charset="0"/>
+              </a:rPr>
+              <a:t>مشتری</a:t>
+            </a:r>
+            <a:endParaRPr lang="en-US" sz="1200" kern="1200" dirty="0">
+              <a:solidFill>
+                <a:schemeClr val="tx1"/>
+              </a:solidFill>
+              <a:latin typeface="Times New Roman" charset="0"/>
+              <a:ea typeface="MS PGothic" panose="020B0600070205080204" pitchFamily="34" charset="-128"/>
+              <a:cs typeface="ＭＳ Ｐゴシック" charset="0"/>
+            </a:endParaRPr>
+          </a:p>
+          <a:p>
+            <a:pPr algn="r" rtl="1"/>
+            <a:r>
+              <a:rPr lang="en-US" sz="1200" kern="1200" dirty="0">
+                <a:solidFill>
+                  <a:schemeClr val="tx1"/>
+                </a:solidFill>
+                <a:latin typeface="Times New Roman" charset="0"/>
+                <a:ea typeface="MS PGothic" panose="020B0600070205080204" pitchFamily="34" charset="-128"/>
+                <a:cs typeface="ＭＳ Ｐゴシック" charset="0"/>
+              </a:rPr>
+              <a:t> ↓</a:t>
+            </a:r>
+          </a:p>
+          <a:p>
+            <a:pPr algn="r" rtl="1"/>
+            <a:r>
+              <a:rPr lang="en-US" sz="1200" kern="1200" dirty="0" err="1">
+                <a:solidFill>
+                  <a:schemeClr val="tx1"/>
+                </a:solidFill>
+                <a:latin typeface="Times New Roman" charset="0"/>
+                <a:ea typeface="MS PGothic" panose="020B0600070205080204" pitchFamily="34" charset="-128"/>
+                <a:cs typeface="ＭＳ Ｐゴシック" charset="0"/>
+              </a:rPr>
+              <a:t>پیشخدمت</a:t>
+            </a:r>
+            <a:endParaRPr lang="en-US" sz="1200" kern="1200" dirty="0">
+              <a:solidFill>
+                <a:schemeClr val="tx1"/>
+              </a:solidFill>
+              <a:latin typeface="Times New Roman" charset="0"/>
+              <a:ea typeface="MS PGothic" panose="020B0600070205080204" pitchFamily="34" charset="-128"/>
+              <a:cs typeface="ＭＳ Ｐゴシック" charset="0"/>
+            </a:endParaRPr>
+          </a:p>
+          <a:p>
+            <a:pPr algn="r" rtl="1"/>
+            <a:r>
+              <a:rPr lang="en-US" sz="1200" kern="1200" dirty="0">
+                <a:solidFill>
+                  <a:schemeClr val="tx1"/>
+                </a:solidFill>
+                <a:latin typeface="Times New Roman" charset="0"/>
+                <a:ea typeface="MS PGothic" panose="020B0600070205080204" pitchFamily="34" charset="-128"/>
+                <a:cs typeface="ＭＳ Ｐゴシック" charset="0"/>
+              </a:rPr>
+              <a:t> ↓</a:t>
+            </a:r>
+          </a:p>
+          <a:p>
+            <a:pPr algn="r" rtl="1"/>
+            <a:r>
+              <a:rPr lang="en-US" sz="1200" kern="1200" dirty="0" err="1">
+                <a:solidFill>
+                  <a:schemeClr val="tx1"/>
+                </a:solidFill>
+                <a:latin typeface="Times New Roman" charset="0"/>
+                <a:ea typeface="MS PGothic" panose="020B0600070205080204" pitchFamily="34" charset="-128"/>
+                <a:cs typeface="ＭＳ Ｐゴシック" charset="0"/>
+              </a:rPr>
+              <a:t>آشپزخانه</a:t>
+            </a:r>
+            <a:endParaRPr lang="en-US" sz="1200" kern="1200" dirty="0">
+              <a:solidFill>
+                <a:schemeClr val="tx1"/>
+              </a:solidFill>
+              <a:latin typeface="Times New Roman" charset="0"/>
+              <a:ea typeface="MS PGothic" panose="020B0600070205080204" pitchFamily="34" charset="-128"/>
+              <a:cs typeface="ＭＳ Ｐゴシック" charset="0"/>
+            </a:endParaRPr>
+          </a:p>
+          <a:p>
+            <a:pPr algn="r" rtl="1"/>
+            <a:r>
+              <a:rPr lang="en-US" dirty="0" err="1"/>
+              <a:t>اینجا</a:t>
+            </a:r>
+            <a:r>
+              <a:rPr lang="en-US" dirty="0"/>
+              <a:t>:</a:t>
+            </a:r>
+          </a:p>
+          <a:p>
+            <a:pPr lvl="0" algn="r" rtl="1"/>
+            <a:r>
+              <a:rPr lang="en-US" b="1" dirty="0" err="1"/>
+              <a:t>مشتری</a:t>
+            </a:r>
+            <a:r>
+              <a:rPr lang="en-US" b="1" dirty="0"/>
+              <a:t> = User</a:t>
+            </a:r>
+            <a:r>
+              <a:rPr lang="en-US" dirty="0"/>
+              <a:t> </a:t>
+            </a:r>
+          </a:p>
+          <a:p>
+            <a:pPr lvl="0" algn="r" rtl="1"/>
+            <a:r>
+              <a:rPr lang="en-US" b="1" dirty="0" err="1"/>
+              <a:t>پیشخدمت</a:t>
+            </a:r>
+            <a:r>
+              <a:rPr lang="en-US" b="1" dirty="0"/>
+              <a:t> = Application Server</a:t>
+            </a:r>
+            <a:r>
+              <a:rPr lang="en-US" dirty="0"/>
+              <a:t> </a:t>
+            </a:r>
+          </a:p>
+          <a:p>
+            <a:pPr lvl="0" algn="r" rtl="1"/>
+            <a:r>
+              <a:rPr lang="en-US" b="1" dirty="0" err="1"/>
+              <a:t>آشپزخانه</a:t>
+            </a:r>
+            <a:r>
+              <a:rPr lang="en-US" b="1" dirty="0"/>
+              <a:t> = Database</a:t>
+            </a:r>
+            <a:r>
+              <a:rPr lang="en-US" dirty="0"/>
+              <a:t> </a:t>
+            </a:r>
+          </a:p>
+          <a:p>
+            <a:pPr algn="r" rtl="1"/>
+            <a:r>
+              <a:rPr lang="en-US" dirty="0" err="1"/>
+              <a:t>مشتری</a:t>
+            </a:r>
+            <a:r>
+              <a:rPr lang="en-US" dirty="0"/>
+              <a:t> </a:t>
+            </a:r>
+            <a:r>
+              <a:rPr lang="en-US" dirty="0" err="1"/>
+              <a:t>لازم</a:t>
+            </a:r>
+            <a:r>
+              <a:rPr lang="en-US" dirty="0"/>
+              <a:t> </a:t>
+            </a:r>
+            <a:r>
+              <a:rPr lang="en-US" dirty="0" err="1"/>
+              <a:t>نیست</a:t>
+            </a:r>
+            <a:r>
+              <a:rPr lang="en-US" dirty="0"/>
+              <a:t> </a:t>
+            </a:r>
+            <a:r>
+              <a:rPr lang="en-US" dirty="0" err="1"/>
+              <a:t>بداند</a:t>
+            </a:r>
+            <a:r>
+              <a:rPr lang="en-US" dirty="0"/>
+              <a:t> </a:t>
+            </a:r>
+            <a:r>
+              <a:rPr lang="en-US" dirty="0" err="1"/>
+              <a:t>غذا</a:t>
+            </a:r>
+            <a:r>
+              <a:rPr lang="en-US" dirty="0"/>
+              <a:t> </a:t>
+            </a:r>
+            <a:r>
+              <a:rPr lang="en-US" dirty="0" err="1"/>
+              <a:t>چگونه</a:t>
+            </a:r>
+            <a:r>
+              <a:rPr lang="en-US" dirty="0"/>
+              <a:t> </a:t>
+            </a:r>
+            <a:r>
+              <a:rPr lang="en-US" dirty="0" err="1"/>
+              <a:t>آماده</a:t>
+            </a:r>
+            <a:r>
+              <a:rPr lang="en-US" dirty="0"/>
+              <a:t> </a:t>
+            </a:r>
+            <a:r>
+              <a:rPr lang="en-US" dirty="0" err="1"/>
+              <a:t>می‌شود</a:t>
+            </a:r>
+            <a:r>
+              <a:rPr lang="en-US" dirty="0"/>
+              <a:t>.</a:t>
+            </a:r>
+          </a:p>
+          <a:p>
+            <a:pPr algn="r" rtl="1"/>
+            <a:r>
+              <a:rPr lang="en-US" dirty="0" err="1"/>
+              <a:t>مثلاً</a:t>
+            </a:r>
+            <a:r>
+              <a:rPr lang="en-US" dirty="0"/>
+              <a:t> </a:t>
+            </a:r>
+            <a:r>
+              <a:rPr lang="en-US" dirty="0" err="1"/>
+              <a:t>مشتری</a:t>
+            </a:r>
+            <a:r>
+              <a:rPr lang="en-US" dirty="0"/>
+              <a:t> </a:t>
+            </a:r>
+            <a:r>
+              <a:rPr lang="en-US" dirty="0" err="1"/>
+              <a:t>می‌گوید</a:t>
+            </a:r>
+            <a:r>
+              <a:rPr lang="en-US" dirty="0"/>
+              <a:t>:</a:t>
+            </a:r>
+          </a:p>
+          <a:p>
+            <a:pPr algn="r" rtl="1"/>
+            <a:r>
+              <a:rPr lang="en-US" dirty="0" err="1"/>
+              <a:t>یک</a:t>
+            </a:r>
+            <a:r>
+              <a:rPr lang="en-US" dirty="0"/>
+              <a:t> </a:t>
+            </a:r>
+            <a:r>
+              <a:rPr lang="en-US" dirty="0" err="1"/>
+              <a:t>پیتزا</a:t>
+            </a:r>
+            <a:r>
+              <a:rPr lang="en-US" dirty="0"/>
+              <a:t> </a:t>
+            </a:r>
+            <a:r>
+              <a:rPr lang="en-US" dirty="0" err="1"/>
+              <a:t>می‌خواهم</a:t>
+            </a:r>
+            <a:r>
+              <a:rPr lang="en-US" dirty="0"/>
+              <a:t>.</a:t>
+            </a:r>
+          </a:p>
+          <a:p>
+            <a:pPr algn="r" rtl="1"/>
+            <a:r>
+              <a:rPr lang="en-US" dirty="0" err="1"/>
+              <a:t>پیشخدمت</a:t>
+            </a:r>
+            <a:r>
+              <a:rPr lang="en-US" dirty="0"/>
+              <a:t> </a:t>
+            </a:r>
+            <a:r>
+              <a:rPr lang="en-US" dirty="0" err="1"/>
+              <a:t>درخواست</a:t>
+            </a:r>
+            <a:r>
+              <a:rPr lang="en-US" dirty="0"/>
+              <a:t> </a:t>
+            </a:r>
+            <a:r>
+              <a:rPr lang="en-US" dirty="0" err="1"/>
+              <a:t>را</a:t>
+            </a:r>
+            <a:r>
+              <a:rPr lang="en-US" dirty="0"/>
+              <a:t> </a:t>
+            </a:r>
+            <a:r>
+              <a:rPr lang="en-US" dirty="0" err="1"/>
+              <a:t>مدیریت</a:t>
+            </a:r>
+            <a:r>
+              <a:rPr lang="en-US" dirty="0"/>
+              <a:t> </a:t>
+            </a:r>
+            <a:r>
+              <a:rPr lang="en-US" dirty="0" err="1"/>
+              <a:t>می‌کند</a:t>
+            </a:r>
+            <a:r>
+              <a:rPr lang="en-US" dirty="0"/>
+              <a:t> و </a:t>
+            </a:r>
+            <a:r>
+              <a:rPr lang="en-US" dirty="0" err="1"/>
+              <a:t>به</a:t>
+            </a:r>
+            <a:r>
+              <a:rPr lang="en-US" dirty="0"/>
+              <a:t> </a:t>
+            </a:r>
+            <a:r>
+              <a:rPr lang="en-US" dirty="0" err="1"/>
+              <a:t>آشپزخانه</a:t>
+            </a:r>
+            <a:r>
+              <a:rPr lang="en-US" dirty="0"/>
+              <a:t> </a:t>
+            </a:r>
+            <a:r>
+              <a:rPr lang="en-US" dirty="0" err="1"/>
+              <a:t>می‌دهد</a:t>
+            </a:r>
+            <a:r>
+              <a:rPr lang="en-US" dirty="0"/>
+              <a:t>.</a:t>
+            </a:r>
+          </a:p>
+          <a:p>
+            <a:pPr algn="r" rtl="1"/>
+            <a:r>
+              <a:rPr lang="en-US" dirty="0" err="1"/>
+              <a:t>در</a:t>
+            </a:r>
+            <a:r>
+              <a:rPr lang="en-US" dirty="0"/>
+              <a:t> </a:t>
+            </a:r>
+            <a:r>
+              <a:rPr lang="en-US" dirty="0" err="1"/>
+              <a:t>سیستم</a:t>
+            </a:r>
+            <a:r>
+              <a:rPr lang="en-US" dirty="0"/>
+              <a:t> </a:t>
+            </a:r>
+            <a:r>
+              <a:rPr lang="en-US" dirty="0" err="1"/>
+              <a:t>نرم‌افزاری</a:t>
+            </a:r>
+            <a:r>
+              <a:rPr lang="en-US" dirty="0"/>
+              <a:t> </a:t>
+            </a:r>
+            <a:r>
+              <a:rPr lang="en-US" dirty="0" err="1"/>
+              <a:t>هم</a:t>
+            </a:r>
+            <a:r>
+              <a:rPr lang="en-US" dirty="0"/>
+              <a:t> </a:t>
+            </a:r>
+            <a:r>
+              <a:rPr lang="en-US" dirty="0" err="1"/>
+              <a:t>کاربر</a:t>
+            </a:r>
+            <a:r>
+              <a:rPr lang="en-US" dirty="0"/>
+              <a:t> </a:t>
+            </a:r>
+            <a:r>
+              <a:rPr lang="en-US" dirty="0" err="1"/>
+              <a:t>می‌گوید</a:t>
+            </a:r>
+            <a:r>
+              <a:rPr lang="en-US" dirty="0"/>
+              <a:t>:</a:t>
+            </a:r>
+          </a:p>
+          <a:p>
+            <a:pPr algn="r" rtl="1"/>
+            <a:r>
+              <a:rPr lang="en-US" dirty="0" err="1"/>
+              <a:t>اطلاعات</a:t>
+            </a:r>
+            <a:r>
+              <a:rPr lang="en-US" dirty="0"/>
+              <a:t> </a:t>
+            </a:r>
+            <a:r>
+              <a:rPr lang="en-US" dirty="0" err="1"/>
+              <a:t>سفارش</a:t>
+            </a:r>
+            <a:r>
+              <a:rPr lang="en-US" dirty="0"/>
+              <a:t> </a:t>
+            </a:r>
+            <a:r>
+              <a:rPr lang="en-US" dirty="0" err="1"/>
+              <a:t>من</a:t>
+            </a:r>
+            <a:r>
+              <a:rPr lang="en-US" dirty="0"/>
+              <a:t> </a:t>
+            </a:r>
+            <a:r>
+              <a:rPr lang="en-US" dirty="0" err="1"/>
+              <a:t>را</a:t>
+            </a:r>
+            <a:r>
+              <a:rPr lang="en-US" dirty="0"/>
+              <a:t> </a:t>
+            </a:r>
+            <a:r>
+              <a:rPr lang="en-US" dirty="0" err="1"/>
+              <a:t>بده</a:t>
+            </a:r>
+            <a:r>
+              <a:rPr lang="en-US" dirty="0"/>
+              <a:t>.</a:t>
+            </a:r>
+          </a:p>
+          <a:p>
+            <a:pPr algn="r" rtl="1"/>
+            <a:r>
+              <a:rPr lang="en-US" dirty="0"/>
+              <a:t>Application Server </a:t>
+            </a:r>
+            <a:r>
+              <a:rPr lang="en-US" dirty="0" err="1"/>
+              <a:t>درخواست</a:t>
+            </a:r>
+            <a:r>
+              <a:rPr lang="en-US" dirty="0"/>
+              <a:t> </a:t>
+            </a:r>
+            <a:r>
+              <a:rPr lang="en-US" dirty="0" err="1"/>
+              <a:t>را</a:t>
+            </a:r>
+            <a:r>
+              <a:rPr lang="en-US" dirty="0"/>
+              <a:t> </a:t>
+            </a:r>
+            <a:r>
+              <a:rPr lang="en-US" dirty="0" err="1"/>
+              <a:t>پردازش</a:t>
+            </a:r>
+            <a:r>
+              <a:rPr lang="en-US" dirty="0"/>
+              <a:t> </a:t>
+            </a:r>
+            <a:r>
+              <a:rPr lang="en-US" dirty="0" err="1"/>
+              <a:t>می‌کند</a:t>
+            </a:r>
+            <a:r>
+              <a:rPr lang="en-US" dirty="0"/>
+              <a:t> و </a:t>
+            </a:r>
+            <a:r>
+              <a:rPr lang="en-US" dirty="0" err="1"/>
+              <a:t>از</a:t>
+            </a:r>
+            <a:r>
+              <a:rPr lang="en-US" dirty="0"/>
+              <a:t> Database </a:t>
+            </a:r>
+            <a:r>
+              <a:rPr lang="en-US" dirty="0" err="1"/>
+              <a:t>اطلاعات</a:t>
+            </a:r>
+            <a:r>
+              <a:rPr lang="en-US" dirty="0"/>
+              <a:t> </a:t>
+            </a:r>
+            <a:r>
+              <a:rPr lang="en-US" dirty="0" err="1"/>
+              <a:t>می‌گیرد</a:t>
+            </a:r>
+            <a:r>
+              <a:rPr lang="en-US" dirty="0"/>
+              <a:t>.</a:t>
+            </a:r>
+          </a:p>
+          <a:p>
+            <a:pPr algn="r" rtl="1"/>
+            <a:endParaRPr lang="en-US" altLang="en-US" dirty="0">
               <a:latin typeface="Times New Roman" panose="02020603050405020304" pitchFamily="18" charset="0"/>
             </a:endParaRPr>
           </a:p>
@@ -10464,6 +13965,1616 @@
           <a:bodyPr/>
           <a:lstStyle/>
           <a:p>
+            <a:pPr algn="r" rtl="1"/>
+            <a:r>
+              <a:rPr lang="fa-IR" b="1" dirty="0"/>
+              <a:t>ت</a:t>
+            </a:r>
+            <a:r>
+              <a:rPr lang="en-US" b="1" dirty="0" err="1"/>
+              <a:t>حلیل</a:t>
+            </a:r>
+            <a:r>
+              <a:rPr lang="en-US" b="1" dirty="0"/>
+              <a:t> </a:t>
+            </a:r>
+            <a:r>
+              <a:rPr lang="en-US" b="1" dirty="0" err="1"/>
+              <a:t>داده‌های</a:t>
+            </a:r>
+            <a:r>
+              <a:rPr lang="en-US" b="1" dirty="0"/>
+              <a:t> </a:t>
+            </a:r>
+            <a:r>
+              <a:rPr lang="en-US" b="1" dirty="0" err="1"/>
+              <a:t>بزرگ</a:t>
+            </a:r>
+            <a:r>
+              <a:rPr lang="en-US" b="1" dirty="0"/>
+              <a:t>: </a:t>
+            </a:r>
+            <a:r>
+              <a:rPr lang="en-US" b="1" dirty="0" err="1"/>
+              <a:t>فراتر</a:t>
+            </a:r>
+            <a:r>
+              <a:rPr lang="en-US" b="1" dirty="0"/>
+              <a:t> </a:t>
+            </a:r>
+            <a:r>
+              <a:rPr lang="en-US" b="1" dirty="0" err="1"/>
+              <a:t>از</a:t>
+            </a:r>
+            <a:r>
+              <a:rPr lang="en-US" b="1" dirty="0"/>
+              <a:t> SQL</a:t>
+            </a:r>
+          </a:p>
+          <a:p>
+            <a:pPr algn="r" rtl="1"/>
+            <a:r>
+              <a:rPr lang="en-US" dirty="0" err="1"/>
+              <a:t>مسئله</a:t>
+            </a:r>
+            <a:r>
+              <a:rPr lang="en-US" dirty="0"/>
+              <a:t> </a:t>
+            </a:r>
+            <a:r>
+              <a:rPr lang="en-US" dirty="0" err="1"/>
+              <a:t>فقط</a:t>
+            </a:r>
+            <a:r>
+              <a:rPr lang="en-US" dirty="0"/>
+              <a:t> </a:t>
+            </a:r>
+            <a:r>
+              <a:rPr lang="en-US" dirty="0" err="1"/>
+              <a:t>ذخیره‌سازی</a:t>
+            </a:r>
+            <a:r>
+              <a:rPr lang="en-US" dirty="0"/>
+              <a:t> </a:t>
+            </a:r>
+            <a:r>
+              <a:rPr lang="en-US" dirty="0" err="1"/>
+              <a:t>نبود</a:t>
+            </a:r>
+            <a:r>
+              <a:rPr lang="en-US" dirty="0"/>
+              <a:t>. </a:t>
+            </a:r>
+            <a:r>
+              <a:rPr lang="en-US" dirty="0" err="1"/>
+              <a:t>وقتی</a:t>
+            </a:r>
+            <a:r>
+              <a:rPr lang="en-US" dirty="0"/>
+              <a:t> </a:t>
+            </a:r>
+            <a:r>
+              <a:rPr lang="en-US" dirty="0" err="1"/>
+              <a:t>صدها</a:t>
+            </a:r>
+            <a:r>
+              <a:rPr lang="en-US" dirty="0"/>
+              <a:t> </a:t>
+            </a:r>
+            <a:r>
+              <a:rPr lang="en-US" dirty="0" err="1"/>
+              <a:t>ترابایت</a:t>
+            </a:r>
+            <a:r>
+              <a:rPr lang="en-US" dirty="0"/>
+              <a:t> </a:t>
+            </a:r>
+            <a:r>
+              <a:rPr lang="en-US" dirty="0" err="1"/>
+              <a:t>یا</a:t>
+            </a:r>
+            <a:r>
+              <a:rPr lang="en-US" dirty="0"/>
+              <a:t> </a:t>
+            </a:r>
+            <a:r>
+              <a:rPr lang="en-US" dirty="0" err="1"/>
+              <a:t>پتابایت</a:t>
+            </a:r>
+            <a:r>
+              <a:rPr lang="en-US" dirty="0"/>
+              <a:t> </a:t>
+            </a:r>
+            <a:r>
+              <a:rPr lang="en-US" dirty="0" err="1"/>
+              <a:t>داده</a:t>
+            </a:r>
+            <a:r>
+              <a:rPr lang="en-US" dirty="0"/>
+              <a:t> </a:t>
+            </a:r>
+            <a:r>
+              <a:rPr lang="en-US" dirty="0" err="1"/>
+              <a:t>داریم</a:t>
+            </a:r>
+            <a:r>
+              <a:rPr lang="en-US" dirty="0"/>
+              <a:t>، </a:t>
+            </a:r>
+            <a:r>
+              <a:rPr lang="en-US" dirty="0" err="1"/>
+              <a:t>باید</a:t>
+            </a:r>
+            <a:r>
+              <a:rPr lang="en-US" dirty="0"/>
+              <a:t> </a:t>
+            </a:r>
+            <a:r>
+              <a:rPr lang="en-US" dirty="0" err="1"/>
+              <a:t>بتوانیم</a:t>
+            </a:r>
+            <a:r>
+              <a:rPr lang="en-US" dirty="0"/>
+              <a:t> </a:t>
+            </a:r>
+            <a:r>
+              <a:rPr lang="en-US" dirty="0" err="1"/>
+              <a:t>آنها</a:t>
+            </a:r>
+            <a:r>
+              <a:rPr lang="en-US" dirty="0"/>
+              <a:t> </a:t>
+            </a:r>
+            <a:r>
+              <a:rPr lang="en-US" dirty="0" err="1"/>
+              <a:t>را</a:t>
+            </a:r>
+            <a:r>
+              <a:rPr lang="en-US" dirty="0"/>
+              <a:t> </a:t>
+            </a:r>
+            <a:r>
+              <a:rPr lang="en-US" dirty="0" err="1"/>
+              <a:t>نیز</a:t>
+            </a:r>
+            <a:r>
+              <a:rPr lang="en-US" dirty="0"/>
+              <a:t> </a:t>
+            </a:r>
+            <a:r>
+              <a:rPr lang="en-US" dirty="0" err="1"/>
+              <a:t>پردازش</a:t>
+            </a:r>
+            <a:r>
+              <a:rPr lang="en-US" dirty="0"/>
+              <a:t> </a:t>
+            </a:r>
+            <a:r>
+              <a:rPr lang="en-US" dirty="0" err="1"/>
+              <a:t>کنیم</a:t>
+            </a:r>
+            <a:r>
+              <a:rPr lang="en-US" dirty="0"/>
+              <a:t>.</a:t>
+            </a:r>
+          </a:p>
+          <a:p>
+            <a:pPr algn="r" rtl="1"/>
+            <a:r>
+              <a:rPr lang="en-US" dirty="0" err="1"/>
+              <a:t>در</a:t>
+            </a:r>
+            <a:r>
+              <a:rPr lang="en-US" dirty="0"/>
+              <a:t> </a:t>
+            </a:r>
+            <a:r>
+              <a:rPr lang="en-US" dirty="0" err="1"/>
+              <a:t>اینجا</a:t>
+            </a:r>
+            <a:r>
+              <a:rPr lang="en-US" dirty="0"/>
+              <a:t> </a:t>
+            </a:r>
+            <a:r>
+              <a:rPr lang="en-US" dirty="0" err="1"/>
+              <a:t>مفهوم</a:t>
+            </a:r>
+            <a:r>
+              <a:rPr lang="en-US" dirty="0"/>
+              <a:t> </a:t>
+            </a:r>
+            <a:r>
+              <a:rPr lang="en-US" b="1" dirty="0"/>
+              <a:t>Big Data Analytics</a:t>
+            </a:r>
+            <a:r>
+              <a:rPr lang="en-US" dirty="0"/>
+              <a:t> </a:t>
+            </a:r>
+            <a:r>
+              <a:rPr lang="en-US" dirty="0" err="1"/>
+              <a:t>مطرح</a:t>
+            </a:r>
+            <a:r>
+              <a:rPr lang="en-US" dirty="0"/>
+              <a:t> </a:t>
+            </a:r>
+            <a:r>
+              <a:rPr lang="en-US" dirty="0" err="1"/>
+              <a:t>شد</a:t>
+            </a:r>
+            <a:r>
+              <a:rPr lang="en-US" dirty="0"/>
+              <a:t>.</a:t>
+            </a:r>
+          </a:p>
+          <a:p>
+            <a:pPr algn="r" rtl="1"/>
+            <a:r>
+              <a:rPr lang="en-US" dirty="0" err="1"/>
+              <a:t>یکی</a:t>
+            </a:r>
+            <a:r>
+              <a:rPr lang="en-US" dirty="0"/>
+              <a:t> </a:t>
+            </a:r>
+            <a:r>
+              <a:rPr lang="en-US" dirty="0" err="1"/>
+              <a:t>از</a:t>
+            </a:r>
+            <a:r>
+              <a:rPr lang="en-US" dirty="0"/>
+              <a:t> </a:t>
+            </a:r>
+            <a:r>
+              <a:rPr lang="en-US" dirty="0" err="1"/>
+              <a:t>مهم‌ترین</a:t>
+            </a:r>
+            <a:r>
+              <a:rPr lang="en-US" dirty="0"/>
+              <a:t> </a:t>
+            </a:r>
+            <a:r>
+              <a:rPr lang="en-US" dirty="0" err="1"/>
+              <a:t>ایده‌ها</a:t>
+            </a:r>
+            <a:r>
+              <a:rPr lang="en-US" dirty="0"/>
+              <a:t> </a:t>
+            </a:r>
+            <a:r>
+              <a:rPr lang="en-US" b="1" dirty="0"/>
+              <a:t>MapReduce</a:t>
+            </a:r>
+            <a:r>
+              <a:rPr lang="en-US" dirty="0"/>
+              <a:t> </a:t>
+            </a:r>
+            <a:r>
+              <a:rPr lang="en-US" dirty="0" err="1"/>
+              <a:t>بود</a:t>
+            </a:r>
+            <a:r>
+              <a:rPr lang="en-US" dirty="0"/>
+              <a:t>.</a:t>
+            </a:r>
+          </a:p>
+          <a:p>
+            <a:pPr algn="r" rtl="1"/>
+            <a:r>
+              <a:rPr lang="en-US" b="1" dirty="0"/>
+              <a:t>MapReduce </a:t>
+            </a:r>
+            <a:r>
+              <a:rPr lang="en-US" b="1" dirty="0" err="1"/>
+              <a:t>چگونه</a:t>
+            </a:r>
+            <a:r>
+              <a:rPr lang="en-US" b="1" dirty="0"/>
+              <a:t> </a:t>
+            </a:r>
+            <a:r>
+              <a:rPr lang="en-US" b="1" dirty="0" err="1"/>
+              <a:t>کار</a:t>
+            </a:r>
+            <a:r>
+              <a:rPr lang="en-US" b="1" dirty="0"/>
+              <a:t> </a:t>
+            </a:r>
+            <a:r>
+              <a:rPr lang="en-US" b="1" dirty="0" err="1"/>
+              <a:t>می‌کند</a:t>
+            </a:r>
+            <a:r>
+              <a:rPr lang="en-US" b="1" dirty="0"/>
+              <a:t>؟</a:t>
+            </a:r>
+          </a:p>
+          <a:p>
+            <a:pPr algn="r" rtl="1"/>
+            <a:r>
+              <a:rPr lang="en-US" dirty="0" err="1"/>
+              <a:t>فرض</a:t>
+            </a:r>
+            <a:r>
+              <a:rPr lang="en-US" dirty="0"/>
+              <a:t> </a:t>
+            </a:r>
+            <a:r>
+              <a:rPr lang="en-US" dirty="0" err="1"/>
+              <a:t>کنید</a:t>
+            </a:r>
+            <a:r>
+              <a:rPr lang="en-US" dirty="0"/>
+              <a:t> </a:t>
+            </a:r>
+            <a:r>
+              <a:rPr lang="en-US" dirty="0" err="1"/>
+              <a:t>می‌خواهیم</a:t>
+            </a:r>
+            <a:r>
+              <a:rPr lang="en-US" dirty="0"/>
+              <a:t> </a:t>
+            </a:r>
+            <a:r>
+              <a:rPr lang="en-US" dirty="0" err="1"/>
+              <a:t>تعداد</a:t>
+            </a:r>
+            <a:r>
+              <a:rPr lang="en-US" dirty="0"/>
+              <a:t> </a:t>
+            </a:r>
+            <a:r>
+              <a:rPr lang="en-US" dirty="0" err="1"/>
+              <a:t>دفعاتی</a:t>
+            </a:r>
+            <a:r>
+              <a:rPr lang="en-US" dirty="0"/>
+              <a:t> </a:t>
+            </a:r>
+            <a:r>
+              <a:rPr lang="en-US" dirty="0" err="1"/>
+              <a:t>را</a:t>
+            </a:r>
+            <a:r>
+              <a:rPr lang="en-US" dirty="0"/>
+              <a:t> </a:t>
+            </a:r>
+            <a:r>
+              <a:rPr lang="en-US" dirty="0" err="1"/>
+              <a:t>که</a:t>
+            </a:r>
+            <a:r>
+              <a:rPr lang="en-US" dirty="0"/>
+              <a:t> </a:t>
+            </a:r>
+            <a:r>
+              <a:rPr lang="en-US" dirty="0" err="1"/>
+              <a:t>هر</a:t>
+            </a:r>
+            <a:r>
+              <a:rPr lang="en-US" dirty="0"/>
+              <a:t> </a:t>
+            </a:r>
+            <a:r>
+              <a:rPr lang="en-US" dirty="0" err="1"/>
+              <a:t>کلمه</a:t>
+            </a:r>
+            <a:r>
+              <a:rPr lang="en-US" dirty="0"/>
+              <a:t> </a:t>
+            </a:r>
+            <a:r>
+              <a:rPr lang="en-US" dirty="0" err="1"/>
+              <a:t>در</a:t>
+            </a:r>
+            <a:r>
+              <a:rPr lang="en-US" dirty="0"/>
+              <a:t> </a:t>
+            </a:r>
+            <a:r>
+              <a:rPr lang="en-US" b="1" dirty="0" err="1"/>
+              <a:t>یک</a:t>
+            </a:r>
+            <a:r>
+              <a:rPr lang="en-US" b="1" dirty="0"/>
+              <a:t> </a:t>
+            </a:r>
+            <a:r>
+              <a:rPr lang="en-US" b="1" dirty="0" err="1"/>
+              <a:t>میلیارد</a:t>
+            </a:r>
+            <a:r>
+              <a:rPr lang="en-US" b="1" dirty="0"/>
+              <a:t> </a:t>
+            </a:r>
+            <a:r>
+              <a:rPr lang="en-US" b="1" dirty="0" err="1"/>
+              <a:t>سند</a:t>
+            </a:r>
+            <a:r>
+              <a:rPr lang="en-US" dirty="0"/>
+              <a:t> </a:t>
+            </a:r>
+            <a:r>
+              <a:rPr lang="en-US" dirty="0" err="1"/>
+              <a:t>ظاهر</a:t>
+            </a:r>
+            <a:r>
+              <a:rPr lang="en-US" dirty="0"/>
+              <a:t> </a:t>
+            </a:r>
+            <a:r>
+              <a:rPr lang="en-US" dirty="0" err="1"/>
+              <a:t>شده</a:t>
+            </a:r>
+            <a:r>
+              <a:rPr lang="en-US" dirty="0"/>
+              <a:t> </a:t>
+            </a:r>
+            <a:r>
+              <a:rPr lang="en-US" dirty="0" err="1"/>
+              <a:t>است</a:t>
+            </a:r>
+            <a:r>
+              <a:rPr lang="en-US" dirty="0"/>
+              <a:t>، </a:t>
+            </a:r>
+            <a:r>
+              <a:rPr lang="en-US" dirty="0" err="1"/>
+              <a:t>محاسبه</a:t>
+            </a:r>
+            <a:r>
+              <a:rPr lang="en-US" dirty="0"/>
+              <a:t> </a:t>
+            </a:r>
+            <a:r>
+              <a:rPr lang="en-US" dirty="0" err="1"/>
+              <a:t>کنیم</a:t>
+            </a:r>
+            <a:r>
+              <a:rPr lang="en-US" dirty="0"/>
+              <a:t>.</a:t>
+            </a:r>
+          </a:p>
+          <a:p>
+            <a:pPr algn="r" rtl="1"/>
+            <a:r>
+              <a:rPr lang="en-US" dirty="0" err="1"/>
+              <a:t>ابتدا</a:t>
+            </a:r>
+            <a:r>
+              <a:rPr lang="en-US" dirty="0"/>
+              <a:t> </a:t>
+            </a:r>
+            <a:r>
+              <a:rPr lang="en-US" dirty="0" err="1"/>
+              <a:t>داده</a:t>
+            </a:r>
+            <a:r>
+              <a:rPr lang="en-US" dirty="0"/>
+              <a:t> </a:t>
+            </a:r>
+            <a:r>
+              <a:rPr lang="en-US" dirty="0" err="1"/>
+              <a:t>بین</a:t>
+            </a:r>
+            <a:r>
+              <a:rPr lang="en-US" dirty="0"/>
+              <a:t> </a:t>
+            </a:r>
+            <a:r>
+              <a:rPr lang="en-US" dirty="0" err="1"/>
+              <a:t>چندین</a:t>
+            </a:r>
+            <a:r>
+              <a:rPr lang="en-US" dirty="0"/>
+              <a:t> </a:t>
+            </a:r>
+            <a:r>
+              <a:rPr lang="en-US" dirty="0" err="1"/>
+              <a:t>کامپیوتر</a:t>
+            </a:r>
+            <a:r>
+              <a:rPr lang="en-US" dirty="0"/>
+              <a:t> </a:t>
+            </a:r>
+            <a:r>
+              <a:rPr lang="en-US" dirty="0" err="1"/>
+              <a:t>تقسیم</a:t>
+            </a:r>
+            <a:r>
+              <a:rPr lang="en-US" dirty="0"/>
+              <a:t> </a:t>
+            </a:r>
+            <a:r>
+              <a:rPr lang="en-US" dirty="0" err="1"/>
+              <a:t>می‌شود</a:t>
+            </a:r>
+            <a:r>
+              <a:rPr lang="en-US" dirty="0"/>
+              <a:t>.</a:t>
+            </a:r>
+          </a:p>
+          <a:p>
+            <a:pPr algn="r" rtl="1"/>
+            <a:r>
+              <a:rPr lang="en-US" b="1" dirty="0"/>
+              <a:t>Map:</a:t>
+            </a:r>
+            <a:endParaRPr lang="en-US" dirty="0"/>
+          </a:p>
+          <a:p>
+            <a:pPr algn="r" rtl="1"/>
+            <a:r>
+              <a:rPr lang="en-US" dirty="0" err="1"/>
+              <a:t>هر</a:t>
+            </a:r>
+            <a:r>
+              <a:rPr lang="en-US" dirty="0"/>
+              <a:t> </a:t>
+            </a:r>
+            <a:r>
+              <a:rPr lang="en-US" dirty="0" err="1"/>
+              <a:t>کامپیوتر</a:t>
+            </a:r>
+            <a:r>
+              <a:rPr lang="en-US" dirty="0"/>
+              <a:t> </a:t>
+            </a:r>
+            <a:r>
+              <a:rPr lang="en-US" dirty="0" err="1"/>
+              <a:t>بخشی</a:t>
+            </a:r>
+            <a:r>
+              <a:rPr lang="en-US" dirty="0"/>
+              <a:t> </a:t>
+            </a:r>
+            <a:r>
+              <a:rPr lang="en-US" dirty="0" err="1"/>
+              <a:t>از</a:t>
+            </a:r>
+            <a:r>
+              <a:rPr lang="en-US" dirty="0"/>
+              <a:t> </a:t>
+            </a:r>
+            <a:r>
+              <a:rPr lang="en-US" dirty="0" err="1"/>
+              <a:t>اسناد</a:t>
+            </a:r>
+            <a:r>
+              <a:rPr lang="en-US" dirty="0"/>
+              <a:t> </a:t>
+            </a:r>
+            <a:r>
+              <a:rPr lang="en-US" dirty="0" err="1"/>
+              <a:t>را</a:t>
+            </a:r>
+            <a:r>
+              <a:rPr lang="en-US" dirty="0"/>
+              <a:t> </a:t>
+            </a:r>
+            <a:r>
+              <a:rPr lang="en-US" dirty="0" err="1"/>
+              <a:t>پردازش</a:t>
+            </a:r>
+            <a:r>
+              <a:rPr lang="en-US" dirty="0"/>
+              <a:t> </a:t>
+            </a:r>
+            <a:r>
+              <a:rPr lang="en-US" dirty="0" err="1"/>
+              <a:t>می‌کند</a:t>
+            </a:r>
+            <a:r>
+              <a:rPr lang="en-US" dirty="0"/>
+              <a:t>:</a:t>
+            </a:r>
+          </a:p>
+          <a:p>
+            <a:pPr algn="r" rtl="1"/>
+            <a:r>
+              <a:rPr lang="en-US" sz="1200" kern="1200" dirty="0">
+                <a:solidFill>
+                  <a:schemeClr val="tx1"/>
+                </a:solidFill>
+                <a:latin typeface="Times New Roman" charset="0"/>
+                <a:ea typeface="MS PGothic" panose="020B0600070205080204" pitchFamily="34" charset="-128"/>
+                <a:cs typeface="ＭＳ Ｐゴシック" charset="0"/>
+              </a:rPr>
+              <a:t>"database systems are fast"</a:t>
+            </a:r>
+          </a:p>
+          <a:p>
+            <a:pPr algn="r" rtl="1"/>
+            <a:r>
+              <a:rPr lang="en-US" sz="1200" kern="1200" dirty="0">
+                <a:solidFill>
+                  <a:schemeClr val="tx1"/>
+                </a:solidFill>
+                <a:latin typeface="Times New Roman" charset="0"/>
+                <a:ea typeface="MS PGothic" panose="020B0600070205080204" pitchFamily="34" charset="-128"/>
+                <a:cs typeface="ＭＳ Ｐゴシック" charset="0"/>
+              </a:rPr>
+              <a:t>        ↓</a:t>
+            </a:r>
+          </a:p>
+          <a:p>
+            <a:pPr algn="r" rtl="1"/>
+            <a:r>
+              <a:rPr lang="en-US" sz="1200" kern="1200" dirty="0">
+                <a:solidFill>
+                  <a:schemeClr val="tx1"/>
+                </a:solidFill>
+                <a:latin typeface="Times New Roman" charset="0"/>
+                <a:ea typeface="MS PGothic" panose="020B0600070205080204" pitchFamily="34" charset="-128"/>
+                <a:cs typeface="ＭＳ Ｐゴシック" charset="0"/>
+              </a:rPr>
+              <a:t>(database, 1)</a:t>
+            </a:r>
+          </a:p>
+          <a:p>
+            <a:pPr algn="r" rtl="1"/>
+            <a:r>
+              <a:rPr lang="en-US" sz="1200" kern="1200" dirty="0">
+                <a:solidFill>
+                  <a:schemeClr val="tx1"/>
+                </a:solidFill>
+                <a:latin typeface="Times New Roman" charset="0"/>
+                <a:ea typeface="MS PGothic" panose="020B0600070205080204" pitchFamily="34" charset="-128"/>
+                <a:cs typeface="ＭＳ Ｐゴシック" charset="0"/>
+              </a:rPr>
+              <a:t>(systems, 1)</a:t>
+            </a:r>
+          </a:p>
+          <a:p>
+            <a:pPr algn="r" rtl="1"/>
+            <a:r>
+              <a:rPr lang="en-US" sz="1200" kern="1200" dirty="0">
+                <a:solidFill>
+                  <a:schemeClr val="tx1"/>
+                </a:solidFill>
+                <a:latin typeface="Times New Roman" charset="0"/>
+                <a:ea typeface="MS PGothic" panose="020B0600070205080204" pitchFamily="34" charset="-128"/>
+                <a:cs typeface="ＭＳ Ｐゴシック" charset="0"/>
+              </a:rPr>
+              <a:t>(are, 1)</a:t>
+            </a:r>
+          </a:p>
+          <a:p>
+            <a:pPr algn="r" rtl="1"/>
+            <a:r>
+              <a:rPr lang="en-US" sz="1200" kern="1200" dirty="0">
+                <a:solidFill>
+                  <a:schemeClr val="tx1"/>
+                </a:solidFill>
+                <a:latin typeface="Times New Roman" charset="0"/>
+                <a:ea typeface="MS PGothic" panose="020B0600070205080204" pitchFamily="34" charset="-128"/>
+                <a:cs typeface="ＭＳ Ｐゴシック" charset="0"/>
+              </a:rPr>
+              <a:t>(fast, 1)</a:t>
+            </a:r>
+          </a:p>
+          <a:p>
+            <a:pPr algn="r" rtl="1"/>
+            <a:r>
+              <a:rPr lang="en-US" dirty="0" err="1"/>
+              <a:t>سپس</a:t>
+            </a:r>
+            <a:r>
+              <a:rPr lang="en-US" dirty="0"/>
+              <a:t> </a:t>
+            </a:r>
+            <a:r>
+              <a:rPr lang="en-US" dirty="0" err="1"/>
+              <a:t>نتایج</a:t>
+            </a:r>
+            <a:r>
+              <a:rPr lang="en-US" dirty="0"/>
+              <a:t> </a:t>
+            </a:r>
+            <a:r>
+              <a:rPr lang="en-US" dirty="0" err="1"/>
+              <a:t>مشابه</a:t>
+            </a:r>
+            <a:r>
+              <a:rPr lang="en-US" dirty="0"/>
+              <a:t> </a:t>
+            </a:r>
+            <a:r>
+              <a:rPr lang="en-US" dirty="0" err="1"/>
+              <a:t>با</a:t>
+            </a:r>
+            <a:r>
+              <a:rPr lang="en-US" dirty="0"/>
+              <a:t> </a:t>
+            </a:r>
+            <a:r>
+              <a:rPr lang="en-US" dirty="0" err="1"/>
+              <a:t>هم</a:t>
+            </a:r>
+            <a:r>
+              <a:rPr lang="en-US" dirty="0"/>
+              <a:t> </a:t>
+            </a:r>
+            <a:r>
+              <a:rPr lang="en-US" dirty="0" err="1"/>
+              <a:t>گروه‌بندی</a:t>
+            </a:r>
+            <a:r>
+              <a:rPr lang="en-US" dirty="0"/>
+              <a:t> </a:t>
+            </a:r>
+            <a:r>
+              <a:rPr lang="en-US" dirty="0" err="1"/>
+              <a:t>می‌شوند</a:t>
+            </a:r>
+            <a:r>
+              <a:rPr lang="en-US" dirty="0"/>
+              <a:t>.</a:t>
+            </a:r>
+          </a:p>
+          <a:p>
+            <a:pPr algn="r" rtl="1"/>
+            <a:r>
+              <a:rPr lang="en-US" b="1" dirty="0"/>
+              <a:t>Reduce:</a:t>
+            </a:r>
+            <a:endParaRPr lang="en-US" dirty="0"/>
+          </a:p>
+          <a:p>
+            <a:pPr algn="r" rtl="1"/>
+            <a:r>
+              <a:rPr lang="en-US" sz="1200" kern="1200" dirty="0">
+                <a:solidFill>
+                  <a:schemeClr val="tx1"/>
+                </a:solidFill>
+                <a:latin typeface="Times New Roman" charset="0"/>
+                <a:ea typeface="MS PGothic" panose="020B0600070205080204" pitchFamily="34" charset="-128"/>
+                <a:cs typeface="ＭＳ Ｐゴシック" charset="0"/>
+              </a:rPr>
+              <a:t>database → 125,000</a:t>
+            </a:r>
+          </a:p>
+          <a:p>
+            <a:pPr algn="r" rtl="1"/>
+            <a:r>
+              <a:rPr lang="en-US" sz="1200" kern="1200" dirty="0">
+                <a:solidFill>
+                  <a:schemeClr val="tx1"/>
+                </a:solidFill>
+                <a:latin typeface="Times New Roman" charset="0"/>
+                <a:ea typeface="MS PGothic" panose="020B0600070205080204" pitchFamily="34" charset="-128"/>
+                <a:cs typeface="ＭＳ Ｐゴシック" charset="0"/>
+              </a:rPr>
+              <a:t>systems  → 98,000</a:t>
+            </a:r>
+          </a:p>
+          <a:p>
+            <a:pPr algn="r" rtl="1"/>
+            <a:r>
+              <a:rPr lang="en-US" sz="1200" kern="1200" dirty="0">
+                <a:solidFill>
+                  <a:schemeClr val="tx1"/>
+                </a:solidFill>
+                <a:latin typeface="Times New Roman" charset="0"/>
+                <a:ea typeface="MS PGothic" panose="020B0600070205080204" pitchFamily="34" charset="-128"/>
+                <a:cs typeface="ＭＳ Ｐゴシック" charset="0"/>
+              </a:rPr>
+              <a:t>fast     → 76,000</a:t>
+            </a:r>
+          </a:p>
+          <a:p>
+            <a:pPr algn="r" rtl="1"/>
+            <a:r>
+              <a:rPr lang="en-US" dirty="0" err="1"/>
+              <a:t>بنابراین</a:t>
+            </a:r>
+            <a:r>
+              <a:rPr lang="en-US" dirty="0"/>
+              <a:t>، </a:t>
+            </a:r>
+            <a:r>
+              <a:rPr lang="en-US" dirty="0" err="1"/>
+              <a:t>به‌جای</a:t>
+            </a:r>
+            <a:r>
+              <a:rPr lang="en-US" dirty="0"/>
+              <a:t> </a:t>
+            </a:r>
+            <a:r>
+              <a:rPr lang="en-US" dirty="0" err="1"/>
+              <a:t>اینکه</a:t>
+            </a:r>
+            <a:r>
+              <a:rPr lang="en-US" dirty="0"/>
+              <a:t> </a:t>
+            </a:r>
+            <a:r>
+              <a:rPr lang="en-US" dirty="0" err="1"/>
+              <a:t>یک</a:t>
+            </a:r>
+            <a:r>
+              <a:rPr lang="en-US" dirty="0"/>
+              <a:t> </a:t>
+            </a:r>
+            <a:r>
+              <a:rPr lang="en-US" dirty="0" err="1"/>
+              <a:t>کامپیوتر</a:t>
+            </a:r>
+            <a:r>
+              <a:rPr lang="en-US" dirty="0"/>
+              <a:t> </a:t>
+            </a:r>
+            <a:r>
+              <a:rPr lang="en-US" dirty="0" err="1"/>
+              <a:t>یک</a:t>
+            </a:r>
+            <a:r>
+              <a:rPr lang="en-US" dirty="0"/>
+              <a:t> </a:t>
+            </a:r>
+            <a:r>
+              <a:rPr lang="en-US" dirty="0" err="1"/>
+              <a:t>میلیارد</a:t>
+            </a:r>
+            <a:r>
+              <a:rPr lang="en-US" dirty="0"/>
+              <a:t> </a:t>
+            </a:r>
+            <a:r>
+              <a:rPr lang="en-US" dirty="0" err="1"/>
+              <a:t>سند</a:t>
+            </a:r>
+            <a:r>
+              <a:rPr lang="en-US" dirty="0"/>
+              <a:t> </a:t>
+            </a:r>
+            <a:r>
+              <a:rPr lang="en-US" dirty="0" err="1"/>
+              <a:t>را</a:t>
+            </a:r>
+            <a:r>
+              <a:rPr lang="en-US" dirty="0"/>
+              <a:t> </a:t>
+            </a:r>
+            <a:r>
+              <a:rPr lang="en-US" dirty="0" err="1"/>
+              <a:t>پردازش</a:t>
+            </a:r>
+            <a:r>
+              <a:rPr lang="en-US" dirty="0"/>
+              <a:t> </a:t>
+            </a:r>
+            <a:r>
+              <a:rPr lang="en-US" dirty="0" err="1"/>
+              <a:t>کند</a:t>
+            </a:r>
+            <a:r>
+              <a:rPr lang="en-US" dirty="0"/>
+              <a:t>، </a:t>
+            </a:r>
+            <a:r>
+              <a:rPr lang="en-US" b="1" dirty="0" err="1"/>
+              <a:t>صدها</a:t>
+            </a:r>
+            <a:r>
+              <a:rPr lang="en-US" b="1" dirty="0"/>
+              <a:t> </a:t>
+            </a:r>
+            <a:r>
+              <a:rPr lang="en-US" b="1" dirty="0" err="1"/>
+              <a:t>یا</a:t>
+            </a:r>
+            <a:r>
+              <a:rPr lang="en-US" b="1" dirty="0"/>
+              <a:t> </a:t>
+            </a:r>
+            <a:r>
+              <a:rPr lang="en-US" b="1" dirty="0" err="1"/>
+              <a:t>هزاران</a:t>
+            </a:r>
+            <a:r>
+              <a:rPr lang="en-US" b="1" dirty="0"/>
+              <a:t> </a:t>
+            </a:r>
+            <a:r>
+              <a:rPr lang="en-US" b="1" dirty="0" err="1"/>
+              <a:t>کامپیوتر</a:t>
+            </a:r>
+            <a:r>
+              <a:rPr lang="en-US" b="1" dirty="0"/>
+              <a:t> </a:t>
+            </a:r>
+            <a:r>
+              <a:rPr lang="en-US" b="1" dirty="0" err="1"/>
+              <a:t>به‌صورت</a:t>
+            </a:r>
+            <a:r>
+              <a:rPr lang="en-US" b="1" dirty="0"/>
+              <a:t> </a:t>
+            </a:r>
+            <a:r>
+              <a:rPr lang="en-US" b="1" dirty="0" err="1"/>
+              <a:t>موازی</a:t>
+            </a:r>
+            <a:r>
+              <a:rPr lang="en-US" dirty="0"/>
+              <a:t> </a:t>
+            </a:r>
+            <a:r>
+              <a:rPr lang="en-US" dirty="0" err="1"/>
+              <a:t>این</a:t>
+            </a:r>
+            <a:r>
+              <a:rPr lang="en-US" dirty="0"/>
+              <a:t> </a:t>
+            </a:r>
+            <a:r>
+              <a:rPr lang="en-US" dirty="0" err="1"/>
+              <a:t>کار</a:t>
+            </a:r>
+            <a:r>
+              <a:rPr lang="en-US" dirty="0"/>
+              <a:t> </a:t>
+            </a:r>
+            <a:r>
+              <a:rPr lang="en-US" dirty="0" err="1"/>
+              <a:t>را</a:t>
+            </a:r>
+            <a:r>
+              <a:rPr lang="en-US" dirty="0"/>
+              <a:t> </a:t>
+            </a:r>
+            <a:r>
+              <a:rPr lang="en-US" dirty="0" err="1"/>
+              <a:t>انجام</a:t>
+            </a:r>
+            <a:r>
+              <a:rPr lang="en-US" dirty="0"/>
+              <a:t> </a:t>
+            </a:r>
+            <a:r>
+              <a:rPr lang="en-US" dirty="0" err="1"/>
+              <a:t>می‌دهند</a:t>
+            </a:r>
+            <a:r>
+              <a:rPr lang="en-US" dirty="0"/>
+              <a:t>.</a:t>
+            </a:r>
+          </a:p>
+          <a:p>
+            <a:pPr algn="r" rtl="1"/>
+            <a:r>
+              <a:rPr lang="en-US" dirty="0" err="1"/>
+              <a:t>این</a:t>
+            </a:r>
+            <a:r>
+              <a:rPr lang="en-US" dirty="0"/>
+              <a:t> </a:t>
+            </a:r>
+            <a:r>
+              <a:rPr lang="en-US" dirty="0" err="1"/>
+              <a:t>ایده</a:t>
+            </a:r>
+            <a:r>
+              <a:rPr lang="en-US" dirty="0"/>
+              <a:t> </a:t>
+            </a:r>
+            <a:r>
+              <a:rPr lang="en-US" dirty="0" err="1"/>
+              <a:t>بعدها</a:t>
+            </a:r>
+            <a:r>
+              <a:rPr lang="en-US" dirty="0"/>
+              <a:t> </a:t>
+            </a:r>
+            <a:r>
+              <a:rPr lang="en-US" dirty="0" err="1"/>
+              <a:t>در</a:t>
+            </a:r>
+            <a:r>
+              <a:rPr lang="en-US" dirty="0"/>
+              <a:t> </a:t>
+            </a:r>
+            <a:r>
+              <a:rPr lang="en-US" dirty="0" err="1"/>
+              <a:t>سیستم‌هایی</a:t>
+            </a:r>
+            <a:r>
+              <a:rPr lang="en-US" dirty="0"/>
+              <a:t> </a:t>
+            </a:r>
+            <a:r>
+              <a:rPr lang="en-US" dirty="0" err="1"/>
+              <a:t>مانند</a:t>
+            </a:r>
+            <a:r>
+              <a:rPr lang="en-US" dirty="0"/>
+              <a:t> </a:t>
+            </a:r>
+            <a:r>
+              <a:rPr lang="en-US" b="1" dirty="0"/>
+              <a:t>Hadoop</a:t>
+            </a:r>
+            <a:r>
+              <a:rPr lang="en-US" dirty="0"/>
+              <a:t> </a:t>
+            </a:r>
+            <a:r>
+              <a:rPr lang="en-US" dirty="0" err="1"/>
+              <a:t>نیز</a:t>
+            </a:r>
+            <a:r>
+              <a:rPr lang="en-US" dirty="0"/>
+              <a:t> </a:t>
+            </a:r>
+            <a:r>
+              <a:rPr lang="en-US" dirty="0" err="1"/>
+              <a:t>بسیار</a:t>
+            </a:r>
+            <a:r>
+              <a:rPr lang="en-US" dirty="0"/>
+              <a:t> </a:t>
+            </a:r>
+            <a:r>
+              <a:rPr lang="en-US" dirty="0" err="1"/>
+              <a:t>مورد</a:t>
+            </a:r>
+            <a:r>
+              <a:rPr lang="en-US" dirty="0"/>
+              <a:t> </a:t>
+            </a:r>
+            <a:r>
+              <a:rPr lang="en-US" dirty="0" err="1"/>
+              <a:t>استفاده</a:t>
+            </a:r>
+            <a:r>
+              <a:rPr lang="en-US" dirty="0"/>
+              <a:t> </a:t>
+            </a:r>
+            <a:r>
+              <a:rPr lang="en-US" dirty="0" err="1"/>
+              <a:t>قرار</a:t>
+            </a:r>
+            <a:r>
+              <a:rPr lang="en-US" dirty="0"/>
+              <a:t> </a:t>
+            </a:r>
+            <a:r>
+              <a:rPr lang="en-US" dirty="0" err="1"/>
+              <a:t>گرفت</a:t>
+            </a:r>
+            <a:r>
+              <a:rPr lang="en-US" dirty="0"/>
+              <a:t>.</a:t>
+            </a:r>
+          </a:p>
+          <a:p>
+            <a:pPr algn="r" rtl="1"/>
+            <a:endParaRPr lang="en-US" b="1" dirty="0"/>
+          </a:p>
+          <a:p>
+            <a:pPr algn="r" rtl="1"/>
+            <a:endParaRPr lang="en-US" b="1" dirty="0"/>
+          </a:p>
+          <a:p>
+            <a:pPr algn="r" rtl="1"/>
+            <a:r>
+              <a:rPr lang="en-US" b="1" dirty="0" err="1"/>
+              <a:t>دهه</a:t>
+            </a:r>
+            <a:r>
+              <a:rPr lang="en-US" b="1" dirty="0"/>
+              <a:t> ۲۰۱۰: </a:t>
+            </a:r>
+            <a:r>
+              <a:rPr lang="en-US" b="1" dirty="0" err="1"/>
+              <a:t>بازگشت</a:t>
+            </a:r>
+            <a:r>
+              <a:rPr lang="en-US" b="1" dirty="0"/>
+              <a:t> SQL</a:t>
+            </a:r>
+          </a:p>
+          <a:p>
+            <a:pPr algn="r" rtl="1"/>
+            <a:r>
+              <a:rPr lang="en-US" dirty="0" err="1"/>
+              <a:t>در</a:t>
+            </a:r>
+            <a:r>
+              <a:rPr lang="en-US" dirty="0"/>
+              <a:t> </a:t>
+            </a:r>
+            <a:r>
+              <a:rPr lang="en-US" dirty="0" err="1"/>
+              <a:t>دهه</a:t>
+            </a:r>
+            <a:r>
+              <a:rPr lang="en-US" dirty="0"/>
+              <a:t> ۲۰۱۰ </a:t>
+            </a:r>
+            <a:r>
+              <a:rPr lang="en-US" dirty="0" err="1"/>
+              <a:t>اتفاق</a:t>
+            </a:r>
+            <a:r>
+              <a:rPr lang="en-US" dirty="0"/>
+              <a:t> </a:t>
+            </a:r>
+            <a:r>
+              <a:rPr lang="en-US" dirty="0" err="1"/>
+              <a:t>جالبی</a:t>
+            </a:r>
+            <a:r>
+              <a:rPr lang="en-US" dirty="0"/>
+              <a:t> </a:t>
+            </a:r>
+            <a:r>
+              <a:rPr lang="en-US" dirty="0" err="1"/>
+              <a:t>رخ</a:t>
+            </a:r>
+            <a:r>
+              <a:rPr lang="en-US" dirty="0"/>
+              <a:t> </a:t>
+            </a:r>
+            <a:r>
+              <a:rPr lang="en-US" dirty="0" err="1"/>
+              <a:t>داد</a:t>
+            </a:r>
+            <a:r>
+              <a:rPr lang="en-US" dirty="0"/>
+              <a:t>.</a:t>
+            </a:r>
+          </a:p>
+          <a:p>
+            <a:pPr algn="r" rtl="1"/>
+            <a:r>
+              <a:rPr lang="en-US" dirty="0" err="1"/>
+              <a:t>پس</a:t>
+            </a:r>
+            <a:r>
+              <a:rPr lang="en-US" dirty="0"/>
+              <a:t> </a:t>
+            </a:r>
+            <a:r>
+              <a:rPr lang="en-US" dirty="0" err="1"/>
+              <a:t>از</a:t>
+            </a:r>
+            <a:r>
+              <a:rPr lang="en-US" dirty="0"/>
+              <a:t> </a:t>
+            </a:r>
+            <a:r>
+              <a:rPr lang="en-US" dirty="0" err="1"/>
+              <a:t>رشد</a:t>
+            </a:r>
+            <a:r>
+              <a:rPr lang="en-US" dirty="0"/>
+              <a:t> NoSQL و MapReduce، </a:t>
+            </a:r>
+            <a:r>
+              <a:rPr lang="en-US" dirty="0" err="1"/>
+              <a:t>مشخص</a:t>
+            </a:r>
+            <a:r>
+              <a:rPr lang="en-US" dirty="0"/>
+              <a:t> </a:t>
+            </a:r>
+            <a:r>
+              <a:rPr lang="en-US" dirty="0" err="1"/>
+              <a:t>شد</a:t>
+            </a:r>
+            <a:r>
+              <a:rPr lang="en-US" dirty="0"/>
+              <a:t> </a:t>
+            </a:r>
+            <a:r>
+              <a:rPr lang="en-US" dirty="0" err="1"/>
+              <a:t>که</a:t>
+            </a:r>
+            <a:r>
+              <a:rPr lang="en-US" dirty="0"/>
+              <a:t> SQL </a:t>
+            </a:r>
+            <a:r>
+              <a:rPr lang="en-US" dirty="0" err="1"/>
+              <a:t>هنوز</a:t>
+            </a:r>
+            <a:r>
+              <a:rPr lang="en-US" dirty="0"/>
+              <a:t> </a:t>
+            </a:r>
+            <a:r>
+              <a:rPr lang="en-US" dirty="0" err="1"/>
+              <a:t>بسیار</a:t>
+            </a:r>
+            <a:r>
+              <a:rPr lang="en-US" dirty="0"/>
+              <a:t> </a:t>
+            </a:r>
+            <a:r>
+              <a:rPr lang="en-US" dirty="0" err="1"/>
+              <a:t>قدرتمند</a:t>
+            </a:r>
+            <a:r>
+              <a:rPr lang="en-US" dirty="0"/>
+              <a:t> و </a:t>
+            </a:r>
+            <a:r>
+              <a:rPr lang="en-US" dirty="0" err="1"/>
+              <a:t>راحت</a:t>
+            </a:r>
+            <a:r>
+              <a:rPr lang="en-US" dirty="0"/>
+              <a:t> </a:t>
+            </a:r>
+            <a:r>
+              <a:rPr lang="en-US" dirty="0" err="1"/>
+              <a:t>است</a:t>
+            </a:r>
+            <a:r>
+              <a:rPr lang="en-US" dirty="0"/>
+              <a:t>. </a:t>
+            </a:r>
+            <a:r>
+              <a:rPr lang="en-US" dirty="0" err="1"/>
+              <a:t>بنابراین</a:t>
+            </a:r>
+            <a:r>
+              <a:rPr lang="en-US" dirty="0"/>
+              <a:t>، </a:t>
+            </a:r>
+            <a:r>
+              <a:rPr lang="en-US" dirty="0" err="1"/>
+              <a:t>به‌جای</a:t>
+            </a:r>
+            <a:r>
+              <a:rPr lang="en-US" dirty="0"/>
+              <a:t> </a:t>
+            </a:r>
+            <a:r>
+              <a:rPr lang="en-US" dirty="0" err="1"/>
+              <a:t>حذف</a:t>
+            </a:r>
+            <a:r>
+              <a:rPr lang="en-US" dirty="0"/>
+              <a:t> SQL، </a:t>
+            </a:r>
+            <a:r>
+              <a:rPr lang="en-US" dirty="0" err="1"/>
+              <a:t>تلاش</a:t>
+            </a:r>
+            <a:r>
+              <a:rPr lang="en-US" dirty="0"/>
+              <a:t> </a:t>
+            </a:r>
+            <a:r>
+              <a:rPr lang="en-US" dirty="0" err="1"/>
+              <a:t>شد</a:t>
+            </a:r>
+            <a:r>
+              <a:rPr lang="en-US" dirty="0"/>
+              <a:t> </a:t>
+            </a:r>
+            <a:r>
+              <a:rPr lang="en-US" b="1" dirty="0"/>
+              <a:t>SQL </a:t>
+            </a:r>
+            <a:r>
+              <a:rPr lang="en-US" b="1" dirty="0" err="1"/>
+              <a:t>با</a:t>
+            </a:r>
+            <a:r>
+              <a:rPr lang="en-US" b="1" dirty="0"/>
+              <a:t> </a:t>
+            </a:r>
+            <a:r>
+              <a:rPr lang="en-US" b="1" dirty="0" err="1"/>
+              <a:t>معماری‌های</a:t>
+            </a:r>
+            <a:r>
+              <a:rPr lang="en-US" b="1" dirty="0"/>
+              <a:t> Big Data و Parallel Computing </a:t>
+            </a:r>
+            <a:r>
+              <a:rPr lang="en-US" b="1" dirty="0" err="1"/>
+              <a:t>ترکیب</a:t>
+            </a:r>
+            <a:r>
+              <a:rPr lang="en-US" b="1" dirty="0"/>
+              <a:t> </a:t>
+            </a:r>
+            <a:r>
+              <a:rPr lang="en-US" b="1" dirty="0" err="1"/>
+              <a:t>شود</a:t>
+            </a:r>
+            <a:r>
+              <a:rPr lang="en-US" b="1" dirty="0"/>
+              <a:t>.</a:t>
+            </a:r>
+            <a:endParaRPr lang="en-US" dirty="0"/>
+          </a:p>
+          <a:p>
+            <a:pPr algn="r" rtl="1"/>
+            <a:r>
+              <a:rPr lang="en-US" dirty="0" err="1"/>
+              <a:t>به</a:t>
+            </a:r>
+            <a:r>
+              <a:rPr lang="en-US" dirty="0"/>
+              <a:t> </a:t>
+            </a:r>
+            <a:r>
+              <a:rPr lang="en-US" dirty="0" err="1"/>
+              <a:t>همین</a:t>
+            </a:r>
+            <a:r>
+              <a:rPr lang="en-US" dirty="0"/>
+              <a:t> </a:t>
+            </a:r>
+            <a:r>
+              <a:rPr lang="en-US" dirty="0" err="1"/>
+              <a:t>دلیل</a:t>
+            </a:r>
+            <a:r>
+              <a:rPr lang="en-US" dirty="0"/>
+              <a:t> </a:t>
+            </a:r>
+            <a:r>
+              <a:rPr lang="en-US" dirty="0" err="1"/>
+              <a:t>اصطلاح</a:t>
+            </a:r>
+            <a:r>
+              <a:rPr lang="en-US" dirty="0"/>
+              <a:t>:</a:t>
+            </a:r>
+          </a:p>
+          <a:p>
+            <a:pPr algn="r" rtl="1"/>
+            <a:r>
+              <a:rPr lang="en-US" b="1" dirty="0"/>
+              <a:t>SQL Reloaded</a:t>
+            </a:r>
+            <a:endParaRPr lang="en-US" dirty="0"/>
+          </a:p>
+          <a:p>
+            <a:pPr algn="r" rtl="1"/>
+            <a:r>
+              <a:rPr lang="en-US" dirty="0" err="1"/>
+              <a:t>یا</a:t>
+            </a:r>
+            <a:r>
+              <a:rPr lang="en-US" dirty="0"/>
+              <a:t> </a:t>
+            </a:r>
+            <a:r>
+              <a:rPr lang="en-US" b="1" dirty="0" err="1"/>
+              <a:t>بازگشت</a:t>
+            </a:r>
+            <a:r>
+              <a:rPr lang="en-US" b="1" dirty="0"/>
+              <a:t> SQL</a:t>
+            </a:r>
+            <a:r>
+              <a:rPr lang="en-US" dirty="0"/>
+              <a:t> </a:t>
+            </a:r>
+            <a:r>
+              <a:rPr lang="en-US" dirty="0" err="1"/>
+              <a:t>مطرح</a:t>
+            </a:r>
+            <a:r>
+              <a:rPr lang="en-US" dirty="0"/>
+              <a:t> </a:t>
+            </a:r>
+            <a:r>
+              <a:rPr lang="en-US" dirty="0" err="1"/>
+              <a:t>شد</a:t>
+            </a:r>
+            <a:r>
+              <a:rPr lang="en-US" dirty="0"/>
+              <a:t>.</a:t>
+            </a:r>
+          </a:p>
+          <a:p>
+            <a:pPr algn="r" rtl="1"/>
+            <a:r>
+              <a:rPr lang="en-US" b="1" dirty="0"/>
+              <a:t>۱. SQL Front-End </a:t>
+            </a:r>
+            <a:r>
+              <a:rPr lang="en-US" b="1" dirty="0" err="1"/>
+              <a:t>برای</a:t>
+            </a:r>
+            <a:r>
+              <a:rPr lang="en-US" b="1" dirty="0"/>
+              <a:t> </a:t>
+            </a:r>
+            <a:r>
+              <a:rPr lang="en-US" b="1" dirty="0" err="1"/>
+              <a:t>سیستم‌های</a:t>
+            </a:r>
+            <a:r>
+              <a:rPr lang="en-US" b="1" dirty="0"/>
+              <a:t> MapReduce</a:t>
+            </a:r>
+          </a:p>
+          <a:p>
+            <a:pPr algn="r" rtl="1"/>
+            <a:r>
+              <a:rPr lang="en-US" dirty="0" err="1"/>
+              <a:t>ایده</a:t>
+            </a:r>
+            <a:r>
+              <a:rPr lang="en-US" dirty="0"/>
+              <a:t> </a:t>
+            </a:r>
+            <a:r>
+              <a:rPr lang="en-US" dirty="0" err="1"/>
+              <a:t>این</a:t>
+            </a:r>
+            <a:r>
+              <a:rPr lang="en-US" dirty="0"/>
+              <a:t> </a:t>
+            </a:r>
+            <a:r>
+              <a:rPr lang="en-US" dirty="0" err="1"/>
+              <a:t>بود</a:t>
+            </a:r>
+            <a:r>
+              <a:rPr lang="en-US" dirty="0"/>
+              <a:t> </a:t>
+            </a:r>
+            <a:r>
+              <a:rPr lang="en-US" dirty="0" err="1"/>
+              <a:t>که</a:t>
+            </a:r>
+            <a:r>
+              <a:rPr lang="en-US" dirty="0"/>
+              <a:t> </a:t>
+            </a:r>
+            <a:r>
+              <a:rPr lang="en-US" dirty="0" err="1"/>
+              <a:t>کاربر</a:t>
+            </a:r>
+            <a:r>
+              <a:rPr lang="en-US" dirty="0"/>
+              <a:t> </a:t>
+            </a:r>
+            <a:r>
+              <a:rPr lang="en-US" dirty="0" err="1"/>
+              <a:t>همچنان</a:t>
+            </a:r>
+            <a:r>
+              <a:rPr lang="en-US" dirty="0"/>
+              <a:t> </a:t>
+            </a:r>
+            <a:r>
+              <a:rPr lang="en-US" dirty="0" err="1"/>
+              <a:t>بتواند</a:t>
+            </a:r>
+            <a:r>
+              <a:rPr lang="en-US" dirty="0"/>
+              <a:t> </a:t>
+            </a:r>
+            <a:r>
+              <a:rPr lang="en-US" dirty="0" err="1"/>
+              <a:t>از</a:t>
+            </a:r>
+            <a:r>
+              <a:rPr lang="en-US" dirty="0"/>
+              <a:t> SQL </a:t>
+            </a:r>
+            <a:r>
+              <a:rPr lang="en-US" dirty="0" err="1"/>
+              <a:t>استفاده</a:t>
+            </a:r>
+            <a:r>
+              <a:rPr lang="en-US" dirty="0"/>
+              <a:t> </a:t>
+            </a:r>
+            <a:r>
+              <a:rPr lang="en-US" dirty="0" err="1"/>
+              <a:t>کند</a:t>
+            </a:r>
+            <a:r>
+              <a:rPr lang="en-US" dirty="0"/>
+              <a:t>، </a:t>
+            </a:r>
+            <a:r>
+              <a:rPr lang="en-US" dirty="0" err="1"/>
+              <a:t>اما</a:t>
+            </a:r>
+            <a:r>
+              <a:rPr lang="en-US" dirty="0"/>
+              <a:t> </a:t>
+            </a:r>
+            <a:r>
+              <a:rPr lang="en-US" dirty="0" err="1"/>
+              <a:t>سیستم</a:t>
+            </a:r>
+            <a:r>
+              <a:rPr lang="en-US" dirty="0"/>
+              <a:t> </a:t>
+            </a:r>
+            <a:r>
+              <a:rPr lang="en-US" dirty="0" err="1"/>
+              <a:t>در</a:t>
+            </a:r>
+            <a:r>
+              <a:rPr lang="en-US" dirty="0"/>
+              <a:t> </a:t>
+            </a:r>
+            <a:r>
+              <a:rPr lang="en-US" dirty="0" err="1"/>
+              <a:t>پشت</a:t>
+            </a:r>
+            <a:r>
+              <a:rPr lang="en-US" dirty="0"/>
+              <a:t> </a:t>
+            </a:r>
+            <a:r>
+              <a:rPr lang="en-US" dirty="0" err="1"/>
+              <a:t>صحنه</a:t>
+            </a:r>
+            <a:r>
+              <a:rPr lang="en-US" dirty="0"/>
+              <a:t>، query </a:t>
+            </a:r>
+            <a:r>
+              <a:rPr lang="en-US" dirty="0" err="1"/>
+              <a:t>را</a:t>
+            </a:r>
+            <a:r>
+              <a:rPr lang="en-US" dirty="0"/>
+              <a:t> </a:t>
+            </a:r>
+            <a:r>
+              <a:rPr lang="en-US" dirty="0" err="1"/>
+              <a:t>به</a:t>
+            </a:r>
+            <a:r>
+              <a:rPr lang="en-US" dirty="0"/>
+              <a:t> </a:t>
+            </a:r>
+            <a:r>
+              <a:rPr lang="en-US" dirty="0" err="1"/>
+              <a:t>عملیات</a:t>
+            </a:r>
+            <a:r>
+              <a:rPr lang="en-US" dirty="0"/>
+              <a:t> </a:t>
+            </a:r>
+            <a:r>
+              <a:rPr lang="en-US" dirty="0" err="1"/>
+              <a:t>توزیع‌شده</a:t>
+            </a:r>
+            <a:r>
+              <a:rPr lang="en-US" dirty="0"/>
+              <a:t> </a:t>
+            </a:r>
+            <a:r>
+              <a:rPr lang="en-US" dirty="0" err="1"/>
+              <a:t>تبدیل</a:t>
+            </a:r>
+            <a:r>
+              <a:rPr lang="en-US" dirty="0"/>
+              <a:t> </a:t>
+            </a:r>
+            <a:r>
+              <a:rPr lang="en-US" dirty="0" err="1"/>
+              <a:t>کند</a:t>
+            </a:r>
+            <a:r>
+              <a:rPr lang="en-US" dirty="0"/>
+              <a:t>.</a:t>
+            </a:r>
+          </a:p>
+          <a:p>
+            <a:pPr algn="r" rtl="1"/>
             <a:endParaRPr lang="en-US" altLang="en-US" dirty="0">
               <a:latin typeface="Times New Roman" panose="02020603050405020304" pitchFamily="18" charset="0"/>
             </a:endParaRPr>
@@ -19250,10 +24361,10 @@
           <p:nvPr/>
         </p:nvPicPr>
         <p:blipFill rotWithShape="1">
-          <a:blip r:embed="rId4">
+          <a:blip>
             <a:extLst>
               <a:ext uri="{96DAC541-7B7A-43D3-8B79-37D633B846F1}">
-                <asvg:svgBlip xmlns:asvg="http://schemas.microsoft.com/office/drawing/2016/SVG/main" r:embed="rId5"/>
+                <asvg:svgBlip xmlns:asvg="http://schemas.microsoft.com/office/drawing/2016/SVG/main" r:embed="rId4"/>
               </a:ext>
             </a:extLst>
           </a:blip>
@@ -19518,10 +24629,10 @@
           <p:nvPr/>
         </p:nvPicPr>
         <p:blipFill>
-          <a:blip r:embed="rId3">
+          <a:blip>
             <a:extLst>
               <a:ext uri="{96DAC541-7B7A-43D3-8B79-37D633B846F1}">
-                <asvg:svgBlip xmlns:asvg="http://schemas.microsoft.com/office/drawing/2016/SVG/main" r:embed="rId4"/>
+                <asvg:svgBlip xmlns:asvg="http://schemas.microsoft.com/office/drawing/2016/SVG/main" r:embed="rId3"/>
               </a:ext>
             </a:extLst>
           </a:blip>
@@ -31360,10 +36471,10 @@
           <p:nvPr/>
         </p:nvPicPr>
         <p:blipFill rotWithShape="1">
-          <a:blip r:embed="rId3">
+          <a:blip>
             <a:extLst>
               <a:ext uri="{96DAC541-7B7A-43D3-8B79-37D633B846F1}">
-                <asvg:svgBlip xmlns:asvg="http://schemas.microsoft.com/office/drawing/2016/SVG/main" r:embed="rId4"/>
+                <asvg:svgBlip xmlns:asvg="http://schemas.microsoft.com/office/drawing/2016/SVG/main" r:embed="rId3"/>
               </a:ext>
             </a:extLst>
           </a:blip>
@@ -31372,7 +36483,7 @@
         </p:blipFill>
         <p:spPr>
           <a:xfrm>
-            <a:off x="303830" y="727213"/>
+            <a:off x="303830" y="736838"/>
             <a:ext cx="5754250" cy="5885858"/>
           </a:xfrm>
           <a:prstGeom prst="rect">
@@ -32598,10 +37709,10 @@
           <p:nvPr/>
         </p:nvPicPr>
         <p:blipFill>
-          <a:blip r:embed="rId3">
+          <a:blip>
             <a:extLst>
               <a:ext uri="{96DAC541-7B7A-43D3-8B79-37D633B846F1}">
-                <asvg:svgBlip xmlns:asvg="http://schemas.microsoft.com/office/drawing/2016/SVG/main" r:embed="rId4"/>
+                <asvg:svgBlip xmlns:asvg="http://schemas.microsoft.com/office/drawing/2016/SVG/main" r:embed="rId3"/>
               </a:ext>
             </a:extLst>
           </a:blip>
@@ -32712,10 +37823,10 @@
           <p:nvPr/>
         </p:nvPicPr>
         <p:blipFill rotWithShape="1">
-          <a:blip r:embed="rId3">
+          <a:blip>
             <a:extLst>
               <a:ext uri="{96DAC541-7B7A-43D3-8B79-37D633B846F1}">
-                <asvg:svgBlip xmlns:asvg="http://schemas.microsoft.com/office/drawing/2016/SVG/main" r:embed="rId4"/>
+                <asvg:svgBlip xmlns:asvg="http://schemas.microsoft.com/office/drawing/2016/SVG/main" r:embed="rId3"/>
               </a:ext>
             </a:extLst>
           </a:blip>
@@ -33056,7 +38167,49 @@
                 <a:latin typeface="Arial" panose="020B0604020202020204" pitchFamily="34" charset="0"/>
                 <a:cs typeface="B Nazanin" panose="00000400000000000000" pitchFamily="2" charset="-78"/>
               </a:rPr>
-              <a:t>تعریف طرح‌</a:t>
+              <a:t>تعریف طرح</a:t>
+            </a:r>
+            <a:r>
+              <a:rPr kumimoji="0" lang="fa-IR" altLang="en-US" sz="2000" b="1" i="0" u="none" strike="noStrike" cap="none" normalizeH="0" baseline="0" dirty="0">
+                <a:ln>
+                  <a:noFill/>
+                </a:ln>
+                <a:solidFill>
+                  <a:schemeClr val="tx1"/>
+                </a:solidFill>
+                <a:effectLst/>
+                <a:latin typeface="Arial" panose="020B0604020202020204" pitchFamily="34" charset="0"/>
+                <a:cs typeface="B Nazanin" panose="00000400000000000000" pitchFamily="2" charset="-78"/>
+              </a:rPr>
+              <a:t> </a:t>
+            </a:r>
+            <a:r>
+              <a:rPr kumimoji="0" lang="en-US" altLang="en-US" sz="2000" b="1" i="0" u="none" strike="noStrike" cap="none" normalizeH="0" baseline="0" dirty="0">
+                <a:ln>
+                  <a:noFill/>
+                </a:ln>
+                <a:solidFill>
+                  <a:schemeClr val="tx1"/>
+                </a:solidFill>
+                <a:effectLst/>
+                <a:latin typeface="Arial" panose="020B0604020202020204" pitchFamily="34" charset="0"/>
+                <a:cs typeface="B Nazanin" panose="00000400000000000000" pitchFamily="2" charset="-78"/>
+              </a:rPr>
+              <a:t>Schema</a:t>
+            </a:r>
+            <a:r>
+              <a:rPr kumimoji="0" lang="ar-SA" altLang="en-US" sz="2000" b="1" i="0" u="none" strike="noStrike" cap="none" normalizeH="0" baseline="0" dirty="0">
+                <a:ln>
+                  <a:noFill/>
+                </a:ln>
+                <a:solidFill>
+                  <a:schemeClr val="tx1"/>
+                </a:solidFill>
+                <a:effectLst/>
+                <a:latin typeface="Arial" panose="020B0604020202020204" pitchFamily="34" charset="0"/>
+                <a:cs typeface="B Nazanin" panose="00000400000000000000" pitchFamily="2" charset="-78"/>
+              </a:rPr>
+              <a:t>‌</a:t>
             </a:r>
             <a:r>
               <a:rPr kumimoji="0" lang="fa-IR" altLang="en-US" sz="2000" b="1" dirty="0">
@@ -33145,7 +38298,14 @@
               <a:t>و روش دسترسی</a:t>
             </a:r>
             <a:r>
-              <a:rPr kumimoji="0" lang="fa-IR" altLang="en-US" sz="2000" b="0" i="0" u="none" strike="noStrike" cap="none" normalizeH="0" baseline="0" dirty="0">
+              <a:rPr kumimoji="0" lang="fa-IR" altLang="en-US" sz="2000">
+                <a:latin typeface="Arial" panose="020B0604020202020204" pitchFamily="34" charset="0"/>
+                <a:cs typeface="B Nazanin" panose="00000400000000000000" pitchFamily="2" charset="-78"/>
+              </a:rPr>
+              <a:t> به پایگاه داده و جداول</a:t>
+            </a:r>
+            <a:r>
+              <a:rPr kumimoji="0" lang="fa-IR" altLang="en-US" sz="2000" b="0" i="0" u="none" strike="noStrike" cap="none" normalizeH="0" baseline="0">
                 <a:ln>
                   <a:noFill/>
                 </a:ln>
@@ -33158,6 +38318,17 @@
               </a:rPr>
               <a:t>.</a:t>
             </a:r>
+            <a:endParaRPr kumimoji="0" lang="fa-IR" altLang="en-US" sz="2000" b="0" i="0" u="none" strike="noStrike" cap="none" normalizeH="0" baseline="0" dirty="0">
+              <a:ln>
+                <a:noFill/>
+              </a:ln>
+              <a:solidFill>
+                <a:schemeClr val="tx1"/>
+              </a:solidFill>
+              <a:effectLst/>
+              <a:latin typeface="Arial" panose="020B0604020202020204" pitchFamily="34" charset="0"/>
+              <a:cs typeface="B Nazanin" panose="00000400000000000000" pitchFamily="2" charset="-78"/>
+            </a:endParaRPr>
           </a:p>
           <a:p>
             <a:pPr marL="457200" marR="0" lvl="1" indent="0" algn="r" defTabSz="914400" rtl="1" eaLnBrk="0" fontAlgn="base" latinLnBrk="0" hangingPunct="0">
@@ -33688,6 +38859,36 @@
           <a:chExt cx="0" cy="0"/>
         </a:xfrm>
       </p:grpSpPr>
+      <p:pic>
+        <p:nvPicPr>
+          <p:cNvPr id="2" name="Picture 1" descr="Punched card machine hi-res stock photography and images - Alamy">
+            <a:extLst>
+              <a:ext uri="{FF2B5EF4-FFF2-40B4-BE49-F238E27FC236}">
+                <a16:creationId xmlns:a16="http://schemas.microsoft.com/office/drawing/2014/main" id="{DCC3D383-1136-D972-ACEC-EEA1DAB0620D}"/>
+              </a:ext>
+            </a:extLst>
+          </p:cNvPr>
+          <p:cNvPicPr>
+            <a:picLocks noChangeAspect="1"/>
+          </p:cNvPicPr>
+          <p:nvPr/>
+        </p:nvPicPr>
+        <p:blipFill>
+          <a:blip r:embed="rId3"/>
+          <a:stretch>
+            <a:fillRect/>
+          </a:stretch>
+        </p:blipFill>
+        <p:spPr>
+          <a:xfrm>
+            <a:off x="298450" y="1123445"/>
+            <a:ext cx="2920455" cy="2249352"/>
+          </a:xfrm>
+          <a:prstGeom prst="rect">
+            <a:avLst/>
+          </a:prstGeom>
+        </p:spPr>
+      </p:pic>
       <p:sp>
         <p:nvSpPr>
           <p:cNvPr id="63489" name="Rectangle 2"/>
@@ -33911,35 +39112,7 @@
               <a:buFont typeface="Courier New" panose="02070309020205020404" pitchFamily="49" charset="0"/>
               <a:buChar char="o"/>
             </a:pPr>
-            <a:r>
-              <a:rPr kumimoji="0" lang="ar-SA" altLang="en-US" sz="1800" b="0" i="0" u="none" strike="noStrike" cap="none" normalizeH="0" baseline="0" dirty="0">
-                <a:ln>
-                  <a:noFill/>
-                </a:ln>
-                <a:solidFill>
-                  <a:schemeClr val="tx1"/>
-                </a:solidFill>
-                <a:effectLst/>
-                <a:latin typeface="Arial" panose="020B0604020202020204" pitchFamily="34" charset="0"/>
-                <a:cs typeface="B Nazanin" panose="00000400000000000000" pitchFamily="2" charset="-78"/>
-              </a:rPr>
-              <a:t>پردازش داده با استفاده از نوارهای مغناطیسی برای ذخیره‌سازی</a:t>
-            </a:r>
-            <a:r>
-              <a:rPr kumimoji="0" lang="fa-IR" altLang="en-US" sz="1800" b="0" i="0" u="none" strike="noStrike" cap="none" normalizeH="0" baseline="0" dirty="0">
-                <a:ln>
-                  <a:noFill/>
-                </a:ln>
-                <a:solidFill>
-                  <a:schemeClr val="tx1"/>
-                </a:solidFill>
-                <a:effectLst/>
-                <a:latin typeface="Arial" panose="020B0604020202020204" pitchFamily="34" charset="0"/>
-                <a:cs typeface="B Nazanin" panose="00000400000000000000" pitchFamily="2" charset="-78"/>
-              </a:rPr>
-              <a:t>.</a:t>
-            </a:r>
-            <a:endParaRPr kumimoji="0" lang="en-US" altLang="en-US" sz="1800" b="0" i="0" u="none" strike="noStrike" cap="none" normalizeH="0" baseline="0" dirty="0">
+            <a:endParaRPr kumimoji="0" lang="fa-IR" altLang="en-US" sz="1800" b="0" i="0" u="none" strike="noStrike" cap="none" normalizeH="0" baseline="0" dirty="0">
               <a:ln>
                 <a:noFill/>
               </a:ln>
@@ -33952,7 +39125,7 @@
             </a:endParaRPr>
           </a:p>
           <a:p>
-            <a:pPr lvl="2" algn="r" rtl="1">
+            <a:pPr lvl="1" algn="r" rtl="1">
               <a:lnSpc>
                 <a:spcPct val="150000"/>
               </a:lnSpc>
@@ -33960,69 +39133,33 @@
                 <a:spcPct val="0"/>
               </a:spcBef>
               <a:buClr>
-                <a:srgbClr val="00B050"/>
+                <a:schemeClr val="tx2"/>
               </a:buClr>
               <a:buSzTx/>
-              <a:buFont typeface="Arial" panose="020B0604020202020204" pitchFamily="34" charset="0"/>
-              <a:buChar char="•"/>
+              <a:buFont typeface="Courier New" panose="02070309020205020404" pitchFamily="49" charset="0"/>
+              <a:buChar char="o"/>
             </a:pPr>
-            <a:r>
-              <a:rPr kumimoji="0" lang="ar-SA" altLang="en-US" sz="1800" b="0" i="0" u="none" strike="noStrike" cap="none" normalizeH="0" baseline="0" dirty="0">
-                <a:ln>
-                  <a:noFill/>
-                </a:ln>
-                <a:solidFill>
-                  <a:schemeClr val="tx1"/>
-                </a:solidFill>
-                <a:effectLst/>
-                <a:latin typeface="Arial" panose="020B0604020202020204" pitchFamily="34" charset="0"/>
-                <a:cs typeface="B Nazanin" panose="00000400000000000000" pitchFamily="2" charset="-78"/>
-              </a:rPr>
-              <a:t>نوارها فقط دسترسی ترتیبی</a:t>
-            </a:r>
-            <a:r>
-              <a:rPr kumimoji="0" lang="en-US" altLang="en-US" sz="1800" b="0" i="0" u="none" strike="noStrike" cap="none" normalizeH="0" baseline="0" dirty="0">
-                <a:ln>
-                  <a:noFill/>
-                </a:ln>
-                <a:solidFill>
-                  <a:schemeClr val="tx1"/>
-                </a:solidFill>
-                <a:effectLst/>
-                <a:latin typeface="Arial" panose="020B0604020202020204" pitchFamily="34" charset="0"/>
-                <a:cs typeface="B Nazanin" panose="00000400000000000000" pitchFamily="2" charset="-78"/>
-              </a:rPr>
-              <a:t> (sequential access) </a:t>
-            </a:r>
-            <a:r>
-              <a:rPr kumimoji="0" lang="ar-SA" altLang="en-US" sz="1800" b="0" i="0" u="none" strike="noStrike" cap="none" normalizeH="0" baseline="0" dirty="0">
-                <a:ln>
-                  <a:noFill/>
-                </a:ln>
-                <a:solidFill>
-                  <a:schemeClr val="tx1"/>
-                </a:solidFill>
-                <a:effectLst/>
-                <a:latin typeface="Arial" panose="020B0604020202020204" pitchFamily="34" charset="0"/>
-                <a:cs typeface="B Nazanin" panose="00000400000000000000" pitchFamily="2" charset="-78"/>
-              </a:rPr>
-              <a:t>را فراهم می‌کردند</a:t>
-            </a:r>
-            <a:r>
-              <a:rPr kumimoji="0" lang="fa-IR" altLang="en-US" sz="1800" b="0" i="0" u="none" strike="noStrike" cap="none" normalizeH="0" baseline="0" dirty="0">
-                <a:ln>
-                  <a:noFill/>
-                </a:ln>
-                <a:solidFill>
-                  <a:schemeClr val="tx1"/>
-                </a:solidFill>
-                <a:effectLst/>
-                <a:latin typeface="Arial" panose="020B0604020202020204" pitchFamily="34" charset="0"/>
-                <a:cs typeface="B Nazanin" panose="00000400000000000000" pitchFamily="2" charset="-78"/>
-              </a:rPr>
-              <a:t>.</a:t>
-            </a:r>
-            <a:endParaRPr kumimoji="0" lang="en-US" altLang="en-US" sz="1800" b="0" i="0" u="none" strike="noStrike" cap="none" normalizeH="0" baseline="0" dirty="0">
+            <a:endParaRPr kumimoji="0" lang="fa-IR" altLang="en-US" sz="1800" dirty="0">
+              <a:latin typeface="Arial" panose="020B0604020202020204" pitchFamily="34" charset="0"/>
+              <a:cs typeface="B Nazanin" panose="00000400000000000000" pitchFamily="2" charset="-78"/>
+            </a:endParaRPr>
+          </a:p>
+          <a:p>
+            <a:pPr lvl="1" algn="r" rtl="1">
+              <a:lnSpc>
+                <a:spcPct val="150000"/>
+              </a:lnSpc>
+              <a:spcBef>
+                <a:spcPct val="0"/>
+              </a:spcBef>
+              <a:buClr>
+                <a:schemeClr val="tx2"/>
+              </a:buClr>
+              <a:buSzTx/>
+              <a:buFont typeface="Courier New" panose="02070309020205020404" pitchFamily="49" charset="0"/>
+              <a:buChar char="o"/>
+            </a:pPr>
+            <a:endParaRPr kumimoji="0" lang="fa-IR" altLang="en-US" sz="1800" b="0" i="0" u="none" strike="noStrike" cap="none" normalizeH="0" baseline="0" dirty="0">
               <a:ln>
                 <a:noFill/>
               </a:ln>
@@ -34033,78 +39170,6 @@
               <a:latin typeface="Arial" panose="020B0604020202020204" pitchFamily="34" charset="0"/>
               <a:cs typeface="B Nazanin" panose="00000400000000000000" pitchFamily="2" charset="-78"/>
             </a:endParaRPr>
-          </a:p>
-          <a:p>
-            <a:pPr lvl="1" algn="r" rtl="1">
-              <a:lnSpc>
-                <a:spcPct val="150000"/>
-              </a:lnSpc>
-              <a:spcBef>
-                <a:spcPct val="0"/>
-              </a:spcBef>
-              <a:buClr>
-                <a:schemeClr val="tx2"/>
-              </a:buClr>
-              <a:buSzTx/>
-              <a:buFont typeface="Courier New" panose="02070309020205020404" pitchFamily="49" charset="0"/>
-              <a:buChar char="o"/>
-            </a:pPr>
-            <a:r>
-              <a:rPr kumimoji="0" lang="ar-SA" altLang="en-US" sz="1800" b="0" i="0" u="none" strike="noStrike" cap="none" normalizeH="0" baseline="0" dirty="0">
-                <a:ln>
-                  <a:noFill/>
-                </a:ln>
-                <a:solidFill>
-                  <a:schemeClr val="tx1"/>
-                </a:solidFill>
-                <a:effectLst/>
-                <a:latin typeface="Arial" panose="020B0604020202020204" pitchFamily="34" charset="0"/>
-                <a:cs typeface="B Nazanin" panose="00000400000000000000" pitchFamily="2" charset="-78"/>
-              </a:rPr>
-              <a:t>کارت‌های سوراخ‌دار</a:t>
-            </a:r>
-            <a:r>
-              <a:rPr kumimoji="0" lang="en-US" altLang="en-US" sz="1800" b="0" i="0" u="none" strike="noStrike" cap="none" normalizeH="0" baseline="0" dirty="0">
-                <a:ln>
-                  <a:noFill/>
-                </a:ln>
-                <a:solidFill>
-                  <a:schemeClr val="tx1"/>
-                </a:solidFill>
-                <a:effectLst/>
-                <a:latin typeface="Arial" panose="020B0604020202020204" pitchFamily="34" charset="0"/>
-                <a:cs typeface="B Nazanin" panose="00000400000000000000" pitchFamily="2" charset="-78"/>
-              </a:rPr>
-              <a:t> (Punched cards) </a:t>
-            </a:r>
-            <a:r>
-              <a:rPr kumimoji="0" lang="ar-SA" altLang="en-US" sz="1800" b="0" i="0" u="none" strike="noStrike" cap="none" normalizeH="0" baseline="0" dirty="0">
-                <a:ln>
-                  <a:noFill/>
-                </a:ln>
-                <a:solidFill>
-                  <a:schemeClr val="tx1"/>
-                </a:solidFill>
-                <a:effectLst/>
-                <a:latin typeface="Arial" panose="020B0604020202020204" pitchFamily="34" charset="0"/>
-                <a:cs typeface="B Nazanin" panose="00000400000000000000" pitchFamily="2" charset="-78"/>
-              </a:rPr>
-              <a:t>برای ورودی</a:t>
-            </a:r>
-            <a:r>
-              <a:rPr kumimoji="0" lang="fa-IR" altLang="en-US" sz="1800" b="0" i="0" u="none" strike="noStrike" cap="none" normalizeH="0" baseline="0" dirty="0">
-                <a:ln>
-                  <a:noFill/>
-                </a:ln>
-                <a:solidFill>
-                  <a:schemeClr val="tx1"/>
-                </a:solidFill>
-                <a:effectLst/>
-                <a:latin typeface="Arial" panose="020B0604020202020204" pitchFamily="34" charset="0"/>
-                <a:cs typeface="B Nazanin" panose="00000400000000000000" pitchFamily="2" charset="-78"/>
-              </a:rPr>
-              <a:t>.</a:t>
-            </a:r>
           </a:p>
           <a:p>
             <a:pPr lvl="1" algn="r" rtl="1">
@@ -34876,6 +39941,245 @@
               <a:latin typeface="Arial" panose="020B0604020202020204" pitchFamily="34" charset="0"/>
               <a:cs typeface="B Nazanin" panose="00000400000000000000" pitchFamily="2" charset="-78"/>
             </a:endParaRPr>
+          </a:p>
+        </p:txBody>
+      </p:sp>
+      <p:sp>
+        <p:nvSpPr>
+          <p:cNvPr id="5" name="TextBox 4">
+            <a:extLst>
+              <a:ext uri="{FF2B5EF4-FFF2-40B4-BE49-F238E27FC236}">
+                <a16:creationId xmlns:a16="http://schemas.microsoft.com/office/drawing/2014/main" id="{7708B02C-A4CB-CCD1-EC95-524D7DBEF23E}"/>
+              </a:ext>
+            </a:extLst>
+          </p:cNvPr>
+          <p:cNvSpPr txBox="1"/>
+          <p:nvPr/>
+        </p:nvSpPr>
+        <p:spPr>
+          <a:xfrm>
+            <a:off x="3589963" y="1229322"/>
+            <a:ext cx="5428582" cy="1538883"/>
+          </a:xfrm>
+          <a:prstGeom prst="rect">
+            <a:avLst/>
+          </a:prstGeom>
+          <a:noFill/>
+        </p:spPr>
+        <p:txBody>
+          <a:bodyPr wrap="square">
+            <a:spAutoFit/>
+          </a:bodyPr>
+          <a:lstStyle/>
+          <a:p>
+            <a:pPr lvl="1" algn="r" rtl="1">
+              <a:lnSpc>
+                <a:spcPct val="150000"/>
+              </a:lnSpc>
+              <a:spcBef>
+                <a:spcPct val="0"/>
+              </a:spcBef>
+              <a:buClr>
+                <a:schemeClr val="tx2"/>
+              </a:buClr>
+              <a:buSzTx/>
+              <a:buFont typeface="Courier New" panose="02070309020205020404" pitchFamily="49" charset="0"/>
+              <a:buChar char="o"/>
+            </a:pPr>
+            <a:r>
+              <a:rPr kumimoji="0" lang="ar-SA" altLang="en-US" b="0" i="0" u="none" strike="noStrike" cap="none" normalizeH="0" baseline="0" dirty="0">
+                <a:ln>
+                  <a:noFill/>
+                </a:ln>
+                <a:solidFill>
+                  <a:schemeClr val="tx1"/>
+                </a:solidFill>
+                <a:effectLst/>
+                <a:latin typeface="Arial" panose="020B0604020202020204" pitchFamily="34" charset="0"/>
+                <a:cs typeface="B Nazanin" panose="00000400000000000000" pitchFamily="2" charset="-78"/>
+              </a:rPr>
+              <a:t>پردازش داده با استفاده از نوارهای مغناطیسی برای ذخیره‌سازی</a:t>
+            </a:r>
+            <a:r>
+              <a:rPr kumimoji="0" lang="fa-IR" altLang="en-US" b="0" i="0" u="none" strike="noStrike" cap="none" normalizeH="0" baseline="0" dirty="0">
+                <a:ln>
+                  <a:noFill/>
+                </a:ln>
+                <a:solidFill>
+                  <a:schemeClr val="tx1"/>
+                </a:solidFill>
+                <a:effectLst/>
+                <a:latin typeface="Arial" panose="020B0604020202020204" pitchFamily="34" charset="0"/>
+                <a:cs typeface="B Nazanin" panose="00000400000000000000" pitchFamily="2" charset="-78"/>
+              </a:rPr>
+              <a:t>.</a:t>
+            </a:r>
+            <a:endParaRPr kumimoji="0" lang="en-US" altLang="en-US" b="0" i="0" u="none" strike="noStrike" cap="none" normalizeH="0" baseline="0" dirty="0">
+              <a:ln>
+                <a:noFill/>
+              </a:ln>
+              <a:solidFill>
+                <a:schemeClr val="tx1"/>
+              </a:solidFill>
+              <a:effectLst/>
+              <a:latin typeface="Arial" panose="020B0604020202020204" pitchFamily="34" charset="0"/>
+              <a:cs typeface="B Nazanin" panose="00000400000000000000" pitchFamily="2" charset="-78"/>
+            </a:endParaRPr>
+          </a:p>
+          <a:p>
+            <a:pPr lvl="2" algn="r" rtl="1">
+              <a:lnSpc>
+                <a:spcPct val="150000"/>
+              </a:lnSpc>
+              <a:spcBef>
+                <a:spcPct val="0"/>
+              </a:spcBef>
+              <a:buClr>
+                <a:srgbClr val="00B050"/>
+              </a:buClr>
+              <a:buSzTx/>
+              <a:buFont typeface="Arial" panose="020B0604020202020204" pitchFamily="34" charset="0"/>
+              <a:buChar char="•"/>
+            </a:pPr>
+            <a:r>
+              <a:rPr kumimoji="0" lang="ar-SA" altLang="en-US" b="0" i="0" u="none" strike="noStrike" cap="none" normalizeH="0" baseline="0" dirty="0">
+                <a:ln>
+                  <a:noFill/>
+                </a:ln>
+                <a:solidFill>
+                  <a:schemeClr val="tx1"/>
+                </a:solidFill>
+                <a:effectLst/>
+                <a:latin typeface="Arial" panose="020B0604020202020204" pitchFamily="34" charset="0"/>
+                <a:cs typeface="B Nazanin" panose="00000400000000000000" pitchFamily="2" charset="-78"/>
+              </a:rPr>
+              <a:t>نوارها فقط دسترسی ترتیبی</a:t>
+            </a:r>
+            <a:r>
+              <a:rPr kumimoji="0" lang="en-US" altLang="en-US" b="0" i="0" u="none" strike="noStrike" cap="none" normalizeH="0" baseline="0" dirty="0">
+                <a:ln>
+                  <a:noFill/>
+                </a:ln>
+                <a:solidFill>
+                  <a:schemeClr val="tx1"/>
+                </a:solidFill>
+                <a:effectLst/>
+                <a:latin typeface="Arial" panose="020B0604020202020204" pitchFamily="34" charset="0"/>
+                <a:cs typeface="B Nazanin" panose="00000400000000000000" pitchFamily="2" charset="-78"/>
+              </a:rPr>
+              <a:t> (sequential access) </a:t>
+            </a:r>
+            <a:r>
+              <a:rPr kumimoji="0" lang="ar-SA" altLang="en-US" b="0" i="0" u="none" strike="noStrike" cap="none" normalizeH="0" baseline="0" dirty="0">
+                <a:ln>
+                  <a:noFill/>
+                </a:ln>
+                <a:solidFill>
+                  <a:schemeClr val="tx1"/>
+                </a:solidFill>
+                <a:effectLst/>
+                <a:latin typeface="Arial" panose="020B0604020202020204" pitchFamily="34" charset="0"/>
+                <a:cs typeface="B Nazanin" panose="00000400000000000000" pitchFamily="2" charset="-78"/>
+              </a:rPr>
+              <a:t>را فراهم می‌کردند</a:t>
+            </a:r>
+            <a:r>
+              <a:rPr kumimoji="0" lang="fa-IR" altLang="en-US" b="0" i="0" u="none" strike="noStrike" cap="none" normalizeH="0" baseline="0" dirty="0">
+                <a:ln>
+                  <a:noFill/>
+                </a:ln>
+                <a:solidFill>
+                  <a:schemeClr val="tx1"/>
+                </a:solidFill>
+                <a:effectLst/>
+                <a:latin typeface="Arial" panose="020B0604020202020204" pitchFamily="34" charset="0"/>
+                <a:cs typeface="B Nazanin" panose="00000400000000000000" pitchFamily="2" charset="-78"/>
+              </a:rPr>
+              <a:t>.</a:t>
+            </a:r>
+            <a:endParaRPr kumimoji="0" lang="en-US" altLang="en-US" b="0" i="0" u="none" strike="noStrike" cap="none" normalizeH="0" baseline="0" dirty="0">
+              <a:ln>
+                <a:noFill/>
+              </a:ln>
+              <a:solidFill>
+                <a:schemeClr val="tx1"/>
+              </a:solidFill>
+              <a:effectLst/>
+              <a:latin typeface="Arial" panose="020B0604020202020204" pitchFamily="34" charset="0"/>
+              <a:cs typeface="B Nazanin" panose="00000400000000000000" pitchFamily="2" charset="-78"/>
+            </a:endParaRPr>
+          </a:p>
+          <a:p>
+            <a:pPr lvl="1" algn="r" rtl="1">
+              <a:lnSpc>
+                <a:spcPct val="150000"/>
+              </a:lnSpc>
+              <a:spcBef>
+                <a:spcPct val="0"/>
+              </a:spcBef>
+              <a:buClr>
+                <a:schemeClr val="tx2"/>
+              </a:buClr>
+              <a:buSzTx/>
+              <a:buFont typeface="Courier New" panose="02070309020205020404" pitchFamily="49" charset="0"/>
+              <a:buChar char="o"/>
+            </a:pPr>
+            <a:r>
+              <a:rPr kumimoji="0" lang="ar-SA" altLang="en-US" b="0" i="0" u="none" strike="noStrike" cap="none" normalizeH="0" baseline="0" dirty="0">
+                <a:ln>
+                  <a:noFill/>
+                </a:ln>
+                <a:solidFill>
+                  <a:schemeClr val="tx1"/>
+                </a:solidFill>
+                <a:effectLst/>
+                <a:latin typeface="Arial" panose="020B0604020202020204" pitchFamily="34" charset="0"/>
+                <a:cs typeface="B Nazanin" panose="00000400000000000000" pitchFamily="2" charset="-78"/>
+              </a:rPr>
+              <a:t>کارت‌های سوراخ‌دار</a:t>
+            </a:r>
+            <a:r>
+              <a:rPr kumimoji="0" lang="en-US" altLang="en-US" b="0" i="0" u="none" strike="noStrike" cap="none" normalizeH="0" baseline="0" dirty="0">
+                <a:ln>
+                  <a:noFill/>
+                </a:ln>
+                <a:solidFill>
+                  <a:schemeClr val="tx1"/>
+                </a:solidFill>
+                <a:effectLst/>
+                <a:latin typeface="Arial" panose="020B0604020202020204" pitchFamily="34" charset="0"/>
+                <a:cs typeface="B Nazanin" panose="00000400000000000000" pitchFamily="2" charset="-78"/>
+              </a:rPr>
+              <a:t> (Punched cards) </a:t>
+            </a:r>
+            <a:r>
+              <a:rPr kumimoji="0" lang="ar-SA" altLang="en-US" b="0" i="0" u="none" strike="noStrike" cap="none" normalizeH="0" baseline="0" dirty="0">
+                <a:ln>
+                  <a:noFill/>
+                </a:ln>
+                <a:solidFill>
+                  <a:schemeClr val="tx1"/>
+                </a:solidFill>
+                <a:effectLst/>
+                <a:latin typeface="Arial" panose="020B0604020202020204" pitchFamily="34" charset="0"/>
+                <a:cs typeface="B Nazanin" panose="00000400000000000000" pitchFamily="2" charset="-78"/>
+              </a:rPr>
+              <a:t>برای ورودی</a:t>
+            </a:r>
+            <a:r>
+              <a:rPr kumimoji="0" lang="fa-IR" altLang="en-US" b="0" i="0" u="none" strike="noStrike" cap="none" normalizeH="0" baseline="0" dirty="0">
+                <a:ln>
+                  <a:noFill/>
+                </a:ln>
+                <a:solidFill>
+                  <a:schemeClr val="tx1"/>
+                </a:solidFill>
+                <a:effectLst/>
+                <a:latin typeface="Arial" panose="020B0604020202020204" pitchFamily="34" charset="0"/>
+                <a:cs typeface="B Nazanin" panose="00000400000000000000" pitchFamily="2" charset="-78"/>
+              </a:rPr>
+              <a:t>.</a:t>
+            </a:r>
           </a:p>
         </p:txBody>
       </p:sp>

--- a/courses/downloads/temp/Database_Lec1.pptx
+++ b/courses/downloads/temp/Database_Lec1.pptx
@@ -4449,6 +4449,372 @@
               <a:rPr lang="en-US" dirty="0"/>
               <a:t>); END;</a:t>
             </a:r>
+          </a:p>
+          <a:p>
+            <a:endParaRPr lang="en-US" altLang="en-US" dirty="0">
+              <a:latin typeface="Times New Roman" panose="02020603050405020304" pitchFamily="18" charset="0"/>
+            </a:endParaRPr>
+          </a:p>
+          <a:p>
+            <a:pPr algn="r" rtl="1"/>
+            <a:r>
+              <a:rPr lang="en-US" b="1" dirty="0" err="1"/>
+              <a:t>ماشین</a:t>
+            </a:r>
+            <a:r>
+              <a:rPr lang="en-US" b="1" dirty="0"/>
+              <a:t> </a:t>
+            </a:r>
+            <a:r>
+              <a:rPr lang="en-US" b="1" dirty="0" err="1"/>
+              <a:t>تورینگ</a:t>
+            </a:r>
+            <a:r>
+              <a:rPr lang="en-US" b="1" dirty="0"/>
+              <a:t> </a:t>
+            </a:r>
+            <a:r>
+              <a:rPr lang="en-US" b="1" dirty="0" err="1"/>
+              <a:t>چیست</a:t>
+            </a:r>
+            <a:r>
+              <a:rPr lang="en-US" b="1" dirty="0"/>
+              <a:t>؟</a:t>
+            </a:r>
+          </a:p>
+          <a:p>
+            <a:pPr algn="r" rtl="1"/>
+            <a:r>
+              <a:rPr lang="en-US" dirty="0" err="1"/>
+              <a:t>ماشین</a:t>
+            </a:r>
+            <a:r>
+              <a:rPr lang="en-US" dirty="0"/>
+              <a:t> </a:t>
+            </a:r>
+            <a:r>
+              <a:rPr lang="en-US" dirty="0" err="1"/>
+              <a:t>تورینگ</a:t>
+            </a:r>
+            <a:r>
+              <a:rPr lang="en-US" dirty="0"/>
+              <a:t> </a:t>
+            </a:r>
+            <a:r>
+              <a:rPr lang="en-US" dirty="0" err="1"/>
+              <a:t>یک</a:t>
+            </a:r>
+            <a:r>
+              <a:rPr lang="en-US" dirty="0"/>
+              <a:t> </a:t>
+            </a:r>
+            <a:r>
+              <a:rPr lang="en-US" dirty="0" err="1"/>
+              <a:t>مدل</a:t>
+            </a:r>
+            <a:r>
+              <a:rPr lang="en-US" dirty="0"/>
+              <a:t> </a:t>
+            </a:r>
+            <a:r>
+              <a:rPr lang="en-US" dirty="0" err="1"/>
+              <a:t>نظری</a:t>
+            </a:r>
+            <a:r>
+              <a:rPr lang="en-US" dirty="0"/>
+              <a:t> </a:t>
+            </a:r>
+            <a:r>
+              <a:rPr lang="en-US" dirty="0" err="1"/>
+              <a:t>از</a:t>
+            </a:r>
+            <a:r>
+              <a:rPr lang="en-US" dirty="0"/>
+              <a:t> </a:t>
+            </a:r>
+            <a:r>
+              <a:rPr lang="en-US" dirty="0" err="1"/>
+              <a:t>کامپیوتر</a:t>
+            </a:r>
+            <a:r>
+              <a:rPr lang="en-US" dirty="0"/>
+              <a:t> </a:t>
+            </a:r>
+            <a:r>
+              <a:rPr lang="en-US" dirty="0" err="1"/>
+              <a:t>است</a:t>
+            </a:r>
+            <a:r>
+              <a:rPr lang="en-US" dirty="0"/>
+              <a:t> </a:t>
+            </a:r>
+            <a:r>
+              <a:rPr lang="en-US" dirty="0" err="1"/>
+              <a:t>که</a:t>
+            </a:r>
+            <a:r>
+              <a:rPr lang="en-US" dirty="0"/>
+              <a:t> </a:t>
+            </a:r>
+            <a:r>
+              <a:rPr lang="en-US" dirty="0" err="1"/>
+              <a:t>می‌تواند</a:t>
+            </a:r>
+            <a:r>
+              <a:rPr lang="en-US" dirty="0"/>
+              <a:t>، </a:t>
+            </a:r>
+            <a:r>
+              <a:rPr lang="en-US" dirty="0" err="1"/>
+              <a:t>در</a:t>
+            </a:r>
+            <a:r>
+              <a:rPr lang="en-US" dirty="0"/>
+              <a:t> </a:t>
+            </a:r>
+            <a:r>
+              <a:rPr lang="en-US" dirty="0" err="1"/>
+              <a:t>اصل</a:t>
+            </a:r>
+            <a:r>
+              <a:rPr lang="en-US" dirty="0"/>
+              <a:t>، </a:t>
+            </a:r>
+            <a:r>
+              <a:rPr lang="en-US" b="1" dirty="0" err="1"/>
+              <a:t>هر</a:t>
+            </a:r>
+            <a:r>
+              <a:rPr lang="en-US" b="1" dirty="0"/>
+              <a:t> </a:t>
+            </a:r>
+            <a:r>
+              <a:rPr lang="en-US" b="1" dirty="0" err="1"/>
+              <a:t>محاسبه</a:t>
+            </a:r>
+            <a:r>
+              <a:rPr lang="en-US" b="1" dirty="0"/>
+              <a:t> </a:t>
+            </a:r>
+            <a:r>
+              <a:rPr lang="en-US" b="1" dirty="0" err="1"/>
+              <a:t>قابل‌محاسبه‌ای</a:t>
+            </a:r>
+            <a:r>
+              <a:rPr lang="en-US" dirty="0"/>
+              <a:t> </a:t>
+            </a:r>
+            <a:r>
+              <a:rPr lang="en-US" dirty="0" err="1"/>
+              <a:t>را</a:t>
+            </a:r>
+            <a:r>
+              <a:rPr lang="en-US" dirty="0"/>
+              <a:t> </a:t>
+            </a:r>
+            <a:r>
+              <a:rPr lang="en-US" dirty="0" err="1"/>
+              <a:t>انجام</a:t>
+            </a:r>
+            <a:r>
+              <a:rPr lang="en-US" dirty="0"/>
+              <a:t> </a:t>
+            </a:r>
+            <a:r>
+              <a:rPr lang="en-US" dirty="0" err="1"/>
+              <a:t>دهد</a:t>
+            </a:r>
+            <a:r>
+              <a:rPr lang="en-US" dirty="0"/>
+              <a:t>؛ </a:t>
+            </a:r>
+            <a:r>
+              <a:rPr lang="en-US" dirty="0" err="1"/>
+              <a:t>مثلاً</a:t>
+            </a:r>
+            <a:r>
+              <a:rPr lang="en-US" dirty="0"/>
+              <a:t>:</a:t>
+            </a:r>
+          </a:p>
+          <a:p>
+            <a:pPr lvl="0" algn="r" rtl="1"/>
+            <a:r>
+              <a:rPr lang="en-US" dirty="0" err="1"/>
+              <a:t>حلقه‌های</a:t>
+            </a:r>
+            <a:r>
+              <a:rPr lang="en-US" dirty="0"/>
+              <a:t> </a:t>
+            </a:r>
+            <a:r>
+              <a:rPr lang="en-US" dirty="0" err="1"/>
+              <a:t>نامحدود</a:t>
+            </a:r>
+            <a:r>
+              <a:rPr lang="en-US" dirty="0"/>
+              <a:t> </a:t>
+            </a:r>
+            <a:r>
+              <a:rPr lang="en-US" dirty="0" err="1"/>
+              <a:t>اجرا</a:t>
+            </a:r>
+            <a:r>
+              <a:rPr lang="en-US" dirty="0"/>
+              <a:t> </a:t>
+            </a:r>
+            <a:r>
+              <a:rPr lang="en-US" dirty="0" err="1"/>
+              <a:t>کند</a:t>
+            </a:r>
+            <a:r>
+              <a:rPr lang="en-US" dirty="0"/>
+              <a:t>. </a:t>
+            </a:r>
+          </a:p>
+          <a:p>
+            <a:pPr lvl="0" algn="r" rtl="1"/>
+            <a:r>
+              <a:rPr lang="en-US" dirty="0" err="1"/>
+              <a:t>محاسبات</a:t>
+            </a:r>
+            <a:r>
+              <a:rPr lang="en-US" dirty="0"/>
+              <a:t> </a:t>
+            </a:r>
+            <a:r>
+              <a:rPr lang="en-US" dirty="0" err="1"/>
+              <a:t>پیچیده</a:t>
+            </a:r>
+            <a:r>
+              <a:rPr lang="en-US" dirty="0"/>
+              <a:t> و </a:t>
+            </a:r>
+            <a:r>
+              <a:rPr lang="en-US" dirty="0" err="1"/>
+              <a:t>الگوریتم‌های</a:t>
+            </a:r>
+            <a:r>
+              <a:rPr lang="en-US" dirty="0"/>
+              <a:t> </a:t>
+            </a:r>
+            <a:r>
+              <a:rPr lang="en-US" dirty="0" err="1"/>
+              <a:t>دلخواه</a:t>
+            </a:r>
+            <a:r>
+              <a:rPr lang="en-US" dirty="0"/>
+              <a:t> </a:t>
+            </a:r>
+            <a:r>
+              <a:rPr lang="en-US" dirty="0" err="1"/>
+              <a:t>را</a:t>
+            </a:r>
+            <a:r>
+              <a:rPr lang="en-US" dirty="0"/>
+              <a:t> </a:t>
+            </a:r>
+            <a:r>
+              <a:rPr lang="en-US" dirty="0" err="1"/>
+              <a:t>اجرا</a:t>
+            </a:r>
+            <a:r>
+              <a:rPr lang="en-US" dirty="0"/>
+              <a:t> </a:t>
+            </a:r>
+            <a:r>
+              <a:rPr lang="en-US" dirty="0" err="1"/>
+              <a:t>کند</a:t>
+            </a:r>
+            <a:r>
+              <a:rPr lang="en-US" dirty="0"/>
+              <a:t>. </a:t>
+            </a:r>
+          </a:p>
+          <a:p>
+            <a:pPr lvl="0" algn="r" rtl="1"/>
+            <a:r>
+              <a:rPr lang="en-US" dirty="0" err="1"/>
+              <a:t>بر</a:t>
+            </a:r>
+            <a:r>
+              <a:rPr lang="en-US" dirty="0"/>
+              <a:t> </a:t>
+            </a:r>
+            <a:r>
+              <a:rPr lang="en-US" dirty="0" err="1"/>
+              <a:t>اساس</a:t>
+            </a:r>
+            <a:r>
+              <a:rPr lang="en-US" dirty="0"/>
+              <a:t> </a:t>
+            </a:r>
+            <a:r>
+              <a:rPr lang="en-US" dirty="0" err="1"/>
+              <a:t>وضعیت</a:t>
+            </a:r>
+            <a:r>
+              <a:rPr lang="en-US" dirty="0"/>
+              <a:t> </a:t>
+            </a:r>
+            <a:r>
+              <a:rPr lang="en-US" dirty="0" err="1"/>
+              <a:t>فعلی</a:t>
+            </a:r>
+            <a:r>
+              <a:rPr lang="en-US" dirty="0"/>
+              <a:t>، </a:t>
+            </a:r>
+            <a:r>
+              <a:rPr lang="en-US" dirty="0" err="1"/>
+              <a:t>تصمیم</a:t>
+            </a:r>
+            <a:r>
+              <a:rPr lang="en-US" dirty="0"/>
+              <a:t> </a:t>
+            </a:r>
+            <a:r>
+              <a:rPr lang="en-US" dirty="0" err="1"/>
+              <a:t>بگیرد</a:t>
+            </a:r>
+            <a:r>
+              <a:rPr lang="en-US" dirty="0"/>
+              <a:t> </a:t>
+            </a:r>
+            <a:r>
+              <a:rPr lang="en-US" dirty="0" err="1"/>
+              <a:t>مرحله</a:t>
+            </a:r>
+            <a:r>
+              <a:rPr lang="en-US" dirty="0"/>
+              <a:t> </a:t>
+            </a:r>
+            <a:r>
+              <a:rPr lang="en-US" dirty="0" err="1"/>
+              <a:t>بعد</a:t>
+            </a:r>
+            <a:r>
+              <a:rPr lang="en-US" dirty="0"/>
+              <a:t> </a:t>
+            </a:r>
+            <a:r>
+              <a:rPr lang="en-US" dirty="0" err="1"/>
+              <a:t>چه</a:t>
+            </a:r>
+            <a:r>
+              <a:rPr lang="en-US" dirty="0"/>
+              <a:t> </a:t>
+            </a:r>
+            <a:r>
+              <a:rPr lang="en-US" dirty="0" err="1"/>
+              <a:t>باشد</a:t>
+            </a:r>
+            <a:r>
+              <a:rPr lang="en-US" dirty="0"/>
+              <a:t>.</a:t>
+            </a:r>
+          </a:p>
+          <a:p>
             <a:endParaRPr lang="en-US" altLang="en-US" dirty="0">
               <a:latin typeface="Times New Roman" panose="02020603050405020304" pitchFamily="18" charset="0"/>
             </a:endParaRPr>
